--- a/output/港大经管上海中心_外滩产业课堂_联合策划方案.pptx
+++ b/output/港大经管上海中心_外滩产业课堂_联合策划方案.pptx
@@ -17,6 +17,7 @@
     <p:sldId id="265" r:id="rId16"/>
     <p:sldId id="266" r:id="rId17"/>
     <p:sldId id="267" r:id="rId18"/>
+    <p:sldId id="268" r:id="rId19"/>
   </p:sldIdLst>
   <p:sldSz cx="12191695" cy="6858000" type="screen4x3"/>
   <p:notesSz cx="6858000" cy="9144000"/>
@@ -3290,7 +3291,7 @@
                 <a:latin typeface="微软雅黑"/>
                 <a:ea typeface="微软雅黑"/>
               </a:rPr>
-              <a:t>外滩·产业课堂</a:t>
+              <a:t>外滩·出海课堂</a:t>
             </a:r>
           </a:p>
         </p:txBody>
@@ -3326,7 +3327,7 @@
                 <a:latin typeface="微软雅黑"/>
                 <a:ea typeface="微软雅黑"/>
               </a:rPr>
-              <a:t>港大经管上海中心 × 上海产业 联合招生策划</a:t>
+              <a:t>港大经管上海中心 × 上海产业  出海联合策划</a:t>
             </a:r>
           </a:p>
         </p:txBody>
@@ -3406,7 +3407,7 @@
                 <a:latin typeface="微软雅黑"/>
                 <a:ea typeface="微软雅黑"/>
               </a:rPr>
-              <a:t>不把外滩中心做成宣讲会会场，而做成可持续出 EMBA 生源的产业课堂：港大讲全球视野与学位通道，我方送进对的产业高管；先收一笔前期策划费，把 90 天和首场锁住。</a:t>
+              <a:t>出海是港大点名的合作赛道。先让上海中心主任到高质量的场有直观感受，再把外滩课堂做成 EMBA 粘性；先收一笔前期策划费，90 天把这两件事锁住。</a:t>
             </a:r>
           </a:p>
         </p:txBody>
@@ -3442,8 +3443,8 @@
                 <a:latin typeface="微软雅黑"/>
                 <a:ea typeface="微软雅黑"/>
               </a:rPr>
-              <a:t>致：潘嘉琰  招生官（华东 · EMBA）
-复旦大学住房政策研究中心、上海市杨浦区科技企业联合会  |  V1.0 建议稿  |  2026年9月</a:t>
+              <a:t>致：潘嘉琰  华东华中 EMBA 招生与市场（经管上海中心平台）
+复旦大学住房政策研究中心、上海市杨浦区科技企业联合会  |  V1.1 建议稿  |  2026年9月</a:t>
             </a:r>
           </a:p>
         </p:txBody>
@@ -3621,7 +3622,7 @@
                 <a:latin typeface="微软雅黑"/>
                 <a:ea typeface="微软雅黑"/>
               </a:rPr>
-              <a:t>商业结构：只收一笔前期费用</a:t>
+              <a:t>分工：招生官做粘性，主任入口另走一层</a:t>
             </a:r>
           </a:p>
         </p:txBody>
@@ -3657,7 +3658,7 @@
                 <a:latin typeface="微软雅黑"/>
                 <a:ea typeface="微软雅黑"/>
               </a:rPr>
-              <a:t>10/12</a:t>
+              <a:t>10/13</a:t>
             </a:r>
           </a:p>
         </p:txBody>
@@ -3670,13 +3671,57 @@
         </p:nvSpPr>
         <p:spPr>
           <a:xfrm>
-            <a:off x="457200" y="1188720"/>
-            <a:ext cx="11247120" cy="1417320"/>
+            <a:off x="457200" y="1280160"/>
+            <a:ext cx="5623560" cy="4892040"/>
           </a:xfrm>
           <a:prstGeom prst="roundRect">
             <a:avLst>
               <a:gd name="adj" fmla="val 8000"/>
             </a:avLst>
+          </a:prstGeom>
+          <a:solidFill>
+            <a:srgbClr val="FFFFFF"/>
+          </a:solidFill>
+          <a:ln>
+            <a:noFill/>
+          </a:ln>
+          <a:effectLst/>
+        </p:spPr>
+        <p:style>
+          <a:lnRef idx="1">
+            <a:schemeClr val="accent1"/>
+          </a:lnRef>
+          <a:fillRef idx="3">
+            <a:schemeClr val="accent1"/>
+          </a:fillRef>
+          <a:effectRef idx="2">
+            <a:schemeClr val="accent1"/>
+          </a:effectRef>
+          <a:fontRef idx="minor">
+            <a:schemeClr val="lt1"/>
+          </a:fontRef>
+        </p:style>
+        <p:txBody>
+          <a:bodyPr rtlCol="0" anchor="ctr"/>
+          <a:lstStyle/>
+          <a:p>
+            <a:pPr algn="ctr"/>
+          </a:p>
+        </p:txBody>
+      </p:sp>
+      <p:sp>
+        <p:nvSpPr>
+          <p:cNvPr id="7" name="Rectangle 6"/>
+          <p:cNvSpPr/>
+          <p:nvPr/>
+        </p:nvSpPr>
+        <p:spPr>
+          <a:xfrm>
+            <a:off x="457200" y="1280160"/>
+            <a:ext cx="5623560" cy="640080"/>
+          </a:xfrm>
+          <a:prstGeom prst="rect">
+            <a:avLst/>
           </a:prstGeom>
           <a:solidFill>
             <a:srgbClr val="003D2E"/>
@@ -3710,73 +3755,36 @@
       </p:sp>
       <p:sp>
         <p:nvSpPr>
-          <p:cNvPr id="7" name="TextBox 6"/>
-          <p:cNvSpPr txBox="1"/>
-          <p:nvPr/>
-        </p:nvSpPr>
-        <p:spPr>
-          <a:xfrm>
-            <a:off x="685800" y="1298448"/>
-            <a:ext cx="10972800" cy="320040"/>
-          </a:xfrm>
-          <a:prstGeom prst="rect">
-            <a:avLst/>
-          </a:prstGeom>
-          <a:noFill/>
-        </p:spPr>
-        <p:txBody>
-          <a:bodyPr wrap="square" anchor="t">
-            <a:spAutoFit/>
-          </a:bodyPr>
-          <a:lstStyle/>
-          <a:p>
-            <a:pPr algn="l"/>
-            <a:r>
-              <a:rPr sz="1400" b="1">
-                <a:solidFill>
-                  <a:srgbClr val="C4A35A"/>
-                </a:solidFill>
-                <a:latin typeface="微软雅黑"/>
-                <a:ea typeface="微软雅黑"/>
-              </a:rPr>
-              <a:t>前期联合策划服务费</a:t>
-            </a:r>
-          </a:p>
-        </p:txBody>
-      </p:sp>
-      <p:sp>
-        <p:nvSpPr>
           <p:cNvPr id="8" name="TextBox 7"/>
           <p:cNvSpPr txBox="1"/>
           <p:nvPr/>
         </p:nvSpPr>
         <p:spPr>
           <a:xfrm>
-            <a:off x="685800" y="1627632"/>
-            <a:ext cx="10972800" cy="777240"/>
-          </a:xfrm>
-          <a:prstGeom prst="rect">
-            <a:avLst/>
-          </a:prstGeom>
-          <a:noFill/>
-        </p:spPr>
-        <p:txBody>
-          <a:bodyPr wrap="square" anchor="t">
-            <a:spAutoFit/>
-          </a:bodyPr>
-          <a:lstStyle/>
-          <a:p>
-            <a:pPr algn="l"/>
-            <a:r>
-              <a:rPr sz="2200" b="1">
+            <a:off x="457200" y="1280160"/>
+            <a:ext cx="5623560" cy="640080"/>
+          </a:xfrm>
+          <a:prstGeom prst="rect">
+            <a:avLst/>
+          </a:prstGeom>
+          <a:noFill/>
+        </p:spPr>
+        <p:txBody>
+          <a:bodyPr wrap="square" anchor="ctr">
+            <a:spAutoFit/>
+          </a:bodyPr>
+          <a:lstStyle/>
+          <a:p>
+            <a:pPr algn="ctr"/>
+            <a:r>
+              <a:rPr sz="1800" b="1">
                 <a:solidFill>
                   <a:srgbClr val="FFFFFF"/>
                 </a:solidFill>
                 <a:latin typeface="微软雅黑"/>
                 <a:ea typeface="微软雅黑"/>
               </a:rPr>
-              <a:t>人民币捌万捌仟元整    ¥88,000
-合同生效后 10 个工作日内一次性支付，开具增值税发票</a:t>
+              <a:t>港大经管上海中心</a:t>
             </a:r>
           </a:p>
         </p:txBody>
@@ -3789,44 +3797,8 @@
         </p:nvSpPr>
         <p:spPr>
           <a:xfrm>
-            <a:off x="502920" y="2788920"/>
-            <a:ext cx="5486400" cy="365760"/>
-          </a:xfrm>
-          <a:prstGeom prst="rect">
-            <a:avLst/>
-          </a:prstGeom>
-          <a:noFill/>
-        </p:spPr>
-        <p:txBody>
-          <a:bodyPr wrap="square" anchor="t">
-            <a:spAutoFit/>
-          </a:bodyPr>
-          <a:lstStyle/>
-          <a:p>
-            <a:pPr algn="l"/>
-            <a:r>
-              <a:rPr sz="1600" b="1">
-                <a:solidFill>
-                  <a:srgbClr val="003D2E"/>
-                </a:solidFill>
-                <a:latin typeface="微软雅黑"/>
-                <a:ea typeface="微软雅黑"/>
-              </a:rPr>
-              <a:t>这 8.8 万覆盖什么</a:t>
-            </a:r>
-          </a:p>
-        </p:txBody>
-      </p:sp>
-      <p:sp>
-        <p:nvSpPr>
-          <p:cNvPr id="10" name="TextBox 9"/>
-          <p:cNvSpPr txBox="1"/>
-          <p:nvPr/>
-        </p:nvSpPr>
-        <p:spPr>
-          <a:xfrm>
-            <a:off x="457200" y="3154680"/>
-            <a:ext cx="5577840" cy="2926080"/>
+            <a:off x="731520" y="2103120"/>
+            <a:ext cx="5074920" cy="3749039"/>
           </a:xfrm>
           <a:prstGeom prst="rect">
             <a:avLst/>
@@ -3844,11 +3816,11 @@
                 <a:spcPct val="115000"/>
               </a:lnSpc>
               <a:spcAft>
-                <a:spcPts val="800"/>
+                <a:spcPts val="1000"/>
               </a:spcAft>
             </a:pPr>
             <a:r>
-              <a:rPr sz="1200" b="1">
+              <a:rPr sz="1300" b="1">
                 <a:solidFill>
                   <a:srgbClr val="C4A35A"/>
                 </a:solidFill>
@@ -3858,14 +3830,14 @@
               <a:t>●  </a:t>
             </a:r>
             <a:r>
-              <a:rPr sz="1400" b="0">
+              <a:rPr sz="1500" b="0">
                 <a:solidFill>
                   <a:srgbClr val="1A2420"/>
                 </a:solidFill>
                 <a:latin typeface="微软雅黑"/>
                 <a:ea typeface="微软雅黑"/>
               </a:rPr>
-              <a:t>90 天联合策划：客群画像、议题日历、邀约话术、转化SOP</a:t>
+              <a:t>提供外滩中心场地、品牌授权与招生口径</a:t>
             </a:r>
           </a:p>
           <a:p>
@@ -3874,11 +3846,11 @@
                 <a:spcPct val="115000"/>
               </a:lnSpc>
               <a:spcAft>
-                <a:spcPts val="800"/>
+                <a:spcPts val="1000"/>
               </a:spcAft>
             </a:pPr>
             <a:r>
-              <a:rPr sz="1200" b="1">
+              <a:rPr sz="1300" b="1">
                 <a:solidFill>
                   <a:srgbClr val="C4A35A"/>
                 </a:solidFill>
@@ -3888,14 +3860,14 @@
               <a:t>●  </a:t>
             </a:r>
             <a:r>
-              <a:rPr sz="1400" b="0">
+              <a:rPr sz="1500" b="0">
                 <a:solidFill>
                   <a:srgbClr val="1A2420"/>
                 </a:solidFill>
                 <a:latin typeface="微软雅黑"/>
                 <a:ea typeface="微软雅黑"/>
               </a:rPr>
-              <a:t>定向高管名单不少于 80 人（科企联及产业圈层，可共管）</a:t>
+              <a:t>指定师资/校友嘉宾；潘老师现场主持与一对一</a:t>
             </a:r>
           </a:p>
           <a:p>
@@ -3904,11 +3876,11 @@
                 <a:spcPct val="115000"/>
               </a:lnSpc>
               <a:spcAft>
-                <a:spcPts val="800"/>
+                <a:spcPts val="1000"/>
               </a:spcAft>
             </a:pPr>
             <a:r>
-              <a:rPr sz="1200" b="1">
+              <a:rPr sz="1300" b="1">
                 <a:solidFill>
                   <a:srgbClr val="C4A35A"/>
                 </a:solidFill>
@@ -3918,14 +3890,14 @@
               <a:t>●  </a:t>
             </a:r>
             <a:r>
-              <a:rPr sz="1400" b="0">
+              <a:rPr sz="1500" b="0">
                 <a:solidFill>
                   <a:srgbClr val="1A2420"/>
                 </a:solidFill>
                 <a:latin typeface="微软雅黑"/>
                 <a:ea typeface="微软雅黑"/>
               </a:rPr>
-              <a:t>首场「外滩·产业课堂」闭门课执行（外滩SOHO，30–40 人）</a:t>
+              <a:t>协助邀请中心主任出席一次甲方高规格出海活动</a:t>
             </a:r>
           </a:p>
           <a:p>
@@ -3934,11 +3906,11 @@
                 <a:spcPct val="115000"/>
               </a:lnSpc>
               <a:spcAft>
-                <a:spcPts val="800"/>
+                <a:spcPts val="1000"/>
               </a:spcAft>
             </a:pPr>
             <a:r>
-              <a:rPr sz="1200" b="1">
+              <a:rPr sz="1300" b="1">
                 <a:solidFill>
                   <a:srgbClr val="C4A35A"/>
                 </a:solidFill>
@@ -3948,51 +3920,105 @@
               <a:t>●  </a:t>
             </a:r>
             <a:r>
-              <a:rPr sz="1400" b="0">
+              <a:rPr sz="1500" b="0">
                 <a:solidFill>
                   <a:srgbClr val="1A2420"/>
                 </a:solidFill>
                 <a:latin typeface="微软雅黑"/>
                 <a:ea typeface="微软雅黑"/>
               </a:rPr>
-              <a:t>会后 7 日内交付纪要、意向分级名单与招生跟进口径</a:t>
-            </a:r>
-          </a:p>
-        </p:txBody>
-      </p:sp>
-      <p:sp>
-        <p:nvSpPr>
-          <p:cNvPr id="11" name="TextBox 10"/>
-          <p:cNvSpPr txBox="1"/>
-          <p:nvPr/>
-        </p:nvSpPr>
-        <p:spPr>
-          <a:xfrm>
-            <a:off x="6263640" y="2788920"/>
-            <a:ext cx="5486400" cy="365760"/>
-          </a:xfrm>
-          <a:prstGeom prst="rect">
-            <a:avLst/>
-          </a:prstGeom>
-          <a:noFill/>
-        </p:spPr>
-        <p:txBody>
-          <a:bodyPr wrap="square" anchor="t">
-            <a:spAutoFit/>
-          </a:bodyPr>
-          <a:lstStyle/>
-          <a:p>
-            <a:pPr algn="l"/>
-            <a:r>
-              <a:rPr sz="1600" b="1">
-                <a:solidFill>
-                  <a:srgbClr val="003D2E"/>
-                </a:solidFill>
-                <a:latin typeface="微软雅黑"/>
-                <a:ea typeface="微软雅黑"/>
-              </a:rPr>
-              <a:t>故意不写进本协议的</a:t>
-            </a:r>
+              <a:t>面试、录取、学位等学院内部流程；发出海课介绍资料</a:t>
+            </a:r>
+          </a:p>
+        </p:txBody>
+      </p:sp>
+      <p:sp>
+        <p:nvSpPr>
+          <p:cNvPr id="10" name="Rounded Rectangle 9"/>
+          <p:cNvSpPr/>
+          <p:nvPr/>
+        </p:nvSpPr>
+        <p:spPr>
+          <a:xfrm>
+            <a:off x="6309360" y="1280160"/>
+            <a:ext cx="5623560" cy="4892040"/>
+          </a:xfrm>
+          <a:prstGeom prst="roundRect">
+            <a:avLst>
+              <a:gd name="adj" fmla="val 8000"/>
+            </a:avLst>
+          </a:prstGeom>
+          <a:solidFill>
+            <a:srgbClr val="FFFFFF"/>
+          </a:solidFill>
+          <a:ln>
+            <a:noFill/>
+          </a:ln>
+          <a:effectLst/>
+        </p:spPr>
+        <p:style>
+          <a:lnRef idx="1">
+            <a:schemeClr val="accent1"/>
+          </a:lnRef>
+          <a:fillRef idx="3">
+            <a:schemeClr val="accent1"/>
+          </a:fillRef>
+          <a:effectRef idx="2">
+            <a:schemeClr val="accent1"/>
+          </a:effectRef>
+          <a:fontRef idx="minor">
+            <a:schemeClr val="lt1"/>
+          </a:fontRef>
+        </p:style>
+        <p:txBody>
+          <a:bodyPr rtlCol="0" anchor="ctr"/>
+          <a:lstStyle/>
+          <a:p>
+            <a:pPr algn="ctr"/>
+          </a:p>
+        </p:txBody>
+      </p:sp>
+      <p:sp>
+        <p:nvSpPr>
+          <p:cNvPr id="11" name="Rectangle 10"/>
+          <p:cNvSpPr/>
+          <p:nvPr/>
+        </p:nvSpPr>
+        <p:spPr>
+          <a:xfrm>
+            <a:off x="6309360" y="1280160"/>
+            <a:ext cx="5623560" cy="640080"/>
+          </a:xfrm>
+          <a:prstGeom prst="rect">
+            <a:avLst/>
+          </a:prstGeom>
+          <a:solidFill>
+            <a:srgbClr val="0A5C46"/>
+          </a:solidFill>
+          <a:ln>
+            <a:noFill/>
+          </a:ln>
+          <a:effectLst/>
+        </p:spPr>
+        <p:style>
+          <a:lnRef idx="1">
+            <a:schemeClr val="accent1"/>
+          </a:lnRef>
+          <a:fillRef idx="3">
+            <a:schemeClr val="accent1"/>
+          </a:fillRef>
+          <a:effectRef idx="2">
+            <a:schemeClr val="accent1"/>
+          </a:effectRef>
+          <a:fontRef idx="minor">
+            <a:schemeClr val="lt1"/>
+          </a:fontRef>
+        </p:style>
+        <p:txBody>
+          <a:bodyPr rtlCol="0" anchor="ctr"/>
+          <a:lstStyle/>
+          <a:p>
+            <a:pPr algn="ctr"/>
           </a:p>
         </p:txBody>
       </p:sp>
@@ -4004,8 +4030,44 @@
         </p:nvSpPr>
         <p:spPr>
           <a:xfrm>
-            <a:off x="6217920" y="3154680"/>
-            <a:ext cx="5577840" cy="2926080"/>
+            <a:off x="6309360" y="1280160"/>
+            <a:ext cx="5623560" cy="640080"/>
+          </a:xfrm>
+          <a:prstGeom prst="rect">
+            <a:avLst/>
+          </a:prstGeom>
+          <a:noFill/>
+        </p:spPr>
+        <p:txBody>
+          <a:bodyPr wrap="square" anchor="ctr">
+            <a:spAutoFit/>
+          </a:bodyPr>
+          <a:lstStyle/>
+          <a:p>
+            <a:pPr algn="ctr"/>
+            <a:r>
+              <a:rPr sz="1800" b="1">
+                <a:solidFill>
+                  <a:srgbClr val="FFFFFF"/>
+                </a:solidFill>
+                <a:latin typeface="微软雅黑"/>
+                <a:ea typeface="微软雅黑"/>
+              </a:rPr>
+              <a:t>联合策划方</a:t>
+            </a:r>
+          </a:p>
+        </p:txBody>
+      </p:sp>
+      <p:sp>
+        <p:nvSpPr>
+          <p:cNvPr id="13" name="TextBox 12"/>
+          <p:cNvSpPr txBox="1"/>
+          <p:nvPr/>
+        </p:nvSpPr>
+        <p:spPr>
+          <a:xfrm>
+            <a:off x="6583680" y="2103120"/>
+            <a:ext cx="5074920" cy="3749039"/>
           </a:xfrm>
           <a:prstGeom prst="rect">
             <a:avLst/>
@@ -4023,11 +4085,11 @@
                 <a:spcPct val="115000"/>
               </a:lnSpc>
               <a:spcAft>
-                <a:spcPts val="800"/>
+                <a:spcPts val="1000"/>
               </a:spcAft>
             </a:pPr>
             <a:r>
-              <a:rPr sz="1200" b="1">
+              <a:rPr sz="1300" b="1">
                 <a:solidFill>
                   <a:srgbClr val="C4A35A"/>
                 </a:solidFill>
@@ -4037,14 +4099,14 @@
               <a:t>●  </a:t>
             </a:r>
             <a:r>
-              <a:rPr sz="1400" b="0">
+              <a:rPr sz="1500" b="0">
                 <a:solidFill>
                   <a:srgbClr val="1A2420"/>
                 </a:solidFill>
                 <a:latin typeface="微软雅黑"/>
                 <a:ea typeface="微软雅黑"/>
               </a:rPr>
-              <a:t>学费、报名费、留位费及任何按人头的招生分成（本协议不做）</a:t>
+              <a:t>90 天出海策划、议题、邀约与外滩首场统筹</a:t>
             </a:r>
           </a:p>
           <a:p>
@@ -4053,11 +4115,11 @@
                 <a:spcPct val="115000"/>
               </a:lnSpc>
               <a:spcAft>
-                <a:spcPts val="800"/>
+                <a:spcPts val="1000"/>
               </a:spcAft>
             </a:pPr>
             <a:r>
-              <a:rPr sz="1200" b="1">
+              <a:rPr sz="1300" b="1">
                 <a:solidFill>
                   <a:srgbClr val="C4A35A"/>
                 </a:solidFill>
@@ -4067,14 +4129,14 @@
               <a:t>●  </a:t>
             </a:r>
             <a:r>
-              <a:rPr sz="1400" b="0">
+              <a:rPr sz="1500" b="0">
                 <a:solidFill>
                   <a:srgbClr val="1A2420"/>
                 </a:solidFill>
                 <a:latin typeface="微软雅黑"/>
                 <a:ea typeface="微软雅黑"/>
               </a:rPr>
-              <a:t>第二场及以后场次（建议 68,000 元/场，另签确认单）</a:t>
+              <a:t>提供定向高管名单并完成会前确认</a:t>
             </a:r>
           </a:p>
           <a:p>
@@ -4083,11 +4145,11 @@
                 <a:spcPct val="115000"/>
               </a:lnSpc>
               <a:spcAft>
-                <a:spcPts val="800"/>
+                <a:spcPts val="1000"/>
               </a:spcAft>
             </a:pPr>
             <a:r>
-              <a:rPr sz="1200" b="1">
+              <a:rPr sz="1300" b="1">
                 <a:solidFill>
                   <a:srgbClr val="C4A35A"/>
                 </a:solidFill>
@@ -4097,14 +4159,14 @@
               <a:t>●  </a:t>
             </a:r>
             <a:r>
-              <a:rPr sz="1400" b="0">
+              <a:rPr sz="1500" b="0">
                 <a:solidFill>
                   <a:srgbClr val="1A2420"/>
                 </a:solidFill>
                 <a:latin typeface="微软雅黑"/>
                 <a:ea typeface="微软雅黑"/>
               </a:rPr>
-              <a:t>差旅、礼品、嘉宾课酬、媒体投放等协议外增项（事前书面确认）</a:t>
+              <a:t>组织一次可供主任体验的高规格出海活动现场</a:t>
             </a:r>
           </a:p>
           <a:p>
@@ -4113,11 +4175,11 @@
                 <a:spcPct val="115000"/>
               </a:lnSpc>
               <a:spcAft>
-                <a:spcPts val="800"/>
+                <a:spcPts val="1000"/>
               </a:spcAft>
             </a:pPr>
             <a:r>
-              <a:rPr sz="1200" b="1">
+              <a:rPr sz="1300" b="1">
                 <a:solidFill>
                   <a:srgbClr val="C4A35A"/>
                 </a:solidFill>
@@ -4127,21 +4189,21 @@
               <a:t>●  </a:t>
             </a:r>
             <a:r>
-              <a:rPr sz="1400" b="0">
+              <a:rPr sz="1500" b="0">
                 <a:solidFill>
                   <a:srgbClr val="1A2420"/>
                 </a:solidFill>
                 <a:latin typeface="微软雅黑"/>
                 <a:ea typeface="微软雅黑"/>
               </a:rPr>
-              <a:t>港大侧录取、面试、学位授予等学院内部职权</a:t>
-            </a:r>
-          </a:p>
-        </p:txBody>
-      </p:sp>
-      <p:sp>
-        <p:nvSpPr>
-          <p:cNvPr id="13" name="TextBox 12"/>
+              <a:t>会后纪要、意向分级；指定结算主体开票收款</a:t>
+            </a:r>
+          </a:p>
+        </p:txBody>
+      </p:sp>
+      <p:sp>
+        <p:nvSpPr>
+          <p:cNvPr id="14" name="TextBox 13"/>
           <p:cNvSpPr txBox="1"/>
           <p:nvPr/>
         </p:nvSpPr>
@@ -4170,7 +4232,7 @@
                 <a:latin typeface="微软雅黑"/>
                 <a:ea typeface="微软雅黑"/>
               </a:rPr>
-              <a:t>外滩·产业课堂  ·  香港大学经管学院上海中心 × 复旦大学住房政策研究中心、上海市杨浦区科技企业联合会  ·  V1.0 建议稿  ·  2026年9月</a:t>
+              <a:t>外滩·出海课堂  ·  香港大学经管学院上海中心 × 复旦大学住房政策研究中心、上海市杨浦区科技企业联合会  ·  V1.1 建议稿  ·  2026年9月</a:t>
             </a:r>
           </a:p>
         </p:txBody>
@@ -4312,7 +4374,7 @@
                 <a:latin typeface="微软雅黑"/>
                 <a:ea typeface="微软雅黑"/>
               </a:rPr>
-              <a:t>协议要点：短、可签、方便院内走流程</a:t>
+              <a:t>商业结构：只收一笔前期费用</a:t>
             </a:r>
           </a:p>
         </p:txBody>
@@ -4348,21 +4410,176 @@
                 <a:latin typeface="微软雅黑"/>
                 <a:ea typeface="微软雅黑"/>
               </a:rPr>
-              <a:t>11/12</a:t>
-            </a:r>
-          </a:p>
-        </p:txBody>
-      </p:sp>
-      <p:sp>
-        <p:nvSpPr>
-          <p:cNvPr id="6" name="TextBox 5"/>
-          <p:cNvSpPr txBox="1"/>
-          <p:nvPr/>
-        </p:nvSpPr>
-        <p:spPr>
-          <a:xfrm>
-            <a:off x="502920" y="1234440"/>
-            <a:ext cx="11155680" cy="4206240"/>
+              <a:t>11/13</a:t>
+            </a:r>
+          </a:p>
+        </p:txBody>
+      </p:sp>
+      <p:sp>
+        <p:nvSpPr>
+          <p:cNvPr id="6" name="Rounded Rectangle 5"/>
+          <p:cNvSpPr/>
+          <p:nvPr/>
+        </p:nvSpPr>
+        <p:spPr>
+          <a:xfrm>
+            <a:off x="457200" y="1188720"/>
+            <a:ext cx="11247120" cy="1417320"/>
+          </a:xfrm>
+          <a:prstGeom prst="roundRect">
+            <a:avLst>
+              <a:gd name="adj" fmla="val 8000"/>
+            </a:avLst>
+          </a:prstGeom>
+          <a:solidFill>
+            <a:srgbClr val="003D2E"/>
+          </a:solidFill>
+          <a:ln>
+            <a:noFill/>
+          </a:ln>
+          <a:effectLst/>
+        </p:spPr>
+        <p:style>
+          <a:lnRef idx="1">
+            <a:schemeClr val="accent1"/>
+          </a:lnRef>
+          <a:fillRef idx="3">
+            <a:schemeClr val="accent1"/>
+          </a:fillRef>
+          <a:effectRef idx="2">
+            <a:schemeClr val="accent1"/>
+          </a:effectRef>
+          <a:fontRef idx="minor">
+            <a:schemeClr val="lt1"/>
+          </a:fontRef>
+        </p:style>
+        <p:txBody>
+          <a:bodyPr rtlCol="0" anchor="ctr"/>
+          <a:lstStyle/>
+          <a:p>
+            <a:pPr algn="ctr"/>
+          </a:p>
+        </p:txBody>
+      </p:sp>
+      <p:sp>
+        <p:nvSpPr>
+          <p:cNvPr id="7" name="TextBox 6"/>
+          <p:cNvSpPr txBox="1"/>
+          <p:nvPr/>
+        </p:nvSpPr>
+        <p:spPr>
+          <a:xfrm>
+            <a:off x="685800" y="1298448"/>
+            <a:ext cx="10972800" cy="320040"/>
+          </a:xfrm>
+          <a:prstGeom prst="rect">
+            <a:avLst/>
+          </a:prstGeom>
+          <a:noFill/>
+        </p:spPr>
+        <p:txBody>
+          <a:bodyPr wrap="square" anchor="t">
+            <a:spAutoFit/>
+          </a:bodyPr>
+          <a:lstStyle/>
+          <a:p>
+            <a:pPr algn="l"/>
+            <a:r>
+              <a:rPr sz="1400" b="1">
+                <a:solidFill>
+                  <a:srgbClr val="C4A35A"/>
+                </a:solidFill>
+                <a:latin typeface="微软雅黑"/>
+                <a:ea typeface="微软雅黑"/>
+              </a:rPr>
+              <a:t>前期联合策划服务费</a:t>
+            </a:r>
+          </a:p>
+        </p:txBody>
+      </p:sp>
+      <p:sp>
+        <p:nvSpPr>
+          <p:cNvPr id="8" name="TextBox 7"/>
+          <p:cNvSpPr txBox="1"/>
+          <p:nvPr/>
+        </p:nvSpPr>
+        <p:spPr>
+          <a:xfrm>
+            <a:off x="685800" y="1627632"/>
+            <a:ext cx="10972800" cy="777240"/>
+          </a:xfrm>
+          <a:prstGeom prst="rect">
+            <a:avLst/>
+          </a:prstGeom>
+          <a:noFill/>
+        </p:spPr>
+        <p:txBody>
+          <a:bodyPr wrap="square" anchor="t">
+            <a:spAutoFit/>
+          </a:bodyPr>
+          <a:lstStyle/>
+          <a:p>
+            <a:pPr algn="l"/>
+            <a:r>
+              <a:rPr sz="2200" b="1">
+                <a:solidFill>
+                  <a:srgbClr val="FFFFFF"/>
+                </a:solidFill>
+                <a:latin typeface="微软雅黑"/>
+                <a:ea typeface="微软雅黑"/>
+              </a:rPr>
+              <a:t>人民币捌万捌仟元整    ¥88,000
+合同生效后 10 个工作日内一次性支付，开具增值税发票</a:t>
+            </a:r>
+          </a:p>
+        </p:txBody>
+      </p:sp>
+      <p:sp>
+        <p:nvSpPr>
+          <p:cNvPr id="9" name="TextBox 8"/>
+          <p:cNvSpPr txBox="1"/>
+          <p:nvPr/>
+        </p:nvSpPr>
+        <p:spPr>
+          <a:xfrm>
+            <a:off x="502920" y="2788920"/>
+            <a:ext cx="5486400" cy="365760"/>
+          </a:xfrm>
+          <a:prstGeom prst="rect">
+            <a:avLst/>
+          </a:prstGeom>
+          <a:noFill/>
+        </p:spPr>
+        <p:txBody>
+          <a:bodyPr wrap="square" anchor="t">
+            <a:spAutoFit/>
+          </a:bodyPr>
+          <a:lstStyle/>
+          <a:p>
+            <a:pPr algn="l"/>
+            <a:r>
+              <a:rPr sz="1600" b="1">
+                <a:solidFill>
+                  <a:srgbClr val="003D2E"/>
+                </a:solidFill>
+                <a:latin typeface="微软雅黑"/>
+                <a:ea typeface="微软雅黑"/>
+              </a:rPr>
+              <a:t>这 8.8 万覆盖什么</a:t>
+            </a:r>
+          </a:p>
+        </p:txBody>
+      </p:sp>
+      <p:sp>
+        <p:nvSpPr>
+          <p:cNvPr id="10" name="TextBox 9"/>
+          <p:cNvSpPr txBox="1"/>
+          <p:nvPr/>
+        </p:nvSpPr>
+        <p:spPr>
+          <a:xfrm>
+            <a:off x="457200" y="3108960"/>
+            <a:ext cx="5577840" cy="3017520"/>
           </a:xfrm>
           <a:prstGeom prst="rect">
             <a:avLst/>
@@ -4380,11 +4597,11 @@
                 <a:spcPct val="115000"/>
               </a:lnSpc>
               <a:spcAft>
-                <a:spcPts val="1000"/>
+                <a:spcPts val="500"/>
               </a:spcAft>
             </a:pPr>
             <a:r>
-              <a:rPr sz="1400" b="1">
+              <a:rPr sz="1100" b="1">
                 <a:solidFill>
                   <a:srgbClr val="C4A35A"/>
                 </a:solidFill>
@@ -4394,14 +4611,14 @@
               <a:t>●  </a:t>
             </a:r>
             <a:r>
-              <a:rPr sz="1600" b="0">
+              <a:rPr sz="1300" b="0">
                 <a:solidFill>
                   <a:srgbClr val="1A2420"/>
                 </a:solidFill>
                 <a:latin typeface="微软雅黑"/>
                 <a:ea typeface="微软雅黑"/>
               </a:rPr>
-              <a:t>性质：联合策划服务合作，不是招生代理分成协议。</a:t>
+              <a:t>90 天出海主题联合策划：客群画像、议题日历、邀约话术、转化SOP</a:t>
             </a:r>
           </a:p>
           <a:p>
@@ -4410,11 +4627,11 @@
                 <a:spcPct val="115000"/>
               </a:lnSpc>
               <a:spcAft>
-                <a:spcPts val="1000"/>
+                <a:spcPts val="500"/>
               </a:spcAft>
             </a:pPr>
             <a:r>
-              <a:rPr sz="1400" b="1">
+              <a:rPr sz="1100" b="1">
                 <a:solidFill>
                   <a:srgbClr val="C4A35A"/>
                 </a:solidFill>
@@ -4424,14 +4641,14 @@
               <a:t>●  </a:t>
             </a:r>
             <a:r>
-              <a:rPr sz="1600" b="0">
+              <a:rPr sz="1300" b="0">
                 <a:solidFill>
                   <a:srgbClr val="1A2420"/>
                 </a:solidFill>
                 <a:latin typeface="微软雅黑"/>
                 <a:ea typeface="微软雅黑"/>
               </a:rPr>
-              <a:t>标的：前期联合策划服务费 人民币捌万捌仟元整（¥88,000），合同生效后 10 个工作日内一次性支付。</a:t>
+              <a:t>定向高管名单不少于 80 人（出海/产业决策者，按 EMBA 门槛初筛，可共管）</a:t>
             </a:r>
           </a:p>
           <a:p>
@@ -4440,11 +4657,11 @@
                 <a:spcPct val="115000"/>
               </a:lnSpc>
               <a:spcAft>
-                <a:spcPts val="1000"/>
+                <a:spcPts val="500"/>
               </a:spcAft>
             </a:pPr>
             <a:r>
-              <a:rPr sz="1400" b="1">
+              <a:rPr sz="1100" b="1">
                 <a:solidFill>
                   <a:srgbClr val="C4A35A"/>
                 </a:solidFill>
@@ -4454,14 +4671,14 @@
               <a:t>●  </a:t>
             </a:r>
             <a:r>
-              <a:rPr sz="1600" b="0">
+              <a:rPr sz="1300" b="0">
                 <a:solidFill>
                   <a:srgbClr val="1A2420"/>
                 </a:solidFill>
                 <a:latin typeface="微软雅黑"/>
                 <a:ea typeface="微软雅黑"/>
               </a:rPr>
-              <a:t>覆盖：90 天策划 + 首场闭门课 + 会后纪要与共管名单。</a:t>
+              <a:t>首场「外滩·出海课堂」闭门课（外滩SOHO，30–40 人，出海主题）</a:t>
             </a:r>
           </a:p>
           <a:p>
@@ -4470,11 +4687,11 @@
                 <a:spcPct val="115000"/>
               </a:lnSpc>
               <a:spcAft>
-                <a:spcPts val="1000"/>
+                <a:spcPts val="500"/>
               </a:spcAft>
             </a:pPr>
             <a:r>
-              <a:rPr sz="1400" b="1">
+              <a:rPr sz="1100" b="1">
                 <a:solidFill>
                   <a:srgbClr val="C4A35A"/>
                 </a:solidFill>
@@ -4484,14 +4701,14 @@
               <a:t>●  </a:t>
             </a:r>
             <a:r>
-              <a:rPr sz="1600" b="0">
+              <a:rPr sz="1300" b="0">
                 <a:solidFill>
                   <a:srgbClr val="1A2420"/>
                 </a:solidFill>
                 <a:latin typeface="微软雅黑"/>
                 <a:ea typeface="微软雅黑"/>
               </a:rPr>
-              <a:t>不覆盖：学费分成、第二场及以后、协议外增项。</a:t>
+              <a:t>一次「主任体验」：邀请港大经管学院上海中心主任出席我方高规格出海活动（总领事或企业家场）</a:t>
             </a:r>
           </a:p>
           <a:p>
@@ -4500,11 +4717,11 @@
                 <a:spcPct val="115000"/>
               </a:lnSpc>
               <a:spcAft>
-                <a:spcPts val="1000"/>
+                <a:spcPts val="500"/>
               </a:spcAft>
             </a:pPr>
             <a:r>
-              <a:rPr sz="1400" b="1">
+              <a:rPr sz="1100" b="1">
                 <a:solidFill>
                   <a:srgbClr val="C4A35A"/>
                 </a:solidFill>
@@ -4514,27 +4731,86 @@
               <a:t>●  </a:t>
             </a:r>
             <a:r>
-              <a:rPr sz="1600" b="0">
+              <a:rPr sz="1300" b="0">
                 <a:solidFill>
                   <a:srgbClr val="1A2420"/>
                 </a:solidFill>
                 <a:latin typeface="微软雅黑"/>
                 <a:ea typeface="微软雅黑"/>
               </a:rPr>
-              <a:t>名单：双方共管，不得向第三方转让或用于与本合作无关的推销。</a:t>
-            </a:r>
-          </a:p>
+              <a:t>会后 7 日内交付纪要、意向分级名单与招生跟进口径</a:t>
+            </a:r>
+          </a:p>
+        </p:txBody>
+      </p:sp>
+      <p:sp>
+        <p:nvSpPr>
+          <p:cNvPr id="11" name="TextBox 10"/>
+          <p:cNvSpPr txBox="1"/>
+          <p:nvPr/>
+        </p:nvSpPr>
+        <p:spPr>
+          <a:xfrm>
+            <a:off x="6263640" y="2788920"/>
+            <a:ext cx="5486400" cy="365760"/>
+          </a:xfrm>
+          <a:prstGeom prst="rect">
+            <a:avLst/>
+          </a:prstGeom>
+          <a:noFill/>
+        </p:spPr>
+        <p:txBody>
+          <a:bodyPr wrap="square" anchor="t">
+            <a:spAutoFit/>
+          </a:bodyPr>
+          <a:lstStyle/>
+          <a:p>
+            <a:pPr algn="l"/>
+            <a:r>
+              <a:rPr sz="1600" b="1">
+                <a:solidFill>
+                  <a:srgbClr val="003D2E"/>
+                </a:solidFill>
+                <a:latin typeface="微软雅黑"/>
+                <a:ea typeface="微软雅黑"/>
+              </a:rPr>
+              <a:t>故意不写进本协议的</a:t>
+            </a:r>
+          </a:p>
+        </p:txBody>
+      </p:sp>
+      <p:sp>
+        <p:nvSpPr>
+          <p:cNvPr id="12" name="TextBox 11"/>
+          <p:cNvSpPr txBox="1"/>
+          <p:nvPr/>
+        </p:nvSpPr>
+        <p:spPr>
+          <a:xfrm>
+            <a:off x="6217920" y="3108960"/>
+            <a:ext cx="5577840" cy="3017520"/>
+          </a:xfrm>
+          <a:prstGeom prst="rect">
+            <a:avLst/>
+          </a:prstGeom>
+          <a:noFill/>
+        </p:spPr>
+        <p:txBody>
+          <a:bodyPr wrap="square">
+            <a:spAutoFit/>
+          </a:bodyPr>
+          <a:lstStyle/>
           <a:p>
             <a:pPr>
               <a:lnSpc>
                 <a:spcPct val="115000"/>
               </a:lnSpc>
               <a:spcAft>
-                <a:spcPts val="1000"/>
+                <a:spcPts val="500"/>
               </a:spcAft>
             </a:pPr>
             <a:r>
-              <a:rPr sz="1400" b="1">
+              <a:rPr sz="1100" b="1">
                 <a:solidFill>
                   <a:srgbClr val="C4A35A"/>
                 </a:solidFill>
@@ -4544,14 +4820,14 @@
               <a:t>●  </a:t>
             </a:r>
             <a:r>
-              <a:rPr sz="1600" b="0">
+              <a:rPr sz="1300" b="0">
                 <a:solidFill>
                   <a:srgbClr val="1A2420"/>
                 </a:solidFill>
                 <a:latin typeface="微软雅黑"/>
                 <a:ea typeface="微软雅黑"/>
               </a:rPr>
-              <a:t>品牌：未经书面同意，不得暗示对方为从属机构或联合学位项目。</a:t>
+              <a:t>学费、报名费、留位费及任何按人头的招生分成（本协议不做）</a:t>
             </a:r>
           </a:p>
           <a:p>
@@ -4560,11 +4836,11 @@
                 <a:spcPct val="115000"/>
               </a:lnSpc>
               <a:spcAft>
-                <a:spcPts val="1000"/>
+                <a:spcPts val="500"/>
               </a:spcAft>
             </a:pPr>
             <a:r>
-              <a:rPr sz="1400" b="1">
+              <a:rPr sz="1100" b="1">
                 <a:solidFill>
                   <a:srgbClr val="C4A35A"/>
                 </a:solidFill>
@@ -4574,103 +4850,81 @@
               <a:t>●  </a:t>
             </a:r>
             <a:r>
-              <a:rPr sz="1600" b="0">
+              <a:rPr sz="1300" b="0">
                 <a:solidFill>
                   <a:srgbClr val="1A2420"/>
                 </a:solidFill>
                 <a:latin typeface="微软雅黑"/>
                 <a:ea typeface="微软雅黑"/>
               </a:rPr>
-              <a:t>期限：自生效日起 90 天；到期可续签或按场确认。</a:t>
-            </a:r>
-          </a:p>
-        </p:txBody>
-      </p:sp>
-      <p:sp>
-        <p:nvSpPr>
-          <p:cNvPr id="7" name="Rounded Rectangle 6"/>
-          <p:cNvSpPr/>
-          <p:nvPr/>
-        </p:nvSpPr>
-        <p:spPr>
-          <a:xfrm>
-            <a:off x="457200" y="5440680"/>
-            <a:ext cx="11247120" cy="822960"/>
-          </a:xfrm>
-          <a:prstGeom prst="roundRect">
-            <a:avLst>
-              <a:gd name="adj" fmla="val 8000"/>
-            </a:avLst>
-          </a:prstGeom>
-          <a:solidFill>
-            <a:srgbClr val="F7F4EC"/>
-          </a:solidFill>
-          <a:ln>
-            <a:noFill/>
-          </a:ln>
-          <a:effectLst/>
-        </p:spPr>
-        <p:style>
-          <a:lnRef idx="1">
-            <a:schemeClr val="accent1"/>
-          </a:lnRef>
-          <a:fillRef idx="3">
-            <a:schemeClr val="accent1"/>
-          </a:fillRef>
-          <a:effectRef idx="2">
-            <a:schemeClr val="accent1"/>
-          </a:effectRef>
-          <a:fontRef idx="minor">
-            <a:schemeClr val="lt1"/>
-          </a:fontRef>
-        </p:style>
-        <p:txBody>
-          <a:bodyPr rtlCol="0" anchor="ctr"/>
-          <a:lstStyle/>
-          <a:p>
-            <a:pPr algn="ctr"/>
-          </a:p>
-        </p:txBody>
-      </p:sp>
-      <p:sp>
-        <p:nvSpPr>
-          <p:cNvPr id="8" name="TextBox 7"/>
-          <p:cNvSpPr txBox="1"/>
-          <p:nvPr/>
-        </p:nvSpPr>
-        <p:spPr>
-          <a:xfrm>
-            <a:off x="685800" y="5532120"/>
-            <a:ext cx="10789920" cy="640080"/>
-          </a:xfrm>
-          <a:prstGeom prst="rect">
-            <a:avLst/>
-          </a:prstGeom>
-          <a:noFill/>
-        </p:spPr>
-        <p:txBody>
-          <a:bodyPr wrap="square" anchor="ctr">
-            <a:spAutoFit/>
-          </a:bodyPr>
-          <a:lstStyle/>
-          <a:p>
-            <a:pPr algn="l"/>
-            <a:r>
-              <a:rPr sz="1400" b="0">
+              <a:t>第二场及以后场次（建议 68,000 元/场，另签确认单）</a:t>
+            </a:r>
+          </a:p>
+          <a:p>
+            <a:pPr>
+              <a:lnSpc>
+                <a:spcPct val="115000"/>
+              </a:lnSpc>
+              <a:spcAft>
+                <a:spcPts val="500"/>
+              </a:spcAft>
+            </a:pPr>
+            <a:r>
+              <a:rPr sz="1100" b="1">
+                <a:solidFill>
+                  <a:srgbClr val="C4A35A"/>
+                </a:solidFill>
+                <a:latin typeface="微软雅黑"/>
+                <a:ea typeface="微软雅黑"/>
+              </a:rPr>
+              <a:t>●  </a:t>
+            </a:r>
+            <a:r>
+              <a:rPr sz="1300" b="0">
                 <a:solidFill>
                   <a:srgbClr val="1A2420"/>
                 </a:solidFill>
                 <a:latin typeface="微软雅黑"/>
                 <a:ea typeface="微软雅黑"/>
               </a:rPr>
-              <a:t>完整文本见配套《联合策划服务合作协议（建议稿）》。本稿供潘老师内部预审，签署主体、账号、开票信息在签署页一次性补齐。</a:t>
-            </a:r>
-          </a:p>
-        </p:txBody>
-      </p:sp>
-      <p:sp>
-        <p:nvSpPr>
-          <p:cNvPr id="9" name="TextBox 8"/>
+              <a:t>本部企业出海高级管理课程的联合招生与分成（可另议推广，资料由对方提供）</a:t>
+            </a:r>
+          </a:p>
+          <a:p>
+            <a:pPr>
+              <a:lnSpc>
+                <a:spcPct val="115000"/>
+              </a:lnSpc>
+              <a:spcAft>
+                <a:spcPts val="500"/>
+              </a:spcAft>
+            </a:pPr>
+            <a:r>
+              <a:rPr sz="1100" b="1">
+                <a:solidFill>
+                  <a:srgbClr val="C4A35A"/>
+                </a:solidFill>
+                <a:latin typeface="微软雅黑"/>
+                <a:ea typeface="微软雅黑"/>
+              </a:rPr>
+              <a:t>●  </a:t>
+            </a:r>
+            <a:r>
+              <a:rPr sz="1300" b="0">
+                <a:solidFill>
+                  <a:srgbClr val="1A2420"/>
+                </a:solidFill>
+                <a:latin typeface="微软雅黑"/>
+                <a:ea typeface="微软雅黑"/>
+              </a:rPr>
+              <a:t>原创谷日常运营、股权投资，以及灰色跨境结算等非正式议题（对外一律不采用）</a:t>
+            </a:r>
+          </a:p>
+        </p:txBody>
+      </p:sp>
+      <p:sp>
+        <p:nvSpPr>
+          <p:cNvPr id="13" name="TextBox 12"/>
           <p:cNvSpPr txBox="1"/>
           <p:nvPr/>
         </p:nvSpPr>
@@ -4699,7 +4953,7 @@
                 <a:latin typeface="微软雅黑"/>
                 <a:ea typeface="微软雅黑"/>
               </a:rPr>
-              <a:t>外滩·产业课堂  ·  香港大学经管学院上海中心 × 复旦大学住房政策研究中心、上海市杨浦区科技企业联合会  ·  V1.0 建议稿  ·  2026年9月</a:t>
+              <a:t>外滩·出海课堂  ·  香港大学经管学院上海中心 × 复旦大学住房政策研究中心、上海市杨浦区科技企业联合会  ·  V1.1 建议稿  ·  2026年9月</a:t>
             </a:r>
           </a:p>
         </p:txBody>
@@ -4841,7 +5095,7 @@
                 <a:latin typeface="微软雅黑"/>
                 <a:ea typeface="微软雅黑"/>
               </a:rPr>
-              <a:t>下一步：三件事，合作就算成立</a:t>
+              <a:t>协议要点：短、可签，按对方口径分层验收</a:t>
             </a:r>
           </a:p>
         </p:txBody>
@@ -4877,7 +5131,536 @@
                 <a:latin typeface="微软雅黑"/>
                 <a:ea typeface="微软雅黑"/>
               </a:rPr>
-              <a:t>12/12</a:t>
+              <a:t>12/13</a:t>
+            </a:r>
+          </a:p>
+        </p:txBody>
+      </p:sp>
+      <p:sp>
+        <p:nvSpPr>
+          <p:cNvPr id="6" name="TextBox 5"/>
+          <p:cNvSpPr txBox="1"/>
+          <p:nvPr/>
+        </p:nvSpPr>
+        <p:spPr>
+          <a:xfrm>
+            <a:off x="502920" y="1207008"/>
+            <a:ext cx="11155680" cy="4160520"/>
+          </a:xfrm>
+          <a:prstGeom prst="rect">
+            <a:avLst/>
+          </a:prstGeom>
+          <a:noFill/>
+        </p:spPr>
+        <p:txBody>
+          <a:bodyPr wrap="square">
+            <a:spAutoFit/>
+          </a:bodyPr>
+          <a:lstStyle/>
+          <a:p>
+            <a:pPr>
+              <a:lnSpc>
+                <a:spcPct val="115000"/>
+              </a:lnSpc>
+              <a:spcAft>
+                <a:spcPts val="700"/>
+              </a:spcAft>
+            </a:pPr>
+            <a:r>
+              <a:rPr sz="1200" b="1">
+                <a:solidFill>
+                  <a:srgbClr val="C4A35A"/>
+                </a:solidFill>
+                <a:latin typeface="微软雅黑"/>
+                <a:ea typeface="微软雅黑"/>
+              </a:rPr>
+              <a:t>●  </a:t>
+            </a:r>
+            <a:r>
+              <a:rPr sz="1400" b="0">
+                <a:solidFill>
+                  <a:srgbClr val="1A2420"/>
+                </a:solidFill>
+                <a:latin typeface="微软雅黑"/>
+                <a:ea typeface="微软雅黑"/>
+              </a:rPr>
+              <a:t>性质：联合策划服务。层级按对方口径覆盖经管学院出海合作，本期验收以 EMBA 粘性场 + 主任邀约为限。</a:t>
+            </a:r>
+          </a:p>
+          <a:p>
+            <a:pPr>
+              <a:lnSpc>
+                <a:spcPct val="115000"/>
+              </a:lnSpc>
+              <a:spcAft>
+                <a:spcPts val="700"/>
+              </a:spcAft>
+            </a:pPr>
+            <a:r>
+              <a:rPr sz="1200" b="1">
+                <a:solidFill>
+                  <a:srgbClr val="C4A35A"/>
+                </a:solidFill>
+                <a:latin typeface="微软雅黑"/>
+                <a:ea typeface="微软雅黑"/>
+              </a:rPr>
+              <a:t>●  </a:t>
+            </a:r>
+            <a:r>
+              <a:rPr sz="1400" b="0">
+                <a:solidFill>
+                  <a:srgbClr val="1A2420"/>
+                </a:solidFill>
+                <a:latin typeface="微软雅黑"/>
+                <a:ea typeface="微软雅黑"/>
+              </a:rPr>
+              <a:t>标的：前期联合策划服务费 人民币捌万捌仟元整（¥88,000），合同生效后 10 个工作日内一次性支付。</a:t>
+            </a:r>
+          </a:p>
+          <a:p>
+            <a:pPr>
+              <a:lnSpc>
+                <a:spcPct val="115000"/>
+              </a:lnSpc>
+              <a:spcAft>
+                <a:spcPts val="700"/>
+              </a:spcAft>
+            </a:pPr>
+            <a:r>
+              <a:rPr sz="1200" b="1">
+                <a:solidFill>
+                  <a:srgbClr val="C4A35A"/>
+                </a:solidFill>
+                <a:latin typeface="微软雅黑"/>
+                <a:ea typeface="微软雅黑"/>
+              </a:rPr>
+              <a:t>●  </a:t>
+            </a:r>
+            <a:r>
+              <a:rPr sz="1400" b="0">
+                <a:solidFill>
+                  <a:srgbClr val="1A2420"/>
+                </a:solidFill>
+                <a:latin typeface="微软雅黑"/>
+                <a:ea typeface="微软雅黑"/>
+              </a:rPr>
+              <a:t>覆盖：90 天策划 + 外滩出海首场 + 一次主任体验邀约 + 会后纪要与共管名单。</a:t>
+            </a:r>
+          </a:p>
+          <a:p>
+            <a:pPr>
+              <a:lnSpc>
+                <a:spcPct val="115000"/>
+              </a:lnSpc>
+              <a:spcAft>
+                <a:spcPts val="700"/>
+              </a:spcAft>
+            </a:pPr>
+            <a:r>
+              <a:rPr sz="1200" b="1">
+                <a:solidFill>
+                  <a:srgbClr val="C4A35A"/>
+                </a:solidFill>
+                <a:latin typeface="微软雅黑"/>
+                <a:ea typeface="微软雅黑"/>
+              </a:rPr>
+              <a:t>●  </a:t>
+            </a:r>
+            <a:r>
+              <a:rPr sz="1400" b="0">
+                <a:solidFill>
+                  <a:srgbClr val="1A2420"/>
+                </a:solidFill>
+                <a:latin typeface="微软雅黑"/>
+                <a:ea typeface="微软雅黑"/>
+              </a:rPr>
+              <a:t>不覆盖：学费分成、第二场、本部出海课分成、原创谷运营、灰色跨境议题。</a:t>
+            </a:r>
+          </a:p>
+          <a:p>
+            <a:pPr>
+              <a:lnSpc>
+                <a:spcPct val="115000"/>
+              </a:lnSpc>
+              <a:spcAft>
+                <a:spcPts val="700"/>
+              </a:spcAft>
+            </a:pPr>
+            <a:r>
+              <a:rPr sz="1200" b="1">
+                <a:solidFill>
+                  <a:srgbClr val="C4A35A"/>
+                </a:solidFill>
+                <a:latin typeface="微软雅黑"/>
+                <a:ea typeface="微软雅黑"/>
+              </a:rPr>
+              <a:t>●  </a:t>
+            </a:r>
+            <a:r>
+              <a:rPr sz="1400" b="0">
+                <a:solidFill>
+                  <a:srgbClr val="1A2420"/>
+                </a:solidFill>
+                <a:latin typeface="微软雅黑"/>
+                <a:ea typeface="微软雅黑"/>
+              </a:rPr>
+              <a:t>名单共管；未经书面同意不得暗示联合学位或港大从属机构。</a:t>
+            </a:r>
+          </a:p>
+          <a:p>
+            <a:pPr>
+              <a:lnSpc>
+                <a:spcPct val="115000"/>
+              </a:lnSpc>
+              <a:spcAft>
+                <a:spcPts val="700"/>
+              </a:spcAft>
+            </a:pPr>
+            <a:r>
+              <a:rPr sz="1200" b="1">
+                <a:solidFill>
+                  <a:srgbClr val="C4A35A"/>
+                </a:solidFill>
+                <a:latin typeface="微软雅黑"/>
+                <a:ea typeface="微软雅黑"/>
+              </a:rPr>
+              <a:t>●  </a:t>
+            </a:r>
+            <a:r>
+              <a:rPr sz="1400" b="0">
+                <a:solidFill>
+                  <a:srgbClr val="1A2420"/>
+                </a:solidFill>
+                <a:latin typeface="微软雅黑"/>
+                <a:ea typeface="微软雅黑"/>
+              </a:rPr>
+              <a:t>主任是否出席以其公务为准，已完成正式邀约即视为本项交付。</a:t>
+            </a:r>
+          </a:p>
+          <a:p>
+            <a:pPr>
+              <a:lnSpc>
+                <a:spcPct val="115000"/>
+              </a:lnSpc>
+              <a:spcAft>
+                <a:spcPts val="700"/>
+              </a:spcAft>
+            </a:pPr>
+            <a:r>
+              <a:rPr sz="1200" b="1">
+                <a:solidFill>
+                  <a:srgbClr val="C4A35A"/>
+                </a:solidFill>
+                <a:latin typeface="微软雅黑"/>
+                <a:ea typeface="微软雅黑"/>
+              </a:rPr>
+              <a:t>●  </a:t>
+            </a:r>
+            <a:r>
+              <a:rPr sz="1400" b="0">
+                <a:solidFill>
+                  <a:srgbClr val="1A2420"/>
+                </a:solidFill>
+                <a:latin typeface="微软雅黑"/>
+                <a:ea typeface="微软雅黑"/>
+              </a:rPr>
+              <a:t>期限：自生效日起 90 天；到期可续签或按场确认。</a:t>
+            </a:r>
+          </a:p>
+        </p:txBody>
+      </p:sp>
+      <p:sp>
+        <p:nvSpPr>
+          <p:cNvPr id="7" name="Rounded Rectangle 6"/>
+          <p:cNvSpPr/>
+          <p:nvPr/>
+        </p:nvSpPr>
+        <p:spPr>
+          <a:xfrm>
+            <a:off x="457200" y="5440680"/>
+            <a:ext cx="11247120" cy="822960"/>
+          </a:xfrm>
+          <a:prstGeom prst="roundRect">
+            <a:avLst>
+              <a:gd name="adj" fmla="val 8000"/>
+            </a:avLst>
+          </a:prstGeom>
+          <a:solidFill>
+            <a:srgbClr val="F7F4EC"/>
+          </a:solidFill>
+          <a:ln>
+            <a:noFill/>
+          </a:ln>
+          <a:effectLst/>
+        </p:spPr>
+        <p:style>
+          <a:lnRef idx="1">
+            <a:schemeClr val="accent1"/>
+          </a:lnRef>
+          <a:fillRef idx="3">
+            <a:schemeClr val="accent1"/>
+          </a:fillRef>
+          <a:effectRef idx="2">
+            <a:schemeClr val="accent1"/>
+          </a:effectRef>
+          <a:fontRef idx="minor">
+            <a:schemeClr val="lt1"/>
+          </a:fontRef>
+        </p:style>
+        <p:txBody>
+          <a:bodyPr rtlCol="0" anchor="ctr"/>
+          <a:lstStyle/>
+          <a:p>
+            <a:pPr algn="ctr"/>
+          </a:p>
+        </p:txBody>
+      </p:sp>
+      <p:sp>
+        <p:nvSpPr>
+          <p:cNvPr id="8" name="TextBox 7"/>
+          <p:cNvSpPr txBox="1"/>
+          <p:nvPr/>
+        </p:nvSpPr>
+        <p:spPr>
+          <a:xfrm>
+            <a:off x="685800" y="5532120"/>
+            <a:ext cx="10789920" cy="640080"/>
+          </a:xfrm>
+          <a:prstGeom prst="rect">
+            <a:avLst/>
+          </a:prstGeom>
+          <a:noFill/>
+        </p:spPr>
+        <p:txBody>
+          <a:bodyPr wrap="square" anchor="ctr">
+            <a:spAutoFit/>
+          </a:bodyPr>
+          <a:lstStyle/>
+          <a:p>
+            <a:pPr algn="l"/>
+            <a:r>
+              <a:rPr sz="1400" b="0">
+                <a:solidFill>
+                  <a:srgbClr val="1A2420"/>
+                </a:solidFill>
+                <a:latin typeface="微软雅黑"/>
+                <a:ea typeface="微软雅黑"/>
+              </a:rPr>
+              <a:t>完整文本见配套《联合策划服务合作协议（建议稿）》。本稿供潘老师内部预审，签署主体、账号、开票信息在签署页一次性补齐。</a:t>
+            </a:r>
+          </a:p>
+        </p:txBody>
+      </p:sp>
+      <p:sp>
+        <p:nvSpPr>
+          <p:cNvPr id="9" name="TextBox 8"/>
+          <p:cNvSpPr txBox="1"/>
+          <p:nvPr/>
+        </p:nvSpPr>
+        <p:spPr>
+          <a:xfrm>
+            <a:off x="502920" y="6510528"/>
+            <a:ext cx="11155680" cy="256032"/>
+          </a:xfrm>
+          <a:prstGeom prst="rect">
+            <a:avLst/>
+          </a:prstGeom>
+          <a:noFill/>
+        </p:spPr>
+        <p:txBody>
+          <a:bodyPr wrap="square" anchor="t">
+            <a:spAutoFit/>
+          </a:bodyPr>
+          <a:lstStyle/>
+          <a:p>
+            <a:pPr algn="l"/>
+            <a:r>
+              <a:rPr sz="900" b="0">
+                <a:solidFill>
+                  <a:srgbClr val="5B6B64"/>
+                </a:solidFill>
+                <a:latin typeface="微软雅黑"/>
+                <a:ea typeface="微软雅黑"/>
+              </a:rPr>
+              <a:t>外滩·出海课堂  ·  香港大学经管学院上海中心 × 复旦大学住房政策研究中心、上海市杨浦区科技企业联合会  ·  V1.1 建议稿  ·  2026年9月</a:t>
+            </a:r>
+          </a:p>
+        </p:txBody>
+      </p:sp>
+    </p:spTree>
+  </p:cSld>
+  <p:clrMapOvr>
+    <a:masterClrMapping/>
+  </p:clrMapOvr>
+</p:sld>
+</file>
+
+<file path=ppt/slides/slide13.xml><?xml version="1.0" encoding="utf-8"?>
+<p:sld xmlns:a="http://schemas.openxmlformats.org/drawingml/2006/main" xmlns:p="http://schemas.openxmlformats.org/presentationml/2006/main" xmlns:r="http://schemas.openxmlformats.org/officeDocument/2006/relationships">
+  <p:cSld>
+    <p:spTree>
+      <p:nvGrpSpPr>
+        <p:cNvPr id="1" name=""/>
+        <p:cNvGrpSpPr/>
+        <p:nvPr/>
+      </p:nvGrpSpPr>
+      <p:grpSpPr/>
+      <p:sp>
+        <p:nvSpPr>
+          <p:cNvPr id="2" name="Rectangle 1"/>
+          <p:cNvSpPr/>
+          <p:nvPr/>
+        </p:nvSpPr>
+        <p:spPr>
+          <a:xfrm>
+            <a:off x="0" y="0"/>
+            <a:ext cx="12191695" cy="960120"/>
+          </a:xfrm>
+          <a:prstGeom prst="rect">
+            <a:avLst/>
+          </a:prstGeom>
+          <a:solidFill>
+            <a:srgbClr val="003D2E"/>
+          </a:solidFill>
+          <a:ln>
+            <a:noFill/>
+          </a:ln>
+          <a:effectLst/>
+        </p:spPr>
+        <p:style>
+          <a:lnRef idx="1">
+            <a:schemeClr val="accent1"/>
+          </a:lnRef>
+          <a:fillRef idx="3">
+            <a:schemeClr val="accent1"/>
+          </a:fillRef>
+          <a:effectRef idx="2">
+            <a:schemeClr val="accent1"/>
+          </a:effectRef>
+          <a:fontRef idx="minor">
+            <a:schemeClr val="lt1"/>
+          </a:fontRef>
+        </p:style>
+        <p:txBody>
+          <a:bodyPr rtlCol="0" anchor="ctr"/>
+          <a:lstStyle/>
+          <a:p>
+            <a:pPr algn="ctr"/>
+          </a:p>
+        </p:txBody>
+      </p:sp>
+      <p:sp>
+        <p:nvSpPr>
+          <p:cNvPr id="3" name="Rectangle 2"/>
+          <p:cNvSpPr/>
+          <p:nvPr/>
+        </p:nvSpPr>
+        <p:spPr>
+          <a:xfrm>
+            <a:off x="0" y="960120"/>
+            <a:ext cx="12191695" cy="44450"/>
+          </a:xfrm>
+          <a:prstGeom prst="rect">
+            <a:avLst/>
+          </a:prstGeom>
+          <a:solidFill>
+            <a:srgbClr val="C4A35A"/>
+          </a:solidFill>
+          <a:ln>
+            <a:noFill/>
+          </a:ln>
+          <a:effectLst/>
+        </p:spPr>
+        <p:style>
+          <a:lnRef idx="1">
+            <a:schemeClr val="accent1"/>
+          </a:lnRef>
+          <a:fillRef idx="3">
+            <a:schemeClr val="accent1"/>
+          </a:fillRef>
+          <a:effectRef idx="2">
+            <a:schemeClr val="accent1"/>
+          </a:effectRef>
+          <a:fontRef idx="minor">
+            <a:schemeClr val="lt1"/>
+          </a:fontRef>
+        </p:style>
+        <p:txBody>
+          <a:bodyPr rtlCol="0" anchor="ctr"/>
+          <a:lstStyle/>
+          <a:p>
+            <a:pPr algn="ctr"/>
+          </a:p>
+        </p:txBody>
+      </p:sp>
+      <p:sp>
+        <p:nvSpPr>
+          <p:cNvPr id="4" name="TextBox 3"/>
+          <p:cNvSpPr txBox="1"/>
+          <p:nvPr/>
+        </p:nvSpPr>
+        <p:spPr>
+          <a:xfrm>
+            <a:off x="502920" y="164592"/>
+            <a:ext cx="10241280" cy="640080"/>
+          </a:xfrm>
+          <a:prstGeom prst="rect">
+            <a:avLst/>
+          </a:prstGeom>
+          <a:noFill/>
+        </p:spPr>
+        <p:txBody>
+          <a:bodyPr wrap="square" anchor="ctr">
+            <a:spAutoFit/>
+          </a:bodyPr>
+          <a:lstStyle/>
+          <a:p>
+            <a:pPr algn="l"/>
+            <a:r>
+              <a:rPr sz="2400" b="1">
+                <a:solidFill>
+                  <a:srgbClr val="FFFFFF"/>
+                </a:solidFill>
+                <a:latin typeface="微软雅黑"/>
+                <a:ea typeface="微软雅黑"/>
+              </a:rPr>
+              <a:t>下一步：三件事，合作就算成立</a:t>
+            </a:r>
+          </a:p>
+        </p:txBody>
+      </p:sp>
+      <p:sp>
+        <p:nvSpPr>
+          <p:cNvPr id="5" name="TextBox 4"/>
+          <p:cNvSpPr txBox="1"/>
+          <p:nvPr/>
+        </p:nvSpPr>
+        <p:spPr>
+          <a:xfrm>
+            <a:off x="10515600" y="164592"/>
+            <a:ext cx="1280160" cy="640080"/>
+          </a:xfrm>
+          <a:prstGeom prst="rect">
+            <a:avLst/>
+          </a:prstGeom>
+          <a:noFill/>
+        </p:spPr>
+        <p:txBody>
+          <a:bodyPr wrap="square" anchor="ctr">
+            <a:spAutoFit/>
+          </a:bodyPr>
+          <a:lstStyle/>
+          <a:p>
+            <a:pPr algn="r"/>
+            <a:r>
+              <a:rPr sz="1200" b="1">
+                <a:solidFill>
+                  <a:srgbClr val="C4A35A"/>
+                </a:solidFill>
+                <a:latin typeface="微软雅黑"/>
+                <a:ea typeface="微软雅黑"/>
+              </a:rPr>
+              <a:t>13/13</a:t>
             </a:r>
           </a:p>
         </p:txBody>
@@ -5041,7 +5824,7 @@
                 <a:latin typeface="微软雅黑"/>
                 <a:ea typeface="微软雅黑"/>
               </a:rPr>
-              <a:t>潘老师确认：首场主题窗口、场地档期、院内是否需法务/院务预审。</a:t>
+              <a:t>潘老师确认：出海课资料、主任可出席窗口、首场外滩档期、院内是否需预审。</a:t>
             </a:r>
           </a:p>
         </p:txBody>
@@ -5369,7 +6152,7 @@
                 <a:latin typeface="微软雅黑"/>
                 <a:ea typeface="微软雅黑"/>
               </a:rPr>
-              <a:t>费用到账后 7 日内提交客群画像与 80 人名单框架，进入首场倒排。</a:t>
+              <a:t>费用到账后 7 日内提交出海客群画像与 80 人名单，并锁定一场主任体验活动。</a:t>
             </a:r>
           </a:p>
         </p:txBody>
@@ -5405,7 +6188,7 @@
                 <a:latin typeface="微软雅黑"/>
                 <a:ea typeface="微软雅黑"/>
               </a:rPr>
-              <a:t>接口人建议：潘嘉琰  招生官（华东 · EMBA）
+              <a:t>接口人建议：潘嘉琰  华东华中 EMBA 招生与市场（经管上海中心平台）
 (86) 180 1860 6086  ·  jyanpan@hku.hk  ·  上海市人民路336号 外滩SOHO F栋</a:t>
             </a:r>
           </a:p>
@@ -5442,7 +6225,7 @@
                 <a:latin typeface="微软雅黑"/>
                 <a:ea typeface="微软雅黑"/>
               </a:rPr>
-              <a:t>外滩·产业课堂  ·  香港大学经管学院上海中心 × 复旦大学住房政策研究中心、上海市杨浦区科技企业联合会  ·  V1.0 建议稿  ·  2026年9月</a:t>
+              <a:t>外滩·出海课堂  ·  香港大学经管学院上海中心 × 复旦大学住房政策研究中心、上海市杨浦区科技企业联合会  ·  V1.1 建议稿  ·  2026年9月</a:t>
             </a:r>
           </a:p>
         </p:txBody>
@@ -5584,7 +6367,7 @@
                 <a:latin typeface="微软雅黑"/>
                 <a:ea typeface="微软雅黑"/>
               </a:rPr>
-              <a:t>给招生官的一页：先定思路，再谈合作</a:t>
+              <a:t>2026年9月3日 交流：先听懂对方怎么说</a:t>
             </a:r>
           </a:p>
         </p:txBody>
@@ -5620,7 +6403,7 @@
                 <a:latin typeface="微软雅黑"/>
                 <a:ea typeface="微软雅黑"/>
               </a:rPr>
-              <a:t>02/12</a:t>
+              <a:t>02/13</a:t>
             </a:r>
           </a:p>
         </p:txBody>
@@ -5633,8 +6416,8 @@
         </p:nvSpPr>
         <p:spPr>
           <a:xfrm>
-            <a:off x="457200" y="1280160"/>
-            <a:ext cx="11247120" cy="1417320"/>
+            <a:off x="457200" y="1170432"/>
+            <a:ext cx="11247120" cy="960120"/>
           </a:xfrm>
           <a:prstGeom prst="roundRect">
             <a:avLst>
@@ -5679,8 +6462,8 @@
         </p:nvSpPr>
         <p:spPr>
           <a:xfrm>
-            <a:off x="685800" y="1417320"/>
-            <a:ext cx="10789920" cy="1143000"/>
+            <a:off x="685800" y="1280160"/>
+            <a:ext cx="10789920" cy="731520"/>
           </a:xfrm>
           <a:prstGeom prst="rect">
             <a:avLst/>
@@ -5695,14 +6478,14 @@
           <a:p>
             <a:pPr algn="l"/>
             <a:r>
-              <a:rPr sz="1800" b="0">
+              <a:rPr sz="1600" b="0">
                 <a:solidFill>
                   <a:srgbClr val="1A2420"/>
                 </a:solidFill>
                 <a:latin typeface="微软雅黑"/>
                 <a:ea typeface="微软雅黑"/>
               </a:rPr>
-              <a:t>不把外滩中心做成宣讲会会场，而做成可持续出 EMBA 生源的产业课堂：港大讲全球视野与学位通道，我方送进对的产业高管；先收一笔前期策划费，把 90 天和首场锁住。</a:t>
+              <a:t>出海是港大点名的合作赛道。先让上海中心主任到高质量的场有直观感受，再把外滩课堂做成 EMBA 粘性；先收一笔前期策划费，90 天把这两件事锁住。</a:t>
             </a:r>
           </a:p>
         </p:txBody>
@@ -5715,8 +6498,8 @@
         </p:nvSpPr>
         <p:spPr>
           <a:xfrm>
-            <a:off x="457200" y="2926080"/>
-            <a:ext cx="5532120" cy="1463040"/>
+            <a:off x="457200" y="2331720"/>
+            <a:ext cx="5532120" cy="1737360"/>
           </a:xfrm>
           <a:prstGeom prst="roundRect">
             <a:avLst>
@@ -5761,8 +6544,8 @@
         </p:nvSpPr>
         <p:spPr>
           <a:xfrm>
-            <a:off x="457200" y="2926080"/>
-            <a:ext cx="109728" cy="1463040"/>
+            <a:off x="457200" y="2331720"/>
+            <a:ext cx="109728" cy="1737360"/>
           </a:xfrm>
           <a:prstGeom prst="rect">
             <a:avLst/>
@@ -5805,7 +6588,7 @@
         </p:nvSpPr>
         <p:spPr>
           <a:xfrm>
-            <a:off x="777240" y="3090672"/>
+            <a:off x="777240" y="2496312"/>
             <a:ext cx="5029200" cy="365760"/>
           </a:xfrm>
           <a:prstGeom prst="rect">
@@ -5828,7 +6611,7 @@
                 <a:latin typeface="微软雅黑"/>
                 <a:ea typeface="微软雅黑"/>
               </a:rPr>
-              <a:t>01  对方要什么</a:t>
+              <a:t>合作层级</a:t>
             </a:r>
           </a:p>
         </p:txBody>
@@ -5841,8 +6624,8 @@
         </p:nvSpPr>
         <p:spPr>
           <a:xfrm>
-            <a:off x="777240" y="3493008"/>
-            <a:ext cx="5029200" cy="731520"/>
+            <a:off x="777240" y="2898648"/>
+            <a:ext cx="5029200" cy="1005840"/>
           </a:xfrm>
           <a:prstGeom prst="rect">
             <a:avLst/>
@@ -5857,14 +6640,14 @@
           <a:p>
             <a:pPr algn="l"/>
             <a:r>
-              <a:rPr sz="1300" b="0">
-                <a:solidFill>
-                  <a:srgbClr val="5B6B64"/>
-                </a:solidFill>
-                <a:latin typeface="微软雅黑"/>
-                <a:ea typeface="微软雅黑"/>
-              </a:rPr>
-              <a:t>符合 EMBA 画像的产业决策者持续到场，而不是一次性宣讲会人头。</a:t>
+              <a:rPr sz="1400" b="0">
+                <a:solidFill>
+                  <a:srgbClr val="1A2420"/>
+                </a:solidFill>
+                <a:latin typeface="微软雅黑"/>
+                <a:ea typeface="微软雅黑"/>
+              </a:rPr>
+              <a:t>从上海中心角度看，不能只停在 EMBA，要从经管学院维度做。</a:t>
             </a:r>
           </a:p>
         </p:txBody>
@@ -5877,8 +6660,8 @@
         </p:nvSpPr>
         <p:spPr>
           <a:xfrm>
-            <a:off x="6172200" y="2926080"/>
-            <a:ext cx="5532120" cy="1463040"/>
+            <a:off x="6172200" y="2331720"/>
+            <a:ext cx="5532120" cy="1737360"/>
           </a:xfrm>
           <a:prstGeom prst="roundRect">
             <a:avLst>
@@ -5923,8 +6706,8 @@
         </p:nvSpPr>
         <p:spPr>
           <a:xfrm>
-            <a:off x="6172200" y="2926080"/>
-            <a:ext cx="109728" cy="1463040"/>
+            <a:off x="6172200" y="2331720"/>
+            <a:ext cx="109728" cy="1737360"/>
           </a:xfrm>
           <a:prstGeom prst="rect">
             <a:avLst/>
@@ -5967,7 +6750,7 @@
         </p:nvSpPr>
         <p:spPr>
           <a:xfrm>
-            <a:off x="6492240" y="3090672"/>
+            <a:off x="6492240" y="2496312"/>
             <a:ext cx="5029200" cy="365760"/>
           </a:xfrm>
           <a:prstGeom prst="rect">
@@ -5990,7 +6773,7 @@
                 <a:latin typeface="微软雅黑"/>
                 <a:ea typeface="微软雅黑"/>
               </a:rPr>
-              <a:t>02  我们做什么</a:t>
+              <a:t>主赛道</a:t>
             </a:r>
           </a:p>
         </p:txBody>
@@ -6003,8 +6786,8 @@
         </p:nvSpPr>
         <p:spPr>
           <a:xfrm>
-            <a:off x="6492240" y="3493008"/>
-            <a:ext cx="5029200" cy="731520"/>
+            <a:off x="6492240" y="2898648"/>
+            <a:ext cx="5029200" cy="1005840"/>
           </a:xfrm>
           <a:prstGeom prst="rect">
             <a:avLst/>
@@ -6019,14 +6802,14 @@
           <a:p>
             <a:pPr algn="l"/>
             <a:r>
-              <a:rPr sz="1300" b="0">
-                <a:solidFill>
-                  <a:srgbClr val="5B6B64"/>
-                </a:solidFill>
-                <a:latin typeface="微软雅黑"/>
-                <a:ea typeface="微软雅黑"/>
-              </a:rPr>
-              <a:t>把招生嵌进产业闭门课：议题、名单、现场、会后分级，一口做完。</a:t>
+              <a:rPr sz="1400" b="0">
+                <a:solidFill>
+                  <a:srgbClr val="1A2420"/>
+                </a:solidFill>
+                <a:latin typeface="微软雅黑"/>
+                <a:ea typeface="微软雅黑"/>
+              </a:rPr>
+              <a:t>国内 AI 港大并无断崖优势；出海、港股、跨境金融才是港大打不输的牌。</a:t>
             </a:r>
           </a:p>
         </p:txBody>
@@ -6039,8 +6822,8 @@
         </p:nvSpPr>
         <p:spPr>
           <a:xfrm>
-            <a:off x="457200" y="4526280"/>
-            <a:ext cx="5532120" cy="1463040"/>
+            <a:off x="457200" y="4206240"/>
+            <a:ext cx="5532120" cy="1737360"/>
           </a:xfrm>
           <a:prstGeom prst="roundRect">
             <a:avLst>
@@ -6085,8 +6868,8 @@
         </p:nvSpPr>
         <p:spPr>
           <a:xfrm>
-            <a:off x="457200" y="4526280"/>
-            <a:ext cx="109728" cy="1463040"/>
+            <a:off x="457200" y="4206240"/>
+            <a:ext cx="109728" cy="1737360"/>
           </a:xfrm>
           <a:prstGeom prst="rect">
             <a:avLst/>
@@ -6129,7 +6912,7 @@
         </p:nvSpPr>
         <p:spPr>
           <a:xfrm>
-            <a:off x="777240" y="4690872"/>
+            <a:off x="777240" y="4370832"/>
             <a:ext cx="5029200" cy="365760"/>
           </a:xfrm>
           <a:prstGeom prst="rect">
@@ -6152,7 +6935,7 @@
                 <a:latin typeface="微软雅黑"/>
                 <a:ea typeface="微软雅黑"/>
               </a:rPr>
-              <a:t>03  怎么形成合作</a:t>
+              <a:t>怎么启动</a:t>
             </a:r>
           </a:p>
         </p:txBody>
@@ -6165,8 +6948,8 @@
         </p:nvSpPr>
         <p:spPr>
           <a:xfrm>
-            <a:off x="777240" y="5093208"/>
-            <a:ext cx="5029200" cy="731520"/>
+            <a:off x="777240" y="4773168"/>
+            <a:ext cx="5029200" cy="1005840"/>
           </a:xfrm>
           <a:prstGeom prst="rect">
             <a:avLst/>
@@ -6181,14 +6964,14 @@
           <a:p>
             <a:pPr algn="l"/>
             <a:r>
-              <a:rPr sz="1300" b="0">
-                <a:solidFill>
-                  <a:srgbClr val="5B6B64"/>
-                </a:solidFill>
-                <a:latin typeface="微软雅黑"/>
-                <a:ea typeface="微软雅黑"/>
-              </a:rPr>
-              <a:t>签一份短协议，先收 前期联合策划服务费 ¥88,000，把 90 天和首场锁住。</a:t>
+              <a:rPr sz="1400" b="0">
+                <a:solidFill>
+                  <a:srgbClr val="1A2420"/>
+                </a:solidFill>
+                <a:latin typeface="微软雅黑"/>
+                <a:ea typeface="微软雅黑"/>
+              </a:rPr>
+              <a:t>有总领事、高质量企业家在场的活动，潘老师邀中心主任到场，让主任先有感受。</a:t>
             </a:r>
           </a:p>
         </p:txBody>
@@ -6201,8 +6984,8 @@
         </p:nvSpPr>
         <p:spPr>
           <a:xfrm>
-            <a:off x="6172200" y="4526280"/>
-            <a:ext cx="5532120" cy="1463040"/>
+            <a:off x="6172200" y="4206240"/>
+            <a:ext cx="5532120" cy="1737360"/>
           </a:xfrm>
           <a:prstGeom prst="roundRect">
             <a:avLst>
@@ -6247,8 +7030,8 @@
         </p:nvSpPr>
         <p:spPr>
           <a:xfrm>
-            <a:off x="6172200" y="4526280"/>
-            <a:ext cx="109728" cy="1463040"/>
+            <a:off x="6172200" y="4206240"/>
+            <a:ext cx="109728" cy="1737360"/>
           </a:xfrm>
           <a:prstGeom prst="rect">
             <a:avLst/>
@@ -6291,7 +7074,7 @@
         </p:nvSpPr>
         <p:spPr>
           <a:xfrm>
-            <a:off x="6492240" y="4690872"/>
+            <a:off x="6492240" y="4370832"/>
             <a:ext cx="5029200" cy="365760"/>
           </a:xfrm>
           <a:prstGeom prst="rect">
@@ -6314,7 +7097,7 @@
                 <a:latin typeface="微软雅黑"/>
                 <a:ea typeface="微软雅黑"/>
               </a:rPr>
-              <a:t>04  故意不做的</a:t>
+              <a:t>角色</a:t>
             </a:r>
           </a:p>
         </p:txBody>
@@ -6327,8 +7110,8 @@
         </p:nvSpPr>
         <p:spPr>
           <a:xfrm>
-            <a:off x="6492240" y="5093208"/>
-            <a:ext cx="5029200" cy="731520"/>
+            <a:off x="6492240" y="4773168"/>
+            <a:ext cx="5029200" cy="1005840"/>
           </a:xfrm>
           <a:prstGeom prst="rect">
             <a:avLst/>
@@ -6343,14 +7126,14 @@
           <a:p>
             <a:pPr algn="l"/>
             <a:r>
-              <a:rPr sz="1300" b="0">
-                <a:solidFill>
-                  <a:srgbClr val="5B6B64"/>
-                </a:solidFill>
-                <a:latin typeface="微软雅黑"/>
-                <a:ea typeface="微软雅黑"/>
-              </a:rPr>
-              <a:t>不碰学费分成、不承诺录取人数、不自称联合学位或港大从属机构。</a:t>
+              <a:rPr sz="1400" b="0">
+                <a:solidFill>
+                  <a:srgbClr val="1A2420"/>
+                </a:solidFill>
+                <a:latin typeface="微软雅黑"/>
+                <a:ea typeface="微软雅黑"/>
+              </a:rPr>
+              <a:t>潘老师是 EMBA 粘性，管华东华中招生与市场；多维度合作在主任，不在招生官越权承诺。</a:t>
             </a:r>
           </a:p>
         </p:txBody>
@@ -6386,7 +7169,7 @@
                 <a:latin typeface="微软雅黑"/>
                 <a:ea typeface="微软雅黑"/>
               </a:rPr>
-              <a:t>外滩·产业课堂  ·  香港大学经管学院上海中心 × 复旦大学住房政策研究中心、上海市杨浦区科技企业联合会  ·  V1.0 建议稿  ·  2026年9月</a:t>
+              <a:t>外滩·出海课堂  ·  香港大学经管学院上海中心 × 复旦大学住房政策研究中心、上海市杨浦区科技企业联合会  ·  V1.1 建议稿  ·  2026年9月</a:t>
             </a:r>
           </a:p>
         </p:txBody>
@@ -6528,7 +7311,7 @@
                 <a:latin typeface="微软雅黑"/>
                 <a:ea typeface="微软雅黑"/>
               </a:rPr>
-              <a:t>为什么是现在：上海中心刚启用，招生窗口已打开</a:t>
+              <a:t>对方需求四件事（按洽谈整理，不是我们替对方编的）</a:t>
             </a:r>
           </a:p>
         </p:txBody>
@@ -6564,164 +7347,21 @@
                 <a:latin typeface="微软雅黑"/>
                 <a:ea typeface="微软雅黑"/>
               </a:rPr>
-              <a:t>03/12</a:t>
-            </a:r>
-          </a:p>
-        </p:txBody>
-      </p:sp>
-      <p:sp>
-        <p:nvSpPr>
-          <p:cNvPr id="6" name="TextBox 5"/>
-          <p:cNvSpPr txBox="1"/>
-          <p:nvPr/>
-        </p:nvSpPr>
-        <p:spPr>
-          <a:xfrm>
-            <a:off x="502920" y="1234440"/>
-            <a:ext cx="11247120" cy="4023360"/>
-          </a:xfrm>
-          <a:prstGeom prst="rect">
-            <a:avLst/>
-          </a:prstGeom>
-          <a:noFill/>
-        </p:spPr>
-        <p:txBody>
-          <a:bodyPr wrap="square">
-            <a:spAutoFit/>
-          </a:bodyPr>
-          <a:lstStyle/>
-          <a:p>
-            <a:pPr>
-              <a:lnSpc>
-                <a:spcPct val="115000"/>
-              </a:lnSpc>
-              <a:spcAft>
-                <a:spcPts val="1200"/>
-              </a:spcAft>
-            </a:pPr>
-            <a:r>
-              <a:rPr sz="1400" b="1">
-                <a:solidFill>
-                  <a:srgbClr val="C4A35A"/>
-                </a:solidFill>
-                <a:latin typeface="微软雅黑"/>
-                <a:ea typeface="微软雅黑"/>
-              </a:rPr>
-              <a:t>●  </a:t>
-            </a:r>
-            <a:r>
-              <a:rPr sz="1600" b="0">
-                <a:solidFill>
-                  <a:srgbClr val="1A2420"/>
-                </a:solidFill>
-                <a:latin typeface="微软雅黑"/>
-                <a:ea typeface="微软雅黑"/>
-              </a:rPr>
-              <a:t>2025 年 12 月 6 日，港大经管学院上海中心在黄浦外滩 SOHO F 栋启用，华东校友会同步成立；中心是港大与黄浦区战略合作的落地载体。</a:t>
-            </a:r>
-          </a:p>
-          <a:p>
-            <a:pPr>
-              <a:lnSpc>
-                <a:spcPct val="115000"/>
-              </a:lnSpc>
-              <a:spcAft>
-                <a:spcPts val="1200"/>
-              </a:spcAft>
-            </a:pPr>
-            <a:r>
-              <a:rPr sz="1400" b="1">
-                <a:solidFill>
-                  <a:srgbClr val="C4A35A"/>
-                </a:solidFill>
-                <a:latin typeface="微软雅黑"/>
-                <a:ea typeface="微软雅黑"/>
-              </a:rPr>
-              <a:t>●  </a:t>
-            </a:r>
-            <a:r>
-              <a:rPr sz="1600" b="0">
-                <a:solidFill>
-                  <a:srgbClr val="1A2420"/>
-                </a:solidFill>
-                <a:latin typeface="微软雅黑"/>
-                <a:ea typeface="微软雅黑"/>
-              </a:rPr>
-              <a:t>公开定位为「一院三平台双引擎」：国际学术交流、产业转化服务、科创孵化服务；研究上以数智与金融科技为双引擎，服务华东企业家校友并辐射商界领袖。</a:t>
-            </a:r>
-          </a:p>
-          <a:p>
-            <a:pPr>
-              <a:lnSpc>
-                <a:spcPct val="115000"/>
-              </a:lnSpc>
-              <a:spcAft>
-                <a:spcPts val="1200"/>
-              </a:spcAft>
-            </a:pPr>
-            <a:r>
-              <a:rPr sz="1400" b="1">
-                <a:solidFill>
-                  <a:srgbClr val="C4A35A"/>
-                </a:solidFill>
-                <a:latin typeface="微软雅黑"/>
-                <a:ea typeface="微软雅黑"/>
-              </a:rPr>
-              <a:t>●  </a:t>
-            </a:r>
-            <a:r>
-              <a:rPr sz="1600" b="0">
-                <a:solidFill>
-                  <a:srgbClr val="1A2420"/>
-                </a:solidFill>
-                <a:latin typeface="微软雅黑"/>
-                <a:ea typeface="微软雅黑"/>
-              </a:rPr>
-              <a:t>名片对应岗位是招生官。华东 EMBA 联络人即潘嘉琰老师，项目面向 8 年以上管理经验的董事长、总裁、创始人、合伙人与部门主管，滚动招生。</a:t>
-            </a:r>
-          </a:p>
-          <a:p>
-            <a:pPr>
-              <a:lnSpc>
-                <a:spcPct val="115000"/>
-              </a:lnSpc>
-              <a:spcAft>
-                <a:spcPts val="1200"/>
-              </a:spcAft>
-            </a:pPr>
-            <a:r>
-              <a:rPr sz="1400" b="1">
-                <a:solidFill>
-                  <a:srgbClr val="C4A35A"/>
-                </a:solidFill>
-                <a:latin typeface="微软雅黑"/>
-                <a:ea typeface="微软雅黑"/>
-              </a:rPr>
-              <a:t>●  </a:t>
-            </a:r>
-            <a:r>
-              <a:rPr sz="1600" b="0">
-                <a:solidFill>
-                  <a:srgbClr val="1A2420"/>
-                </a:solidFill>
-                <a:latin typeface="微软雅黑"/>
-                <a:ea typeface="微软雅黑"/>
-              </a:rPr>
-              <a:t>中心不缺品牌、不缺场地、不缺院方师资。缺的是：把产业转化平台变成高频、高质量、可跟进的到场人群，并稳定输送符合 EMBA 画像的决策者。</a:t>
-            </a:r>
-          </a:p>
-        </p:txBody>
-      </p:sp>
-      <p:sp>
-        <p:nvSpPr>
-          <p:cNvPr id="7" name="Rounded Rectangle 6"/>
+              <a:t>03/13</a:t>
+            </a:r>
+          </a:p>
+        </p:txBody>
+      </p:sp>
+      <p:sp>
+        <p:nvSpPr>
+          <p:cNvPr id="6" name="Rounded Rectangle 5"/>
           <p:cNvSpPr/>
           <p:nvPr/>
         </p:nvSpPr>
         <p:spPr>
           <a:xfrm>
-            <a:off x="457200" y="5349240"/>
-            <a:ext cx="11247120" cy="960120"/>
+            <a:off x="457200" y="1207008"/>
+            <a:ext cx="11247120" cy="1078992"/>
           </a:xfrm>
           <a:prstGeom prst="roundRect">
             <a:avLst>
@@ -6729,7 +7369,7 @@
             </a:avLst>
           </a:prstGeom>
           <a:solidFill>
-            <a:srgbClr val="F7F4EC"/>
+            <a:srgbClr val="FFFFFF"/>
           </a:solidFill>
           <a:ln>
             <a:noFill/>
@@ -6760,36 +7400,80 @@
       </p:sp>
       <p:sp>
         <p:nvSpPr>
+          <p:cNvPr id="7" name="Rectangle 6"/>
+          <p:cNvSpPr/>
+          <p:nvPr/>
+        </p:nvSpPr>
+        <p:spPr>
+          <a:xfrm>
+            <a:off x="457200" y="1207008"/>
+            <a:ext cx="128016" cy="1078992"/>
+          </a:xfrm>
+          <a:prstGeom prst="rect">
+            <a:avLst/>
+          </a:prstGeom>
+          <a:solidFill>
+            <a:srgbClr val="C4A35A"/>
+          </a:solidFill>
+          <a:ln>
+            <a:noFill/>
+          </a:ln>
+          <a:effectLst/>
+        </p:spPr>
+        <p:style>
+          <a:lnRef idx="1">
+            <a:schemeClr val="accent1"/>
+          </a:lnRef>
+          <a:fillRef idx="3">
+            <a:schemeClr val="accent1"/>
+          </a:fillRef>
+          <a:effectRef idx="2">
+            <a:schemeClr val="accent1"/>
+          </a:effectRef>
+          <a:fontRef idx="minor">
+            <a:schemeClr val="lt1"/>
+          </a:fontRef>
+        </p:style>
+        <p:txBody>
+          <a:bodyPr rtlCol="0" anchor="ctr"/>
+          <a:lstStyle/>
+          <a:p>
+            <a:pPr algn="ctr"/>
+          </a:p>
+        </p:txBody>
+      </p:sp>
+      <p:sp>
+        <p:nvSpPr>
           <p:cNvPr id="8" name="TextBox 7"/>
           <p:cNvSpPr txBox="1"/>
           <p:nvPr/>
         </p:nvSpPr>
         <p:spPr>
           <a:xfrm>
-            <a:off x="685800" y="5486400"/>
-            <a:ext cx="10789920" cy="685800"/>
-          </a:xfrm>
-          <a:prstGeom prst="rect">
-            <a:avLst/>
-          </a:prstGeom>
-          <a:noFill/>
-        </p:spPr>
-        <p:txBody>
-          <a:bodyPr wrap="square" anchor="ctr">
+            <a:off x="777240" y="1316736"/>
+            <a:ext cx="10698480" cy="347472"/>
+          </a:xfrm>
+          <a:prstGeom prst="rect">
+            <a:avLst/>
+          </a:prstGeom>
+          <a:noFill/>
+        </p:spPr>
+        <p:txBody>
+          <a:bodyPr wrap="square" anchor="t">
             <a:spAutoFit/>
           </a:bodyPr>
           <a:lstStyle/>
           <a:p>
             <a:pPr algn="l"/>
             <a:r>
-              <a:rPr sz="1400" b="0">
-                <a:solidFill>
-                  <a:srgbClr val="1A2420"/>
-                </a:solidFill>
-                <a:latin typeface="微软雅黑"/>
-                <a:ea typeface="微软雅黑"/>
-              </a:rPr>
-              <a:t>对接口径：潘嘉琰老师为港大经管 EMBA 华东联络人。本方案只服务这一条招生线，不扩散成「全学院代理」。</a:t>
+              <a:rPr sz="1600" b="1">
+                <a:solidFill>
+                  <a:srgbClr val="003D2E"/>
+                </a:solidFill>
+                <a:latin typeface="微软雅黑"/>
+                <a:ea typeface="微软雅黑"/>
+              </a:rPr>
+              <a:t>1.  高端教育招生</a:t>
             </a:r>
           </a:p>
         </p:txBody>
@@ -6797,6 +7481,528 @@
       <p:sp>
         <p:nvSpPr>
           <p:cNvPr id="9" name="TextBox 8"/>
+          <p:cNvSpPr txBox="1"/>
+          <p:nvPr/>
+        </p:nvSpPr>
+        <p:spPr>
+          <a:xfrm>
+            <a:off x="777240" y="1682496"/>
+            <a:ext cx="10698480" cy="502920"/>
+          </a:xfrm>
+          <a:prstGeom prst="rect">
+            <a:avLst/>
+          </a:prstGeom>
+          <a:noFill/>
+        </p:spPr>
+        <p:txBody>
+          <a:bodyPr wrap="square" anchor="t">
+            <a:spAutoFit/>
+          </a:bodyPr>
+          <a:lstStyle/>
+          <a:p>
+            <a:pPr algn="l"/>
+            <a:r>
+              <a:rPr sz="1300" b="0">
+                <a:solidFill>
+                  <a:srgbClr val="5B6B64"/>
+                </a:solidFill>
+                <a:latin typeface="微软雅黑"/>
+                <a:ea typeface="微软雅黑"/>
+              </a:rPr>
+              <a:t>华东华中 EMBA / 高端项目要做起来。对方称今年已超北京、深圳中心，要持续高质量到场，而不是一次性宣讲人头。</a:t>
+            </a:r>
+          </a:p>
+        </p:txBody>
+      </p:sp>
+      <p:sp>
+        <p:nvSpPr>
+          <p:cNvPr id="10" name="Rounded Rectangle 9"/>
+          <p:cNvSpPr/>
+          <p:nvPr/>
+        </p:nvSpPr>
+        <p:spPr>
+          <a:xfrm>
+            <a:off x="457200" y="2414016"/>
+            <a:ext cx="11247120" cy="1078992"/>
+          </a:xfrm>
+          <a:prstGeom prst="roundRect">
+            <a:avLst>
+              <a:gd name="adj" fmla="val 8000"/>
+            </a:avLst>
+          </a:prstGeom>
+          <a:solidFill>
+            <a:srgbClr val="FFFFFF"/>
+          </a:solidFill>
+          <a:ln>
+            <a:noFill/>
+          </a:ln>
+          <a:effectLst/>
+        </p:spPr>
+        <p:style>
+          <a:lnRef idx="1">
+            <a:schemeClr val="accent1"/>
+          </a:lnRef>
+          <a:fillRef idx="3">
+            <a:schemeClr val="accent1"/>
+          </a:fillRef>
+          <a:effectRef idx="2">
+            <a:schemeClr val="accent1"/>
+          </a:effectRef>
+          <a:fontRef idx="minor">
+            <a:schemeClr val="lt1"/>
+          </a:fontRef>
+        </p:style>
+        <p:txBody>
+          <a:bodyPr rtlCol="0" anchor="ctr"/>
+          <a:lstStyle/>
+          <a:p>
+            <a:pPr algn="ctr"/>
+          </a:p>
+        </p:txBody>
+      </p:sp>
+      <p:sp>
+        <p:nvSpPr>
+          <p:cNvPr id="11" name="Rectangle 10"/>
+          <p:cNvSpPr/>
+          <p:nvPr/>
+        </p:nvSpPr>
+        <p:spPr>
+          <a:xfrm>
+            <a:off x="457200" y="2414016"/>
+            <a:ext cx="128016" cy="1078992"/>
+          </a:xfrm>
+          <a:prstGeom prst="rect">
+            <a:avLst/>
+          </a:prstGeom>
+          <a:solidFill>
+            <a:srgbClr val="C4A35A"/>
+          </a:solidFill>
+          <a:ln>
+            <a:noFill/>
+          </a:ln>
+          <a:effectLst/>
+        </p:spPr>
+        <p:style>
+          <a:lnRef idx="1">
+            <a:schemeClr val="accent1"/>
+          </a:lnRef>
+          <a:fillRef idx="3">
+            <a:schemeClr val="accent1"/>
+          </a:fillRef>
+          <a:effectRef idx="2">
+            <a:schemeClr val="accent1"/>
+          </a:effectRef>
+          <a:fontRef idx="minor">
+            <a:schemeClr val="lt1"/>
+          </a:fontRef>
+        </p:style>
+        <p:txBody>
+          <a:bodyPr rtlCol="0" anchor="ctr"/>
+          <a:lstStyle/>
+          <a:p>
+            <a:pPr algn="ctr"/>
+          </a:p>
+        </p:txBody>
+      </p:sp>
+      <p:sp>
+        <p:nvSpPr>
+          <p:cNvPr id="12" name="TextBox 11"/>
+          <p:cNvSpPr txBox="1"/>
+          <p:nvPr/>
+        </p:nvSpPr>
+        <p:spPr>
+          <a:xfrm>
+            <a:off x="777240" y="2523744"/>
+            <a:ext cx="10698480" cy="347472"/>
+          </a:xfrm>
+          <a:prstGeom prst="rect">
+            <a:avLst/>
+          </a:prstGeom>
+          <a:noFill/>
+        </p:spPr>
+        <p:txBody>
+          <a:bodyPr wrap="square" anchor="t">
+            <a:spAutoFit/>
+          </a:bodyPr>
+          <a:lstStyle/>
+          <a:p>
+            <a:pPr algn="l"/>
+            <a:r>
+              <a:rPr sz="1600" b="1">
+                <a:solidFill>
+                  <a:srgbClr val="003D2E"/>
+                </a:solidFill>
+                <a:latin typeface="微软雅黑"/>
+                <a:ea typeface="微软雅黑"/>
+              </a:rPr>
+              <a:t>2.  港方课程回迁</a:t>
+            </a:r>
+          </a:p>
+        </p:txBody>
+      </p:sp>
+      <p:sp>
+        <p:nvSpPr>
+          <p:cNvPr id="13" name="TextBox 12"/>
+          <p:cNvSpPr txBox="1"/>
+          <p:nvPr/>
+        </p:nvSpPr>
+        <p:spPr>
+          <a:xfrm>
+            <a:off x="777240" y="2889504"/>
+            <a:ext cx="10698480" cy="502920"/>
+          </a:xfrm>
+          <a:prstGeom prst="rect">
+            <a:avLst/>
+          </a:prstGeom>
+          <a:noFill/>
+        </p:spPr>
+        <p:txBody>
+          <a:bodyPr wrap="square" anchor="t">
+            <a:spAutoFit/>
+          </a:bodyPr>
+          <a:lstStyle/>
+          <a:p>
+            <a:pPr algn="l"/>
+            <a:r>
+              <a:rPr sz="1300" b="0">
+                <a:solidFill>
+                  <a:srgbClr val="5B6B64"/>
+                </a:solidFill>
+                <a:latin typeface="微软雅黑"/>
+                <a:ea typeface="微软雅黑"/>
+              </a:rPr>
+              <a:t>复旦–港大 EMBA 已办二十七年，港方课长期在复旦教室上，学员对港大归属感弱。年底起港方课迁回外滩中心，需要配得上的到场与体验。</a:t>
+            </a:r>
+          </a:p>
+        </p:txBody>
+      </p:sp>
+      <p:sp>
+        <p:nvSpPr>
+          <p:cNvPr id="14" name="Rounded Rectangle 13"/>
+          <p:cNvSpPr/>
+          <p:nvPr/>
+        </p:nvSpPr>
+        <p:spPr>
+          <a:xfrm>
+            <a:off x="457200" y="3621024"/>
+            <a:ext cx="11247120" cy="1078992"/>
+          </a:xfrm>
+          <a:prstGeom prst="roundRect">
+            <a:avLst>
+              <a:gd name="adj" fmla="val 8000"/>
+            </a:avLst>
+          </a:prstGeom>
+          <a:solidFill>
+            <a:srgbClr val="FFFFFF"/>
+          </a:solidFill>
+          <a:ln>
+            <a:noFill/>
+          </a:ln>
+          <a:effectLst/>
+        </p:spPr>
+        <p:style>
+          <a:lnRef idx="1">
+            <a:schemeClr val="accent1"/>
+          </a:lnRef>
+          <a:fillRef idx="3">
+            <a:schemeClr val="accent1"/>
+          </a:fillRef>
+          <a:effectRef idx="2">
+            <a:schemeClr val="accent1"/>
+          </a:effectRef>
+          <a:fontRef idx="minor">
+            <a:schemeClr val="lt1"/>
+          </a:fontRef>
+        </p:style>
+        <p:txBody>
+          <a:bodyPr rtlCol="0" anchor="ctr"/>
+          <a:lstStyle/>
+          <a:p>
+            <a:pPr algn="ctr"/>
+          </a:p>
+        </p:txBody>
+      </p:sp>
+      <p:sp>
+        <p:nvSpPr>
+          <p:cNvPr id="15" name="Rectangle 14"/>
+          <p:cNvSpPr/>
+          <p:nvPr/>
+        </p:nvSpPr>
+        <p:spPr>
+          <a:xfrm>
+            <a:off x="457200" y="3621024"/>
+            <a:ext cx="128016" cy="1078992"/>
+          </a:xfrm>
+          <a:prstGeom prst="rect">
+            <a:avLst/>
+          </a:prstGeom>
+          <a:solidFill>
+            <a:srgbClr val="C4A35A"/>
+          </a:solidFill>
+          <a:ln>
+            <a:noFill/>
+          </a:ln>
+          <a:effectLst/>
+        </p:spPr>
+        <p:style>
+          <a:lnRef idx="1">
+            <a:schemeClr val="accent1"/>
+          </a:lnRef>
+          <a:fillRef idx="3">
+            <a:schemeClr val="accent1"/>
+          </a:fillRef>
+          <a:effectRef idx="2">
+            <a:schemeClr val="accent1"/>
+          </a:effectRef>
+          <a:fontRef idx="minor">
+            <a:schemeClr val="lt1"/>
+          </a:fontRef>
+        </p:style>
+        <p:txBody>
+          <a:bodyPr rtlCol="0" anchor="ctr"/>
+          <a:lstStyle/>
+          <a:p>
+            <a:pPr algn="ctr"/>
+          </a:p>
+        </p:txBody>
+      </p:sp>
+      <p:sp>
+        <p:nvSpPr>
+          <p:cNvPr id="16" name="TextBox 15"/>
+          <p:cNvSpPr txBox="1"/>
+          <p:nvPr/>
+        </p:nvSpPr>
+        <p:spPr>
+          <a:xfrm>
+            <a:off x="777240" y="3730752"/>
+            <a:ext cx="10698480" cy="347472"/>
+          </a:xfrm>
+          <a:prstGeom prst="rect">
+            <a:avLst/>
+          </a:prstGeom>
+          <a:noFill/>
+        </p:spPr>
+        <p:txBody>
+          <a:bodyPr wrap="square" anchor="t">
+            <a:spAutoFit/>
+          </a:bodyPr>
+          <a:lstStyle/>
+          <a:p>
+            <a:pPr algn="l"/>
+            <a:r>
+              <a:rPr sz="1600" b="1">
+                <a:solidFill>
+                  <a:srgbClr val="003D2E"/>
+                </a:solidFill>
+                <a:latin typeface="微软雅黑"/>
+                <a:ea typeface="微软雅黑"/>
+              </a:rPr>
+              <a:t>3.  主任先体验</a:t>
+            </a:r>
+          </a:p>
+        </p:txBody>
+      </p:sp>
+      <p:sp>
+        <p:nvSpPr>
+          <p:cNvPr id="17" name="TextBox 16"/>
+          <p:cNvSpPr txBox="1"/>
+          <p:nvPr/>
+        </p:nvSpPr>
+        <p:spPr>
+          <a:xfrm>
+            <a:off x="777240" y="4096512"/>
+            <a:ext cx="10698480" cy="502920"/>
+          </a:xfrm>
+          <a:prstGeom prst="rect">
+            <a:avLst/>
+          </a:prstGeom>
+          <a:noFill/>
+        </p:spPr>
+        <p:txBody>
+          <a:bodyPr wrap="square" anchor="t">
+            <a:spAutoFit/>
+          </a:bodyPr>
+          <a:lstStyle/>
+          <a:p>
+            <a:pPr algn="l"/>
+            <a:r>
+              <a:rPr sz="1300" b="0">
+                <a:solidFill>
+                  <a:srgbClr val="5B6B64"/>
+                </a:solidFill>
+                <a:latin typeface="微软雅黑"/>
+                <a:ea typeface="微软雅黑"/>
+              </a:rPr>
+              <a:t>潘老师明确：口说不行。先看高质量出海场，主任有兴趣，经管学院层合作才好开展。EMBA 只是其中一小块。</a:t>
+            </a:r>
+          </a:p>
+        </p:txBody>
+      </p:sp>
+      <p:sp>
+        <p:nvSpPr>
+          <p:cNvPr id="18" name="Rounded Rectangle 17"/>
+          <p:cNvSpPr/>
+          <p:nvPr/>
+        </p:nvSpPr>
+        <p:spPr>
+          <a:xfrm>
+            <a:off x="457200" y="4828032"/>
+            <a:ext cx="11247120" cy="1078992"/>
+          </a:xfrm>
+          <a:prstGeom prst="roundRect">
+            <a:avLst>
+              <a:gd name="adj" fmla="val 8000"/>
+            </a:avLst>
+          </a:prstGeom>
+          <a:solidFill>
+            <a:srgbClr val="FFFFFF"/>
+          </a:solidFill>
+          <a:ln>
+            <a:noFill/>
+          </a:ln>
+          <a:effectLst/>
+        </p:spPr>
+        <p:style>
+          <a:lnRef idx="1">
+            <a:schemeClr val="accent1"/>
+          </a:lnRef>
+          <a:fillRef idx="3">
+            <a:schemeClr val="accent1"/>
+          </a:fillRef>
+          <a:effectRef idx="2">
+            <a:schemeClr val="accent1"/>
+          </a:effectRef>
+          <a:fontRef idx="minor">
+            <a:schemeClr val="lt1"/>
+          </a:fontRef>
+        </p:style>
+        <p:txBody>
+          <a:bodyPr rtlCol="0" anchor="ctr"/>
+          <a:lstStyle/>
+          <a:p>
+            <a:pPr algn="ctr"/>
+          </a:p>
+        </p:txBody>
+      </p:sp>
+      <p:sp>
+        <p:nvSpPr>
+          <p:cNvPr id="19" name="Rectangle 18"/>
+          <p:cNvSpPr/>
+          <p:nvPr/>
+        </p:nvSpPr>
+        <p:spPr>
+          <a:xfrm>
+            <a:off x="457200" y="4828032"/>
+            <a:ext cx="128016" cy="1078992"/>
+          </a:xfrm>
+          <a:prstGeom prst="rect">
+            <a:avLst/>
+          </a:prstGeom>
+          <a:solidFill>
+            <a:srgbClr val="C4A35A"/>
+          </a:solidFill>
+          <a:ln>
+            <a:noFill/>
+          </a:ln>
+          <a:effectLst/>
+        </p:spPr>
+        <p:style>
+          <a:lnRef idx="1">
+            <a:schemeClr val="accent1"/>
+          </a:lnRef>
+          <a:fillRef idx="3">
+            <a:schemeClr val="accent1"/>
+          </a:fillRef>
+          <a:effectRef idx="2">
+            <a:schemeClr val="accent1"/>
+          </a:effectRef>
+          <a:fontRef idx="minor">
+            <a:schemeClr val="lt1"/>
+          </a:fontRef>
+        </p:style>
+        <p:txBody>
+          <a:bodyPr rtlCol="0" anchor="ctr"/>
+          <a:lstStyle/>
+          <a:p>
+            <a:pPr algn="ctr"/>
+          </a:p>
+        </p:txBody>
+      </p:sp>
+      <p:sp>
+        <p:nvSpPr>
+          <p:cNvPr id="20" name="TextBox 19"/>
+          <p:cNvSpPr txBox="1"/>
+          <p:nvPr/>
+        </p:nvSpPr>
+        <p:spPr>
+          <a:xfrm>
+            <a:off x="777240" y="4937760"/>
+            <a:ext cx="10698480" cy="347472"/>
+          </a:xfrm>
+          <a:prstGeom prst="rect">
+            <a:avLst/>
+          </a:prstGeom>
+          <a:noFill/>
+        </p:spPr>
+        <p:txBody>
+          <a:bodyPr wrap="square" anchor="t">
+            <a:spAutoFit/>
+          </a:bodyPr>
+          <a:lstStyle/>
+          <a:p>
+            <a:pPr algn="l"/>
+            <a:r>
+              <a:rPr sz="1600" b="1">
+                <a:solidFill>
+                  <a:srgbClr val="003D2E"/>
+                </a:solidFill>
+                <a:latin typeface="微软雅黑"/>
+                <a:ea typeface="微软雅黑"/>
+              </a:rPr>
+              <a:t>4.  课与孵化可对接</a:t>
+            </a:r>
+          </a:p>
+        </p:txBody>
+      </p:sp>
+      <p:sp>
+        <p:nvSpPr>
+          <p:cNvPr id="21" name="TextBox 20"/>
+          <p:cNvSpPr txBox="1"/>
+          <p:nvPr/>
+        </p:nvSpPr>
+        <p:spPr>
+          <a:xfrm>
+            <a:off x="777240" y="5303520"/>
+            <a:ext cx="10698480" cy="502920"/>
+          </a:xfrm>
+          <a:prstGeom prst="rect">
+            <a:avLst/>
+          </a:prstGeom>
+          <a:noFill/>
+        </p:spPr>
+        <p:txBody>
+          <a:bodyPr wrap="square" anchor="t">
+            <a:spAutoFit/>
+          </a:bodyPr>
+          <a:lstStyle/>
+          <a:p>
+            <a:pPr algn="l"/>
+            <a:r>
+              <a:rPr sz="1300" b="0">
+                <a:solidFill>
+                  <a:srgbClr val="5B6B64"/>
+                </a:solidFill>
+                <a:latin typeface="微软雅黑"/>
+                <a:ea typeface="微软雅黑"/>
+              </a:rPr>
+              <a:t>本部有企业出海高级管理课，可发资料、谈联合推广。原创谷孵化器、本科研究生海外模块（3–6 个月实习参访）可对接，不塞进本期验收。</a:t>
+            </a:r>
+          </a:p>
+        </p:txBody>
+      </p:sp>
+      <p:sp>
+        <p:nvSpPr>
+          <p:cNvPr id="22" name="TextBox 21"/>
           <p:cNvSpPr txBox="1"/>
           <p:nvPr/>
         </p:nvSpPr>
@@ -6825,7 +8031,7 @@
                 <a:latin typeface="微软雅黑"/>
                 <a:ea typeface="微软雅黑"/>
               </a:rPr>
-              <a:t>外滩·产业课堂  ·  香港大学经管学院上海中心 × 复旦大学住房政策研究中心、上海市杨浦区科技企业联合会  ·  V1.0 建议稿  ·  2026年9月</a:t>
+              <a:t>外滩·出海课堂  ·  香港大学经管学院上海中心 × 复旦大学住房政策研究中心、上海市杨浦区科技企业联合会  ·  V1.1 建议稿  ·  2026年9月</a:t>
             </a:r>
           </a:p>
         </p:txBody>
@@ -6967,7 +8173,7 @@
                 <a:latin typeface="微软雅黑"/>
                 <a:ea typeface="微软雅黑"/>
               </a:rPr>
-              <a:t>双方互补：品牌与场地在对方，产业高管在我方</a:t>
+              <a:t>上海中心怎么运转：四个点位，四项职能</a:t>
             </a:r>
           </a:p>
         </p:txBody>
@@ -7003,7 +8209,7 @@
                 <a:latin typeface="微软雅黑"/>
                 <a:ea typeface="微软雅黑"/>
               </a:rPr>
-              <a:t>04/12</a:t>
+              <a:t>04/13</a:t>
             </a:r>
           </a:p>
         </p:txBody>
@@ -7016,8 +8222,8 @@
         </p:nvSpPr>
         <p:spPr>
           <a:xfrm>
-            <a:off x="457200" y="1280160"/>
-            <a:ext cx="2743200" cy="3063240"/>
+            <a:off x="411480" y="1207008"/>
+            <a:ext cx="2788920" cy="2148840"/>
           </a:xfrm>
           <a:prstGeom prst="roundRect">
             <a:avLst>
@@ -7062,8 +8268,170 @@
         </p:nvSpPr>
         <p:spPr>
           <a:xfrm>
-            <a:off x="457200" y="1280160"/>
-            <a:ext cx="2743200" cy="640080"/>
+            <a:off x="411480" y="1207008"/>
+            <a:ext cx="2788920" cy="502920"/>
+          </a:xfrm>
+          <a:prstGeom prst="rect">
+            <a:avLst/>
+          </a:prstGeom>
+          <a:solidFill>
+            <a:srgbClr val="0A5C46"/>
+          </a:solidFill>
+          <a:ln>
+            <a:noFill/>
+          </a:ln>
+          <a:effectLst/>
+        </p:spPr>
+        <p:style>
+          <a:lnRef idx="1">
+            <a:schemeClr val="accent1"/>
+          </a:lnRef>
+          <a:fillRef idx="3">
+            <a:schemeClr val="accent1"/>
+          </a:fillRef>
+          <a:effectRef idx="2">
+            <a:schemeClr val="accent1"/>
+          </a:effectRef>
+          <a:fontRef idx="minor">
+            <a:schemeClr val="lt1"/>
+          </a:fontRef>
+        </p:style>
+        <p:txBody>
+          <a:bodyPr rtlCol="0" anchor="ctr"/>
+          <a:lstStyle/>
+          <a:p>
+            <a:pPr algn="ctr"/>
+          </a:p>
+        </p:txBody>
+      </p:sp>
+      <p:sp>
+        <p:nvSpPr>
+          <p:cNvPr id="8" name="TextBox 7"/>
+          <p:cNvSpPr txBox="1"/>
+          <p:nvPr/>
+        </p:nvSpPr>
+        <p:spPr>
+          <a:xfrm>
+            <a:off x="411480" y="1207008"/>
+            <a:ext cx="2788920" cy="502920"/>
+          </a:xfrm>
+          <a:prstGeom prst="rect">
+            <a:avLst/>
+          </a:prstGeom>
+          <a:noFill/>
+        </p:spPr>
+        <p:txBody>
+          <a:bodyPr wrap="square" anchor="ctr">
+            <a:spAutoFit/>
+          </a:bodyPr>
+          <a:lstStyle/>
+          <a:p>
+            <a:pPr algn="ctr"/>
+            <a:r>
+              <a:rPr sz="1400" b="1">
+                <a:solidFill>
+                  <a:srgbClr val="FFFFFF"/>
+                </a:solidFill>
+                <a:latin typeface="微软雅黑"/>
+                <a:ea typeface="微软雅黑"/>
+              </a:rPr>
+              <a:t>外滩22号</a:t>
+            </a:r>
+          </a:p>
+        </p:txBody>
+      </p:sp>
+      <p:sp>
+        <p:nvSpPr>
+          <p:cNvPr id="9" name="TextBox 8"/>
+          <p:cNvSpPr txBox="1"/>
+          <p:nvPr/>
+        </p:nvSpPr>
+        <p:spPr>
+          <a:xfrm>
+            <a:off x="521208" y="1828800"/>
+            <a:ext cx="2560320" cy="1371600"/>
+          </a:xfrm>
+          <a:prstGeom prst="rect">
+            <a:avLst/>
+          </a:prstGeom>
+          <a:noFill/>
+        </p:spPr>
+        <p:txBody>
+          <a:bodyPr wrap="square" anchor="t">
+            <a:spAutoFit/>
+          </a:bodyPr>
+          <a:lstStyle/>
+          <a:p>
+            <a:pPr algn="ctr"/>
+            <a:r>
+              <a:rPr sz="1200" b="0">
+                <a:solidFill>
+                  <a:srgbClr val="1A2420"/>
+                </a:solidFill>
+                <a:latin typeface="微软雅黑"/>
+                <a:ea typeface="微软雅黑"/>
+              </a:rPr>
+              <a:t>港大上海总部接待处，装修中，无实际办学功能。</a:t>
+            </a:r>
+          </a:p>
+        </p:txBody>
+      </p:sp>
+      <p:sp>
+        <p:nvSpPr>
+          <p:cNvPr id="10" name="Rounded Rectangle 9"/>
+          <p:cNvSpPr/>
+          <p:nvPr/>
+        </p:nvSpPr>
+        <p:spPr>
+          <a:xfrm>
+            <a:off x="3337560" y="1207008"/>
+            <a:ext cx="2788920" cy="2148840"/>
+          </a:xfrm>
+          <a:prstGeom prst="roundRect">
+            <a:avLst>
+              <a:gd name="adj" fmla="val 8000"/>
+            </a:avLst>
+          </a:prstGeom>
+          <a:solidFill>
+            <a:srgbClr val="FFFFFF"/>
+          </a:solidFill>
+          <a:ln>
+            <a:noFill/>
+          </a:ln>
+          <a:effectLst/>
+        </p:spPr>
+        <p:style>
+          <a:lnRef idx="1">
+            <a:schemeClr val="accent1"/>
+          </a:lnRef>
+          <a:fillRef idx="3">
+            <a:schemeClr val="accent1"/>
+          </a:fillRef>
+          <a:effectRef idx="2">
+            <a:schemeClr val="accent1"/>
+          </a:effectRef>
+          <a:fontRef idx="minor">
+            <a:schemeClr val="lt1"/>
+          </a:fontRef>
+        </p:style>
+        <p:txBody>
+          <a:bodyPr rtlCol="0" anchor="ctr"/>
+          <a:lstStyle/>
+          <a:p>
+            <a:pPr algn="ctr"/>
+          </a:p>
+        </p:txBody>
+      </p:sp>
+      <p:sp>
+        <p:nvSpPr>
+          <p:cNvPr id="11" name="Rectangle 10"/>
+          <p:cNvSpPr/>
+          <p:nvPr/>
+        </p:nvSpPr>
+        <p:spPr>
+          <a:xfrm>
+            <a:off x="3337560" y="1207008"/>
+            <a:ext cx="2788920" cy="502920"/>
           </a:xfrm>
           <a:prstGeom prst="rect">
             <a:avLst/>
@@ -7100,14 +8468,14 @@
       </p:sp>
       <p:sp>
         <p:nvSpPr>
-          <p:cNvPr id="8" name="TextBox 7"/>
-          <p:cNvSpPr txBox="1"/>
-          <p:nvPr/>
-        </p:nvSpPr>
-        <p:spPr>
-          <a:xfrm>
-            <a:off x="457200" y="1280160"/>
-            <a:ext cx="2743200" cy="640080"/>
+          <p:cNvPr id="12" name="TextBox 11"/>
+          <p:cNvSpPr txBox="1"/>
+          <p:nvPr/>
+        </p:nvSpPr>
+        <p:spPr>
+          <a:xfrm>
+            <a:off x="3337560" y="1207008"/>
+            <a:ext cx="2788920" cy="502920"/>
           </a:xfrm>
           <a:prstGeom prst="rect">
             <a:avLst/>
@@ -7122,28 +8490,28 @@
           <a:p>
             <a:pPr algn="ctr"/>
             <a:r>
-              <a:rPr sz="1600" b="1">
+              <a:rPr sz="1400" b="1">
                 <a:solidFill>
                   <a:srgbClr val="FFFFFF"/>
                 </a:solidFill>
                 <a:latin typeface="微软雅黑"/>
                 <a:ea typeface="微软雅黑"/>
               </a:rPr>
-              <a:t>港大有</a:t>
-            </a:r>
-          </a:p>
-        </p:txBody>
-      </p:sp>
-      <p:sp>
-        <p:nvSpPr>
-          <p:cNvPr id="9" name="TextBox 8"/>
-          <p:cNvSpPr txBox="1"/>
-          <p:nvPr/>
-        </p:nvSpPr>
-        <p:spPr>
-          <a:xfrm>
-            <a:off x="621792" y="2103120"/>
-            <a:ext cx="2423160" cy="2011680"/>
+              <a:t>经管上海中心</a:t>
+            </a:r>
+          </a:p>
+        </p:txBody>
+      </p:sp>
+      <p:sp>
+        <p:nvSpPr>
+          <p:cNvPr id="13" name="TextBox 12"/>
+          <p:cNvSpPr txBox="1"/>
+          <p:nvPr/>
+        </p:nvSpPr>
+        <p:spPr>
+          <a:xfrm>
+            <a:off x="3447288" y="1828800"/>
+            <a:ext cx="2560320" cy="1371600"/>
           </a:xfrm>
           <a:prstGeom prst="rect">
             <a:avLst/>
@@ -7158,28 +8526,28 @@
           <a:p>
             <a:pPr algn="ctr"/>
             <a:r>
-              <a:rPr sz="1400" b="0">
+              <a:rPr sz="1200" b="0">
                 <a:solidFill>
                   <a:srgbClr val="1A2420"/>
                 </a:solidFill>
                 <a:latin typeface="微软雅黑"/>
                 <a:ea typeface="微软雅黑"/>
               </a:rPr>
-              <a:t>学位品牌、外滩场地、招生流程、华东校友会</a:t>
-            </a:r>
-          </a:p>
-        </p:txBody>
-      </p:sp>
-      <p:sp>
-        <p:nvSpPr>
-          <p:cNvPr id="10" name="Rounded Rectangle 9"/>
+              <a:t>约 5000 ㎡，已启用；海外模块、招生、EMBA、原创谷主阵地。</a:t>
+            </a:r>
+          </a:p>
+        </p:txBody>
+      </p:sp>
+      <p:sp>
+        <p:nvSpPr>
+          <p:cNvPr id="14" name="Rounded Rectangle 13"/>
           <p:cNvSpPr/>
           <p:nvPr/>
         </p:nvSpPr>
         <p:spPr>
           <a:xfrm>
-            <a:off x="3337560" y="1280160"/>
-            <a:ext cx="2743200" cy="3063240"/>
+            <a:off x="6263640" y="1207008"/>
+            <a:ext cx="2788920" cy="2148840"/>
           </a:xfrm>
           <a:prstGeom prst="roundRect">
             <a:avLst>
@@ -7218,14 +8586,14 @@
       </p:sp>
       <p:sp>
         <p:nvSpPr>
-          <p:cNvPr id="11" name="Rectangle 10"/>
+          <p:cNvPr id="15" name="Rectangle 14"/>
           <p:cNvSpPr/>
           <p:nvPr/>
         </p:nvSpPr>
         <p:spPr>
           <a:xfrm>
-            <a:off x="3337560" y="1280160"/>
-            <a:ext cx="2743200" cy="640080"/>
+            <a:off x="6263640" y="1207008"/>
+            <a:ext cx="2788920" cy="502920"/>
           </a:xfrm>
           <a:prstGeom prst="rect">
             <a:avLst/>
@@ -7262,14 +8630,14 @@
       </p:sp>
       <p:sp>
         <p:nvSpPr>
-          <p:cNvPr id="12" name="TextBox 11"/>
-          <p:cNvSpPr txBox="1"/>
-          <p:nvPr/>
-        </p:nvSpPr>
-        <p:spPr>
-          <a:xfrm>
-            <a:off x="3337560" y="1280160"/>
-            <a:ext cx="2743200" cy="640080"/>
+          <p:cNvPr id="16" name="TextBox 15"/>
+          <p:cNvSpPr txBox="1"/>
+          <p:nvPr/>
+        </p:nvSpPr>
+        <p:spPr>
+          <a:xfrm>
+            <a:off x="6263640" y="1207008"/>
+            <a:ext cx="2788920" cy="502920"/>
           </a:xfrm>
           <a:prstGeom prst="rect">
             <a:avLst/>
@@ -7284,28 +8652,28 @@
           <a:p>
             <a:pPr algn="ctr"/>
             <a:r>
-              <a:rPr sz="1600" b="1">
+              <a:rPr sz="1400" b="1">
                 <a:solidFill>
                   <a:srgbClr val="FFFFFF"/>
                 </a:solidFill>
                 <a:latin typeface="微软雅黑"/>
                 <a:ea typeface="微软雅黑"/>
               </a:rPr>
-              <a:t>港大缺</a:t>
-            </a:r>
-          </a:p>
-        </p:txBody>
-      </p:sp>
-      <p:sp>
-        <p:nvSpPr>
-          <p:cNvPr id="13" name="TextBox 12"/>
-          <p:cNvSpPr txBox="1"/>
-          <p:nvPr/>
-        </p:nvSpPr>
-        <p:spPr>
-          <a:xfrm>
-            <a:off x="3502152" y="2103120"/>
-            <a:ext cx="2423160" cy="2011680"/>
+              <a:t>张江计教学院</a:t>
+            </a:r>
+          </a:p>
+        </p:txBody>
+      </p:sp>
+      <p:sp>
+        <p:nvSpPr>
+          <p:cNvPr id="17" name="TextBox 16"/>
+          <p:cNvSpPr txBox="1"/>
+          <p:nvPr/>
+        </p:nvSpPr>
+        <p:spPr>
+          <a:xfrm>
+            <a:off x="6373368" y="1828800"/>
+            <a:ext cx="2560320" cy="1371600"/>
           </a:xfrm>
           <a:prstGeom prst="rect">
             <a:avLst/>
@@ -7320,28 +8688,28 @@
           <a:p>
             <a:pPr algn="ctr"/>
             <a:r>
-              <a:rPr sz="1400" b="0">
+              <a:rPr sz="1200" b="0">
                 <a:solidFill>
                   <a:srgbClr val="1A2420"/>
                 </a:solidFill>
                 <a:latin typeface="微软雅黑"/>
                 <a:ea typeface="微软雅黑"/>
               </a:rPr>
-              <a:t>可持续的产业高管到场机制，宣讲会容易变成「来听招生的人」</a:t>
-            </a:r>
-          </a:p>
-        </p:txBody>
-      </p:sp>
-      <p:sp>
-        <p:nvSpPr>
-          <p:cNvPr id="14" name="Rounded Rectangle 13"/>
+              <a:t>约 3 万㎡，计算与数据科学学院上海中心，已投用。</a:t>
+            </a:r>
+          </a:p>
+        </p:txBody>
+      </p:sp>
+      <p:sp>
+        <p:nvSpPr>
+          <p:cNvPr id="18" name="Rounded Rectangle 17"/>
           <p:cNvSpPr/>
           <p:nvPr/>
         </p:nvSpPr>
         <p:spPr>
           <a:xfrm>
-            <a:off x="6217920" y="1280160"/>
-            <a:ext cx="2743200" cy="3063240"/>
+            <a:off x="9189720" y="1207008"/>
+            <a:ext cx="2788920" cy="2148840"/>
           </a:xfrm>
           <a:prstGeom prst="roundRect">
             <a:avLst>
@@ -7380,176 +8748,14 @@
       </p:sp>
       <p:sp>
         <p:nvSpPr>
-          <p:cNvPr id="15" name="Rectangle 14"/>
-          <p:cNvSpPr/>
-          <p:nvPr/>
-        </p:nvSpPr>
-        <p:spPr>
-          <a:xfrm>
-            <a:off x="6217920" y="1280160"/>
-            <a:ext cx="2743200" cy="640080"/>
-          </a:xfrm>
-          <a:prstGeom prst="rect">
-            <a:avLst/>
-          </a:prstGeom>
-          <a:solidFill>
-            <a:srgbClr val="003D2E"/>
-          </a:solidFill>
-          <a:ln>
-            <a:noFill/>
-          </a:ln>
-          <a:effectLst/>
-        </p:spPr>
-        <p:style>
-          <a:lnRef idx="1">
-            <a:schemeClr val="accent1"/>
-          </a:lnRef>
-          <a:fillRef idx="3">
-            <a:schemeClr val="accent1"/>
-          </a:fillRef>
-          <a:effectRef idx="2">
-            <a:schemeClr val="accent1"/>
-          </a:effectRef>
-          <a:fontRef idx="minor">
-            <a:schemeClr val="lt1"/>
-          </a:fontRef>
-        </p:style>
-        <p:txBody>
-          <a:bodyPr rtlCol="0" anchor="ctr"/>
-          <a:lstStyle/>
-          <a:p>
-            <a:pPr algn="ctr"/>
-          </a:p>
-        </p:txBody>
-      </p:sp>
-      <p:sp>
-        <p:nvSpPr>
-          <p:cNvPr id="16" name="TextBox 15"/>
-          <p:cNvSpPr txBox="1"/>
-          <p:nvPr/>
-        </p:nvSpPr>
-        <p:spPr>
-          <a:xfrm>
-            <a:off x="6217920" y="1280160"/>
-            <a:ext cx="2743200" cy="640080"/>
-          </a:xfrm>
-          <a:prstGeom prst="rect">
-            <a:avLst/>
-          </a:prstGeom>
-          <a:noFill/>
-        </p:spPr>
-        <p:txBody>
-          <a:bodyPr wrap="square" anchor="ctr">
-            <a:spAutoFit/>
-          </a:bodyPr>
-          <a:lstStyle/>
-          <a:p>
-            <a:pPr algn="ctr"/>
-            <a:r>
-              <a:rPr sz="1600" b="1">
-                <a:solidFill>
-                  <a:srgbClr val="FFFFFF"/>
-                </a:solidFill>
-                <a:latin typeface="微软雅黑"/>
-                <a:ea typeface="微软雅黑"/>
-              </a:rPr>
-              <a:t>我方有</a:t>
-            </a:r>
-          </a:p>
-        </p:txBody>
-      </p:sp>
-      <p:sp>
-        <p:nvSpPr>
-          <p:cNvPr id="17" name="TextBox 16"/>
-          <p:cNvSpPr txBox="1"/>
-          <p:nvPr/>
-        </p:nvSpPr>
-        <p:spPr>
-          <a:xfrm>
-            <a:off x="6382512" y="2103120"/>
-            <a:ext cx="2423160" cy="2011680"/>
-          </a:xfrm>
-          <a:prstGeom prst="rect">
-            <a:avLst/>
-          </a:prstGeom>
-          <a:noFill/>
-        </p:spPr>
-        <p:txBody>
-          <a:bodyPr wrap="square" anchor="t">
-            <a:spAutoFit/>
-          </a:bodyPr>
-          <a:lstStyle/>
-          <a:p>
-            <a:pPr algn="ctr"/>
-            <a:r>
-              <a:rPr sz="1400" b="0">
-                <a:solidFill>
-                  <a:srgbClr val="1A2420"/>
-                </a:solidFill>
-                <a:latin typeface="微软雅黑"/>
-                <a:ea typeface="微软雅黑"/>
-              </a:rPr>
-              <a:t>产业决策者圈子、议题策划、邀约与会后转化</a:t>
-            </a:r>
-          </a:p>
-        </p:txBody>
-      </p:sp>
-      <p:sp>
-        <p:nvSpPr>
-          <p:cNvPr id="18" name="Rounded Rectangle 17"/>
-          <p:cNvSpPr/>
-          <p:nvPr/>
-        </p:nvSpPr>
-        <p:spPr>
-          <a:xfrm>
-            <a:off x="9098280" y="1280160"/>
-            <a:ext cx="2743200" cy="3063240"/>
-          </a:xfrm>
-          <a:prstGeom prst="roundRect">
-            <a:avLst>
-              <a:gd name="adj" fmla="val 8000"/>
-            </a:avLst>
-          </a:prstGeom>
-          <a:solidFill>
-            <a:srgbClr val="FFFFFF"/>
-          </a:solidFill>
-          <a:ln>
-            <a:noFill/>
-          </a:ln>
-          <a:effectLst/>
-        </p:spPr>
-        <p:style>
-          <a:lnRef idx="1">
-            <a:schemeClr val="accent1"/>
-          </a:lnRef>
-          <a:fillRef idx="3">
-            <a:schemeClr val="accent1"/>
-          </a:fillRef>
-          <a:effectRef idx="2">
-            <a:schemeClr val="accent1"/>
-          </a:effectRef>
-          <a:fontRef idx="minor">
-            <a:schemeClr val="lt1"/>
-          </a:fontRef>
-        </p:style>
-        <p:txBody>
-          <a:bodyPr rtlCol="0" anchor="ctr"/>
-          <a:lstStyle/>
-          <a:p>
-            <a:pPr algn="ctr"/>
-          </a:p>
-        </p:txBody>
-      </p:sp>
-      <p:sp>
-        <p:nvSpPr>
           <p:cNvPr id="19" name="Rectangle 18"/>
           <p:cNvSpPr/>
           <p:nvPr/>
         </p:nvSpPr>
         <p:spPr>
           <a:xfrm>
-            <a:off x="9098280" y="1280160"/>
-            <a:ext cx="2743200" cy="640080"/>
+            <a:off x="9189720" y="1207008"/>
+            <a:ext cx="2788920" cy="502920"/>
           </a:xfrm>
           <a:prstGeom prst="rect">
             <a:avLst/>
@@ -7592,8 +8798,8 @@
         </p:nvSpPr>
         <p:spPr>
           <a:xfrm>
-            <a:off x="9098280" y="1280160"/>
-            <a:ext cx="2743200" cy="640080"/>
+            <a:off x="9189720" y="1207008"/>
+            <a:ext cx="2788920" cy="502920"/>
           </a:xfrm>
           <a:prstGeom prst="rect">
             <a:avLst/>
@@ -7608,86 +8814,86 @@
           <a:p>
             <a:pPr algn="ctr"/>
             <a:r>
+              <a:rPr sz="1400" b="1">
+                <a:solidFill>
+                  <a:srgbClr val="FFFFFF"/>
+                </a:solidFill>
+                <a:latin typeface="微软雅黑"/>
+                <a:ea typeface="微软雅黑"/>
+              </a:rPr>
+              <a:t>漕河泾智能所</a:t>
+            </a:r>
+          </a:p>
+        </p:txBody>
+      </p:sp>
+      <p:sp>
+        <p:nvSpPr>
+          <p:cNvPr id="21" name="TextBox 20"/>
+          <p:cNvSpPr txBox="1"/>
+          <p:nvPr/>
+        </p:nvSpPr>
+        <p:spPr>
+          <a:xfrm>
+            <a:off x="9299448" y="1828800"/>
+            <a:ext cx="2560320" cy="1371600"/>
+          </a:xfrm>
+          <a:prstGeom prst="rect">
+            <a:avLst/>
+          </a:prstGeom>
+          <a:noFill/>
+        </p:spPr>
+        <p:txBody>
+          <a:bodyPr wrap="square" anchor="t">
+            <a:spAutoFit/>
+          </a:bodyPr>
+          <a:lstStyle/>
+          <a:p>
+            <a:pPr algn="ctr"/>
+            <a:r>
+              <a:rPr sz="1200" b="0">
+                <a:solidFill>
+                  <a:srgbClr val="1A2420"/>
+                </a:solidFill>
+                <a:latin typeface="微软雅黑"/>
+                <a:ea typeface="微软雅黑"/>
+              </a:rPr>
+              <a:t>刚破土，装修未开始，投入时间未定。</a:t>
+            </a:r>
+          </a:p>
+        </p:txBody>
+      </p:sp>
+      <p:sp>
+        <p:nvSpPr>
+          <p:cNvPr id="22" name="TextBox 21"/>
+          <p:cNvSpPr txBox="1"/>
+          <p:nvPr/>
+        </p:nvSpPr>
+        <p:spPr>
+          <a:xfrm>
+            <a:off x="502920" y="3520440"/>
+            <a:ext cx="11155680" cy="320040"/>
+          </a:xfrm>
+          <a:prstGeom prst="rect">
+            <a:avLst/>
+          </a:prstGeom>
+          <a:noFill/>
+        </p:spPr>
+        <p:txBody>
+          <a:bodyPr wrap="square" anchor="t">
+            <a:spAutoFit/>
+          </a:bodyPr>
+          <a:lstStyle/>
+          <a:p>
+            <a:pPr algn="l"/>
+            <a:r>
               <a:rPr sz="1600" b="1">
                 <a:solidFill>
-                  <a:srgbClr val="FFFFFF"/>
-                </a:solidFill>
-                <a:latin typeface="微软雅黑"/>
-                <a:ea typeface="微软雅黑"/>
-              </a:rPr>
-              <a:t>我方缺</a:t>
-            </a:r>
-          </a:p>
-        </p:txBody>
-      </p:sp>
-      <p:sp>
-        <p:nvSpPr>
-          <p:cNvPr id="21" name="TextBox 20"/>
-          <p:cNvSpPr txBox="1"/>
-          <p:nvPr/>
-        </p:nvSpPr>
-        <p:spPr>
-          <a:xfrm>
-            <a:off x="9262872" y="2103120"/>
-            <a:ext cx="2423160" cy="2011680"/>
-          </a:xfrm>
-          <a:prstGeom prst="rect">
-            <a:avLst/>
-          </a:prstGeom>
-          <a:noFill/>
-        </p:spPr>
-        <p:txBody>
-          <a:bodyPr wrap="square" anchor="t">
-            <a:spAutoFit/>
-          </a:bodyPr>
-          <a:lstStyle/>
-          <a:p>
-            <a:pPr algn="ctr"/>
-            <a:r>
-              <a:rPr sz="1400" b="0">
-                <a:solidFill>
-                  <a:srgbClr val="1A2420"/>
-                </a:solidFill>
-                <a:latin typeface="微软雅黑"/>
-                <a:ea typeface="微软雅黑"/>
-              </a:rPr>
-              <a:t>港大经管的学位出口与外滩中心的正式场景</a:t>
-            </a:r>
-          </a:p>
-        </p:txBody>
-      </p:sp>
-      <p:sp>
-        <p:nvSpPr>
-          <p:cNvPr id="22" name="TextBox 21"/>
-          <p:cNvSpPr txBox="1"/>
-          <p:nvPr/>
-        </p:nvSpPr>
-        <p:spPr>
-          <a:xfrm>
-            <a:off x="502920" y="4526280"/>
-            <a:ext cx="11155680" cy="365760"/>
-          </a:xfrm>
-          <a:prstGeom prst="rect">
-            <a:avLst/>
-          </a:prstGeom>
-          <a:noFill/>
-        </p:spPr>
-        <p:txBody>
-          <a:bodyPr wrap="square" anchor="t">
-            <a:spAutoFit/>
-          </a:bodyPr>
-          <a:lstStyle/>
-          <a:p>
-            <a:pPr algn="l"/>
-            <a:r>
-              <a:rPr sz="1600" b="1">
-                <a:solidFill>
                   <a:srgbClr val="003D2E"/>
                 </a:solidFill>
                 <a:latin typeface="微软雅黑"/>
                 <a:ea typeface="微软雅黑"/>
               </a:rPr>
-              <a:t>我方可以立刻用上的资产</a:t>
+              <a:t>经管中心当前职能（对方口述）</a:t>
             </a:r>
           </a:p>
         </p:txBody>
@@ -7700,8 +8906,8 @@
         </p:nvSpPr>
         <p:spPr>
           <a:xfrm>
-            <a:off x="502920" y="4892040"/>
-            <a:ext cx="11155680" cy="1463040"/>
+            <a:off x="457200" y="3840480"/>
+            <a:ext cx="11247120" cy="2286000"/>
           </a:xfrm>
           <a:prstGeom prst="rect">
             <a:avLst/>
@@ -7719,7 +8925,7 @@
                 <a:spcPct val="115000"/>
               </a:lnSpc>
               <a:spcAft>
-                <a:spcPts val="400"/>
+                <a:spcPts val="600"/>
               </a:spcAft>
             </a:pPr>
             <a:r>
@@ -7740,7 +8946,7 @@
                 <a:latin typeface="微软雅黑"/>
                 <a:ea typeface="微软雅黑"/>
               </a:rPr>
-              <a:t>杨浦科企联：科技企业、硬科技与成长型公司决策层，天然贴近 EMBA 客群。</a:t>
+              <a:t>承接经管学院本科/研究生上海海外模块（3–6 个月：学习、实习、参访）。</a:t>
             </a:r>
           </a:p>
           <a:p>
@@ -7749,7 +8955,7 @@
                 <a:spcPct val="115000"/>
               </a:lnSpc>
               <a:spcAft>
-                <a:spcPts val="400"/>
+                <a:spcPts val="600"/>
               </a:spcAft>
             </a:pPr>
             <a:r>
@@ -7770,7 +8976,7 @@
                 <a:latin typeface="微软雅黑"/>
                 <a:ea typeface="微软雅黑"/>
               </a:rPr>
-              <a:t>复旦大学住房政策研究中心：不动产、城市与产业空间议题的学术背书，适合做闭门课「产业侧主理」。</a:t>
+              <a:t>因地段优于张江，承接全港大本科及研究生新生入学向导与招生宣传。</a:t>
             </a:r>
           </a:p>
           <a:p>
@@ -7779,7 +8985,7 @@
                 <a:spcPct val="115000"/>
               </a:lnSpc>
               <a:spcAft>
-                <a:spcPts val="400"/>
+                <a:spcPts val="600"/>
               </a:spcAft>
             </a:pPr>
             <a:r>
@@ -7800,7 +9006,7 @@
                 <a:latin typeface="微软雅黑"/>
                 <a:ea typeface="微软雅黑"/>
               </a:rPr>
-              <a:t>已跑通的上海活动方法论：闭门沙龙、研学考察、会后转化 SOP，不是从零办会。</a:t>
+              <a:t>筹备「原创谷」创业孵化器，对接资本，主要服务港大系创业，仍在实践。</a:t>
             </a:r>
           </a:p>
           <a:p>
@@ -7809,7 +9015,7 @@
                 <a:spcPct val="115000"/>
               </a:lnSpc>
               <a:spcAft>
-                <a:spcPts val="400"/>
+                <a:spcPts val="600"/>
               </a:spcAft>
             </a:pPr>
             <a:r>
@@ -7830,7 +9036,7 @@
                 <a:latin typeface="微软雅黑"/>
                 <a:ea typeface="微软雅黑"/>
               </a:rPr>
-              <a:t>跨圈层触达：园区、行业协会、出海与科创场景，可按产业主题组装嘉宾与听众。</a:t>
+              <a:t>复旦–港大 EMBA 港方课程迁回中心授课；华东华中高端教育市场由潘老师承接。</a:t>
             </a:r>
           </a:p>
         </p:txBody>
@@ -7866,7 +9072,7 @@
                 <a:latin typeface="微软雅黑"/>
                 <a:ea typeface="微软雅黑"/>
               </a:rPr>
-              <a:t>外滩·产业课堂  ·  香港大学经管学院上海中心 × 复旦大学住房政策研究中心、上海市杨浦区科技企业联合会  ·  V1.0 建议稿  ·  2026年9月</a:t>
+              <a:t>外滩·出海课堂  ·  香港大学经管学院上海中心 × 复旦大学住房政策研究中心、上海市杨浦区科技企业联合会  ·  V1.1 建议稿  ·  2026年9月</a:t>
             </a:r>
           </a:p>
         </p:txBody>
@@ -8008,7 +9214,7 @@
                 <a:latin typeface="微软雅黑"/>
                 <a:ea typeface="微软雅黑"/>
               </a:rPr>
-              <a:t>一条思路：外滩·产业课堂</a:t>
+              <a:t>双方互补：出海是对方点名的赛道</a:t>
             </a:r>
           </a:p>
         </p:txBody>
@@ -8044,170 +9250,21 @@
                 <a:latin typeface="微软雅黑"/>
                 <a:ea typeface="微软雅黑"/>
               </a:rPr>
-              <a:t>05/12</a:t>
-            </a:r>
-          </a:p>
-        </p:txBody>
-      </p:sp>
-      <p:sp>
-        <p:nvSpPr>
-          <p:cNvPr id="6" name="TextBox 5"/>
-          <p:cNvSpPr txBox="1"/>
-          <p:nvPr/>
-        </p:nvSpPr>
-        <p:spPr>
-          <a:xfrm>
-            <a:off x="502920" y="1188720"/>
-            <a:ext cx="11155680" cy="365760"/>
-          </a:xfrm>
-          <a:prstGeom prst="rect">
-            <a:avLst/>
-          </a:prstGeom>
-          <a:noFill/>
-        </p:spPr>
-        <p:txBody>
-          <a:bodyPr wrap="square" anchor="t">
-            <a:spAutoFit/>
-          </a:bodyPr>
-          <a:lstStyle/>
-          <a:p>
-            <a:pPr algn="l"/>
-            <a:r>
-              <a:rPr sz="1600" b="1">
-                <a:solidFill>
-                  <a:srgbClr val="003D2E"/>
-                </a:solidFill>
-                <a:latin typeface="微软雅黑"/>
-                <a:ea typeface="微软雅黑"/>
-              </a:rPr>
-              <a:t>三句话把产品说清楚</a:t>
-            </a:r>
-          </a:p>
-        </p:txBody>
-      </p:sp>
-      <p:sp>
-        <p:nvSpPr>
-          <p:cNvPr id="7" name="TextBox 6"/>
-          <p:cNvSpPr txBox="1"/>
-          <p:nvPr/>
-        </p:nvSpPr>
-        <p:spPr>
-          <a:xfrm>
-            <a:off x="502920" y="1554480"/>
-            <a:ext cx="11155680" cy="1554480"/>
-          </a:xfrm>
-          <a:prstGeom prst="rect">
-            <a:avLst/>
-          </a:prstGeom>
-          <a:noFill/>
-        </p:spPr>
-        <p:txBody>
-          <a:bodyPr wrap="square">
-            <a:spAutoFit/>
-          </a:bodyPr>
-          <a:lstStyle/>
-          <a:p>
-            <a:pPr>
-              <a:lnSpc>
-                <a:spcPct val="115000"/>
-              </a:lnSpc>
-              <a:spcAft>
-                <a:spcPts val="600"/>
-              </a:spcAft>
-            </a:pPr>
-            <a:r>
-              <a:rPr sz="1300" b="1">
-                <a:solidFill>
-                  <a:srgbClr val="C4A35A"/>
-                </a:solidFill>
-                <a:latin typeface="微软雅黑"/>
-                <a:ea typeface="微软雅黑"/>
-              </a:rPr>
-              <a:t>●  </a:t>
-            </a:r>
-            <a:r>
-              <a:rPr sz="1500" b="0">
-                <a:solidFill>
-                  <a:srgbClr val="1A2420"/>
-                </a:solidFill>
-                <a:latin typeface="微软雅黑"/>
-                <a:ea typeface="微软雅黑"/>
-              </a:rPr>
-              <a:t>来的人是来谈产业的，不是来听招生的——但名单共管，会后由招生官一对一跟进。</a:t>
-            </a:r>
-          </a:p>
-          <a:p>
-            <a:pPr>
-              <a:lnSpc>
-                <a:spcPct val="115000"/>
-              </a:lnSpc>
-              <a:spcAft>
-                <a:spcPts val="600"/>
-              </a:spcAft>
-            </a:pPr>
-            <a:r>
-              <a:rPr sz="1300" b="1">
-                <a:solidFill>
-                  <a:srgbClr val="C4A35A"/>
-                </a:solidFill>
-                <a:latin typeface="微软雅黑"/>
-                <a:ea typeface="微软雅黑"/>
-              </a:rPr>
-              <a:t>●  </a:t>
-            </a:r>
-            <a:r>
-              <a:rPr sz="1500" b="0">
-                <a:solidFill>
-                  <a:srgbClr val="1A2420"/>
-                </a:solidFill>
-                <a:latin typeface="微软雅黑"/>
-                <a:ea typeface="微软雅黑"/>
-              </a:rPr>
-              <a:t>每场一个产业主题（如 AI 产业化、城市更新与不动产、企业出海、硬科技融资），港大输出全球视野与学位通道，我方输出产业现场与到场高管。</a:t>
-            </a:r>
-          </a:p>
-          <a:p>
-            <a:pPr>
-              <a:lnSpc>
-                <a:spcPct val="115000"/>
-              </a:lnSpc>
-              <a:spcAft>
-                <a:spcPts val="600"/>
-              </a:spcAft>
-            </a:pPr>
-            <a:r>
-              <a:rPr sz="1300" b="1">
-                <a:solidFill>
-                  <a:srgbClr val="C4A35A"/>
-                </a:solidFill>
-                <a:latin typeface="微软雅黑"/>
-                <a:ea typeface="微软雅黑"/>
-              </a:rPr>
-              <a:t>●  </a:t>
-            </a:r>
-            <a:r>
-              <a:rPr sz="1500" b="0">
-                <a:solidFill>
-                  <a:srgbClr val="1A2420"/>
-                </a:solidFill>
-                <a:latin typeface="微软雅黑"/>
-                <a:ea typeface="微软雅黑"/>
-              </a:rPr>
-              <a:t>首场做成样板，90 天内把议题日历、邀约口径和转化SOP固化，后续可按场复制。</a:t>
-            </a:r>
-          </a:p>
-        </p:txBody>
-      </p:sp>
-      <p:sp>
-        <p:nvSpPr>
-          <p:cNvPr id="8" name="Rounded Rectangle 7"/>
+              <a:t>05/13</a:t>
+            </a:r>
+          </a:p>
+        </p:txBody>
+      </p:sp>
+      <p:sp>
+        <p:nvSpPr>
+          <p:cNvPr id="6" name="Rounded Rectangle 5"/>
           <p:cNvSpPr/>
           <p:nvPr/>
         </p:nvSpPr>
         <p:spPr>
           <a:xfrm>
-            <a:off x="457200" y="3246120"/>
-            <a:ext cx="3657600" cy="2606040"/>
+            <a:off x="457200" y="1280160"/>
+            <a:ext cx="2743200" cy="3063240"/>
           </a:xfrm>
           <a:prstGeom prst="roundRect">
             <a:avLst>
@@ -8246,20 +9303,20 @@
       </p:sp>
       <p:sp>
         <p:nvSpPr>
-          <p:cNvPr id="9" name="Rectangle 8"/>
+          <p:cNvPr id="7" name="Rectangle 6"/>
           <p:cNvSpPr/>
           <p:nvPr/>
         </p:nvSpPr>
         <p:spPr>
           <a:xfrm>
-            <a:off x="457200" y="3246120"/>
-            <a:ext cx="3657600" cy="109728"/>
+            <a:off x="457200" y="1280160"/>
+            <a:ext cx="2743200" cy="640080"/>
           </a:xfrm>
           <a:prstGeom prst="rect">
             <a:avLst/>
           </a:prstGeom>
           <a:solidFill>
-            <a:srgbClr val="C4A35A"/>
+            <a:srgbClr val="003D2E"/>
           </a:solidFill>
           <a:ln>
             <a:noFill/>
@@ -8290,14 +9347,50 @@
       </p:sp>
       <p:sp>
         <p:nvSpPr>
-          <p:cNvPr id="10" name="TextBox 9"/>
-          <p:cNvSpPr txBox="1"/>
-          <p:nvPr/>
-        </p:nvSpPr>
-        <p:spPr>
-          <a:xfrm>
-            <a:off x="658368" y="3474720"/>
-            <a:ext cx="3246120" cy="365760"/>
+          <p:cNvPr id="8" name="TextBox 7"/>
+          <p:cNvSpPr txBox="1"/>
+          <p:nvPr/>
+        </p:nvSpPr>
+        <p:spPr>
+          <a:xfrm>
+            <a:off x="457200" y="1280160"/>
+            <a:ext cx="2743200" cy="640080"/>
+          </a:xfrm>
+          <a:prstGeom prst="rect">
+            <a:avLst/>
+          </a:prstGeom>
+          <a:noFill/>
+        </p:spPr>
+        <p:txBody>
+          <a:bodyPr wrap="square" anchor="ctr">
+            <a:spAutoFit/>
+          </a:bodyPr>
+          <a:lstStyle/>
+          <a:p>
+            <a:pPr algn="ctr"/>
+            <a:r>
+              <a:rPr sz="1600" b="1">
+                <a:solidFill>
+                  <a:srgbClr val="FFFFFF"/>
+                </a:solidFill>
+                <a:latin typeface="微软雅黑"/>
+                <a:ea typeface="微软雅黑"/>
+              </a:rPr>
+              <a:t>港大有</a:t>
+            </a:r>
+          </a:p>
+        </p:txBody>
+      </p:sp>
+      <p:sp>
+        <p:nvSpPr>
+          <p:cNvPr id="9" name="TextBox 8"/>
+          <p:cNvSpPr txBox="1"/>
+          <p:nvPr/>
+        </p:nvSpPr>
+        <p:spPr>
+          <a:xfrm>
+            <a:off x="621792" y="2103120"/>
+            <a:ext cx="2423160" cy="2011680"/>
           </a:xfrm>
           <a:prstGeom prst="rect">
             <a:avLst/>
@@ -8310,102 +9403,30 @@
           </a:bodyPr>
           <a:lstStyle/>
           <a:p>
-            <a:pPr algn="l"/>
-            <a:r>
-              <a:rPr sz="1800" b="1">
-                <a:solidFill>
-                  <a:srgbClr val="003D2E"/>
-                </a:solidFill>
-                <a:latin typeface="微软雅黑"/>
-                <a:ea typeface="微软雅黑"/>
-              </a:rPr>
-              <a:t>产业闭门课</a:t>
-            </a:r>
-          </a:p>
-        </p:txBody>
-      </p:sp>
-      <p:sp>
-        <p:nvSpPr>
-          <p:cNvPr id="11" name="TextBox 10"/>
-          <p:cNvSpPr txBox="1"/>
-          <p:nvPr/>
-        </p:nvSpPr>
-        <p:spPr>
-          <a:xfrm>
-            <a:off x="658368" y="3858768"/>
-            <a:ext cx="3246120" cy="320040"/>
-          </a:xfrm>
-          <a:prstGeom prst="rect">
-            <a:avLst/>
-          </a:prstGeom>
-          <a:noFill/>
-        </p:spPr>
-        <p:txBody>
-          <a:bodyPr wrap="square" anchor="t">
-            <a:spAutoFit/>
-          </a:bodyPr>
-          <a:lstStyle/>
-          <a:p>
-            <a:pPr algn="l"/>
-            <a:r>
-              <a:rPr sz="1200" b="1">
-                <a:solidFill>
-                  <a:srgbClr val="C4A35A"/>
-                </a:solidFill>
-                <a:latin typeface="微软雅黑"/>
-                <a:ea typeface="微软雅黑"/>
-              </a:rPr>
-              <a:t>主产品 · 首场即交付</a:t>
-            </a:r>
-          </a:p>
-        </p:txBody>
-      </p:sp>
-      <p:sp>
-        <p:nvSpPr>
-          <p:cNvPr id="12" name="TextBox 11"/>
-          <p:cNvSpPr txBox="1"/>
-          <p:nvPr/>
-        </p:nvSpPr>
-        <p:spPr>
-          <a:xfrm>
-            <a:off x="658368" y="4251960"/>
-            <a:ext cx="3246120" cy="1371600"/>
-          </a:xfrm>
-          <a:prstGeom prst="rect">
-            <a:avLst/>
-          </a:prstGeom>
-          <a:noFill/>
-        </p:spPr>
-        <p:txBody>
-          <a:bodyPr wrap="square" anchor="t">
-            <a:spAutoFit/>
-          </a:bodyPr>
-          <a:lstStyle/>
-          <a:p>
-            <a:pPr algn="l"/>
-            <a:r>
-              <a:rPr sz="1300" b="0">
+            <a:pPr algn="ctr"/>
+            <a:r>
+              <a:rPr sz="1400" b="0">
                 <a:solidFill>
                   <a:srgbClr val="1A2420"/>
                 </a:solidFill>
                 <a:latin typeface="微软雅黑"/>
                 <a:ea typeface="微软雅黑"/>
               </a:rPr>
-              <a:t>外滩 SOHO 半日闭门，30–40 名企业主/高管。港大 1 位师资或校友 + 我方 1 个产业议题。</a:t>
-            </a:r>
-          </a:p>
-        </p:txBody>
-      </p:sp>
-      <p:sp>
-        <p:nvSpPr>
-          <p:cNvPr id="13" name="Rounded Rectangle 12"/>
+              <a:t>出海与港股路径、外滩场地、无需联考、综合大学学科</a:t>
+            </a:r>
+          </a:p>
+        </p:txBody>
+      </p:sp>
+      <p:sp>
+        <p:nvSpPr>
+          <p:cNvPr id="10" name="Rounded Rectangle 9"/>
           <p:cNvSpPr/>
           <p:nvPr/>
         </p:nvSpPr>
         <p:spPr>
           <a:xfrm>
-            <a:off x="4297680" y="3246120"/>
-            <a:ext cx="3657600" cy="2606040"/>
+            <a:off x="3337560" y="1280160"/>
+            <a:ext cx="2743200" cy="3063240"/>
           </a:xfrm>
           <a:prstGeom prst="roundRect">
             <a:avLst>
@@ -8444,20 +9465,20 @@
       </p:sp>
       <p:sp>
         <p:nvSpPr>
-          <p:cNvPr id="14" name="Rectangle 13"/>
+          <p:cNvPr id="11" name="Rectangle 10"/>
           <p:cNvSpPr/>
           <p:nvPr/>
         </p:nvSpPr>
         <p:spPr>
           <a:xfrm>
-            <a:off x="4297680" y="3246120"/>
-            <a:ext cx="3657600" cy="109728"/>
+            <a:off x="3337560" y="1280160"/>
+            <a:ext cx="2743200" cy="640080"/>
           </a:xfrm>
           <a:prstGeom prst="rect">
             <a:avLst/>
           </a:prstGeom>
           <a:solidFill>
-            <a:srgbClr val="C4A35A"/>
+            <a:srgbClr val="0A5C46"/>
           </a:solidFill>
           <a:ln>
             <a:noFill/>
@@ -8488,14 +9509,50 @@
       </p:sp>
       <p:sp>
         <p:nvSpPr>
-          <p:cNvPr id="15" name="TextBox 14"/>
-          <p:cNvSpPr txBox="1"/>
-          <p:nvPr/>
-        </p:nvSpPr>
-        <p:spPr>
-          <a:xfrm>
-            <a:off x="4498848" y="3474720"/>
-            <a:ext cx="3246120" cy="365760"/>
+          <p:cNvPr id="12" name="TextBox 11"/>
+          <p:cNvSpPr txBox="1"/>
+          <p:nvPr/>
+        </p:nvSpPr>
+        <p:spPr>
+          <a:xfrm>
+            <a:off x="3337560" y="1280160"/>
+            <a:ext cx="2743200" cy="640080"/>
+          </a:xfrm>
+          <a:prstGeom prst="rect">
+            <a:avLst/>
+          </a:prstGeom>
+          <a:noFill/>
+        </p:spPr>
+        <p:txBody>
+          <a:bodyPr wrap="square" anchor="ctr">
+            <a:spAutoFit/>
+          </a:bodyPr>
+          <a:lstStyle/>
+          <a:p>
+            <a:pPr algn="ctr"/>
+            <a:r>
+              <a:rPr sz="1600" b="1">
+                <a:solidFill>
+                  <a:srgbClr val="FFFFFF"/>
+                </a:solidFill>
+                <a:latin typeface="微软雅黑"/>
+                <a:ea typeface="微软雅黑"/>
+              </a:rPr>
+              <a:t>港大要</a:t>
+            </a:r>
+          </a:p>
+        </p:txBody>
+      </p:sp>
+      <p:sp>
+        <p:nvSpPr>
+          <p:cNvPr id="13" name="TextBox 12"/>
+          <p:cNvSpPr txBox="1"/>
+          <p:nvPr/>
+        </p:nvSpPr>
+        <p:spPr>
+          <a:xfrm>
+            <a:off x="3502152" y="2103120"/>
+            <a:ext cx="2423160" cy="2011680"/>
           </a:xfrm>
           <a:prstGeom prst="rect">
             <a:avLst/>
@@ -8508,102 +9565,30 @@
           </a:bodyPr>
           <a:lstStyle/>
           <a:p>
-            <a:pPr algn="l"/>
-            <a:r>
-              <a:rPr sz="1800" b="1">
-                <a:solidFill>
-                  <a:srgbClr val="003D2E"/>
-                </a:solidFill>
-                <a:latin typeface="微软雅黑"/>
-                <a:ea typeface="微软雅黑"/>
-              </a:rPr>
-              <a:t>定向名单共管</a:t>
-            </a:r>
-          </a:p>
-        </p:txBody>
-      </p:sp>
-      <p:sp>
-        <p:nvSpPr>
-          <p:cNvPr id="16" name="TextBox 15"/>
-          <p:cNvSpPr txBox="1"/>
-          <p:nvPr/>
-        </p:nvSpPr>
-        <p:spPr>
-          <a:xfrm>
-            <a:off x="4498848" y="3858768"/>
-            <a:ext cx="3246120" cy="320040"/>
-          </a:xfrm>
-          <a:prstGeom prst="rect">
-            <a:avLst/>
-          </a:prstGeom>
-          <a:noFill/>
-        </p:spPr>
-        <p:txBody>
-          <a:bodyPr wrap="square" anchor="t">
-            <a:spAutoFit/>
-          </a:bodyPr>
-          <a:lstStyle/>
-          <a:p>
-            <a:pPr algn="l"/>
-            <a:r>
-              <a:rPr sz="1200" b="1">
-                <a:solidFill>
-                  <a:srgbClr val="C4A35A"/>
-                </a:solidFill>
-                <a:latin typeface="微软雅黑"/>
-                <a:ea typeface="微软雅黑"/>
-              </a:rPr>
-              <a:t>招生资产</a:t>
-            </a:r>
-          </a:p>
-        </p:txBody>
-      </p:sp>
-      <p:sp>
-        <p:nvSpPr>
-          <p:cNvPr id="17" name="TextBox 16"/>
-          <p:cNvSpPr txBox="1"/>
-          <p:nvPr/>
-        </p:nvSpPr>
-        <p:spPr>
-          <a:xfrm>
-            <a:off x="4498848" y="4251960"/>
-            <a:ext cx="3246120" cy="1371600"/>
-          </a:xfrm>
-          <a:prstGeom prst="rect">
-            <a:avLst/>
-          </a:prstGeom>
-          <a:noFill/>
-        </p:spPr>
-        <p:txBody>
-          <a:bodyPr wrap="square" anchor="t">
-            <a:spAutoFit/>
-          </a:bodyPr>
-          <a:lstStyle/>
-          <a:p>
-            <a:pPr algn="l"/>
-            <a:r>
-              <a:rPr sz="1300" b="0">
+            <a:pPr algn="ctr"/>
+            <a:r>
+              <a:rPr sz="1400" b="0">
                 <a:solidFill>
                   <a:srgbClr val="1A2420"/>
                 </a:solidFill>
                 <a:latin typeface="微软雅黑"/>
                 <a:ea typeface="微软雅黑"/>
               </a:rPr>
-              <a:t>按 EMBA 门槛筛过的高管名单，双方共管、不转卖。会后 48 小时内完成意向分级。</a:t>
-            </a:r>
-          </a:p>
-        </p:txBody>
-      </p:sp>
-      <p:sp>
-        <p:nvSpPr>
-          <p:cNvPr id="18" name="Rounded Rectangle 17"/>
+              <a:t>高质量出海现场给主任看；EMBA 可持续到场，不只要宣讲人头</a:t>
+            </a:r>
+          </a:p>
+        </p:txBody>
+      </p:sp>
+      <p:sp>
+        <p:nvSpPr>
+          <p:cNvPr id="14" name="Rounded Rectangle 13"/>
           <p:cNvSpPr/>
           <p:nvPr/>
         </p:nvSpPr>
         <p:spPr>
           <a:xfrm>
-            <a:off x="8138160" y="3246120"/>
-            <a:ext cx="3657600" cy="2606040"/>
+            <a:off x="6217920" y="1280160"/>
+            <a:ext cx="2743200" cy="3063240"/>
           </a:xfrm>
           <a:prstGeom prst="roundRect">
             <a:avLst>
@@ -8642,20 +9627,20 @@
       </p:sp>
       <p:sp>
         <p:nvSpPr>
-          <p:cNvPr id="19" name="Rectangle 18"/>
+          <p:cNvPr id="15" name="Rectangle 14"/>
           <p:cNvSpPr/>
           <p:nvPr/>
         </p:nvSpPr>
         <p:spPr>
           <a:xfrm>
-            <a:off x="8138160" y="3246120"/>
-            <a:ext cx="3657600" cy="109728"/>
+            <a:off x="6217920" y="1280160"/>
+            <a:ext cx="2743200" cy="640080"/>
           </a:xfrm>
           <a:prstGeom prst="rect">
             <a:avLst/>
           </a:prstGeom>
           <a:solidFill>
-            <a:srgbClr val="C4A35A"/>
+            <a:srgbClr val="003D2E"/>
           </a:solidFill>
           <a:ln>
             <a:noFill/>
@@ -8686,14 +9671,212 @@
       </p:sp>
       <p:sp>
         <p:nvSpPr>
+          <p:cNvPr id="16" name="TextBox 15"/>
+          <p:cNvSpPr txBox="1"/>
+          <p:nvPr/>
+        </p:nvSpPr>
+        <p:spPr>
+          <a:xfrm>
+            <a:off x="6217920" y="1280160"/>
+            <a:ext cx="2743200" cy="640080"/>
+          </a:xfrm>
+          <a:prstGeom prst="rect">
+            <a:avLst/>
+          </a:prstGeom>
+          <a:noFill/>
+        </p:spPr>
+        <p:txBody>
+          <a:bodyPr wrap="square" anchor="ctr">
+            <a:spAutoFit/>
+          </a:bodyPr>
+          <a:lstStyle/>
+          <a:p>
+            <a:pPr algn="ctr"/>
+            <a:r>
+              <a:rPr sz="1600" b="1">
+                <a:solidFill>
+                  <a:srgbClr val="FFFFFF"/>
+                </a:solidFill>
+                <a:latin typeface="微软雅黑"/>
+                <a:ea typeface="微软雅黑"/>
+              </a:rPr>
+              <a:t>我方有</a:t>
+            </a:r>
+          </a:p>
+        </p:txBody>
+      </p:sp>
+      <p:sp>
+        <p:nvSpPr>
+          <p:cNvPr id="17" name="TextBox 16"/>
+          <p:cNvSpPr txBox="1"/>
+          <p:nvPr/>
+        </p:nvSpPr>
+        <p:spPr>
+          <a:xfrm>
+            <a:off x="6382512" y="2103120"/>
+            <a:ext cx="2423160" cy="2011680"/>
+          </a:xfrm>
+          <a:prstGeom prst="rect">
+            <a:avLst/>
+          </a:prstGeom>
+          <a:noFill/>
+        </p:spPr>
+        <p:txBody>
+          <a:bodyPr wrap="square" anchor="t">
+            <a:spAutoFit/>
+          </a:bodyPr>
+          <a:lstStyle/>
+          <a:p>
+            <a:pPr algn="ctr"/>
+            <a:r>
+              <a:rPr sz="1400" b="0">
+                <a:solidFill>
+                  <a:srgbClr val="1A2420"/>
+                </a:solidFill>
+                <a:latin typeface="微软雅黑"/>
+                <a:ea typeface="微软雅黑"/>
+              </a:rPr>
+              <a:t>总领事与企业家场、1 万私域、AI/出海企业池、办会执行</a:t>
+            </a:r>
+          </a:p>
+        </p:txBody>
+      </p:sp>
+      <p:sp>
+        <p:nvSpPr>
+          <p:cNvPr id="18" name="Rounded Rectangle 17"/>
+          <p:cNvSpPr/>
+          <p:nvPr/>
+        </p:nvSpPr>
+        <p:spPr>
+          <a:xfrm>
+            <a:off x="9098280" y="1280160"/>
+            <a:ext cx="2743200" cy="3063240"/>
+          </a:xfrm>
+          <a:prstGeom prst="roundRect">
+            <a:avLst>
+              <a:gd name="adj" fmla="val 8000"/>
+            </a:avLst>
+          </a:prstGeom>
+          <a:solidFill>
+            <a:srgbClr val="FFFFFF"/>
+          </a:solidFill>
+          <a:ln>
+            <a:noFill/>
+          </a:ln>
+          <a:effectLst/>
+        </p:spPr>
+        <p:style>
+          <a:lnRef idx="1">
+            <a:schemeClr val="accent1"/>
+          </a:lnRef>
+          <a:fillRef idx="3">
+            <a:schemeClr val="accent1"/>
+          </a:fillRef>
+          <a:effectRef idx="2">
+            <a:schemeClr val="accent1"/>
+          </a:effectRef>
+          <a:fontRef idx="minor">
+            <a:schemeClr val="lt1"/>
+          </a:fontRef>
+        </p:style>
+        <p:txBody>
+          <a:bodyPr rtlCol="0" anchor="ctr"/>
+          <a:lstStyle/>
+          <a:p>
+            <a:pPr algn="ctr"/>
+          </a:p>
+        </p:txBody>
+      </p:sp>
+      <p:sp>
+        <p:nvSpPr>
+          <p:cNvPr id="19" name="Rectangle 18"/>
+          <p:cNvSpPr/>
+          <p:nvPr/>
+        </p:nvSpPr>
+        <p:spPr>
+          <a:xfrm>
+            <a:off x="9098280" y="1280160"/>
+            <a:ext cx="2743200" cy="640080"/>
+          </a:xfrm>
+          <a:prstGeom prst="rect">
+            <a:avLst/>
+          </a:prstGeom>
+          <a:solidFill>
+            <a:srgbClr val="0A5C46"/>
+          </a:solidFill>
+          <a:ln>
+            <a:noFill/>
+          </a:ln>
+          <a:effectLst/>
+        </p:spPr>
+        <p:style>
+          <a:lnRef idx="1">
+            <a:schemeClr val="accent1"/>
+          </a:lnRef>
+          <a:fillRef idx="3">
+            <a:schemeClr val="accent1"/>
+          </a:fillRef>
+          <a:effectRef idx="2">
+            <a:schemeClr val="accent1"/>
+          </a:effectRef>
+          <a:fontRef idx="minor">
+            <a:schemeClr val="lt1"/>
+          </a:fontRef>
+        </p:style>
+        <p:txBody>
+          <a:bodyPr rtlCol="0" anchor="ctr"/>
+          <a:lstStyle/>
+          <a:p>
+            <a:pPr algn="ctr"/>
+          </a:p>
+        </p:txBody>
+      </p:sp>
+      <p:sp>
+        <p:nvSpPr>
           <p:cNvPr id="20" name="TextBox 19"/>
           <p:cNvSpPr txBox="1"/>
           <p:nvPr/>
         </p:nvSpPr>
         <p:spPr>
           <a:xfrm>
-            <a:off x="8339328" y="3474720"/>
-            <a:ext cx="3246120" cy="365760"/>
+            <a:off x="9098280" y="1280160"/>
+            <a:ext cx="2743200" cy="640080"/>
+          </a:xfrm>
+          <a:prstGeom prst="rect">
+            <a:avLst/>
+          </a:prstGeom>
+          <a:noFill/>
+        </p:spPr>
+        <p:txBody>
+          <a:bodyPr wrap="square" anchor="ctr">
+            <a:spAutoFit/>
+          </a:bodyPr>
+          <a:lstStyle/>
+          <a:p>
+            <a:pPr algn="ctr"/>
+            <a:r>
+              <a:rPr sz="1600" b="1">
+                <a:solidFill>
+                  <a:srgbClr val="FFFFFF"/>
+                </a:solidFill>
+                <a:latin typeface="微软雅黑"/>
+                <a:ea typeface="微软雅黑"/>
+              </a:rPr>
+              <a:t>我方缺</a:t>
+            </a:r>
+          </a:p>
+        </p:txBody>
+      </p:sp>
+      <p:sp>
+        <p:nvSpPr>
+          <p:cNvPr id="21" name="TextBox 20"/>
+          <p:cNvSpPr txBox="1"/>
+          <p:nvPr/>
+        </p:nvSpPr>
+        <p:spPr>
+          <a:xfrm>
+            <a:off x="9262872" y="2103120"/>
+            <a:ext cx="2423160" cy="2011680"/>
           </a:xfrm>
           <a:prstGeom prst="rect">
             <a:avLst/>
@@ -8706,95 +9889,202 @@
           </a:bodyPr>
           <a:lstStyle/>
           <a:p>
+            <a:pPr algn="ctr"/>
+            <a:r>
+              <a:rPr sz="1400" b="0">
+                <a:solidFill>
+                  <a:srgbClr val="1A2420"/>
+                </a:solidFill>
+                <a:latin typeface="微软雅黑"/>
+                <a:ea typeface="微软雅黑"/>
+              </a:rPr>
+              <a:t>港大经管出口、中心主任入口、外滩正式办学场景</a:t>
+            </a:r>
+          </a:p>
+        </p:txBody>
+      </p:sp>
+      <p:sp>
+        <p:nvSpPr>
+          <p:cNvPr id="22" name="TextBox 21"/>
+          <p:cNvSpPr txBox="1"/>
+          <p:nvPr/>
+        </p:nvSpPr>
+        <p:spPr>
+          <a:xfrm>
+            <a:off x="502920" y="4526280"/>
+            <a:ext cx="11155680" cy="365760"/>
+          </a:xfrm>
+          <a:prstGeom prst="rect">
+            <a:avLst/>
+          </a:prstGeom>
+          <a:noFill/>
+        </p:spPr>
+        <p:txBody>
+          <a:bodyPr wrap="square" anchor="t">
+            <a:spAutoFit/>
+          </a:bodyPr>
+          <a:lstStyle/>
+          <a:p>
             <a:pPr algn="l"/>
             <a:r>
-              <a:rPr sz="1800" b="1">
+              <a:rPr sz="1600" b="1">
                 <a:solidFill>
                   <a:srgbClr val="003D2E"/>
                 </a:solidFill>
                 <a:latin typeface="微软雅黑"/>
                 <a:ea typeface="微软雅黑"/>
               </a:rPr>
-              <a:t>会后一对一</a:t>
-            </a:r>
-          </a:p>
-        </p:txBody>
-      </p:sp>
-      <p:sp>
-        <p:nvSpPr>
-          <p:cNvPr id="21" name="TextBox 20"/>
-          <p:cNvSpPr txBox="1"/>
-          <p:nvPr/>
-        </p:nvSpPr>
-        <p:spPr>
-          <a:xfrm>
-            <a:off x="8339328" y="3858768"/>
-            <a:ext cx="3246120" cy="320040"/>
-          </a:xfrm>
-          <a:prstGeom prst="rect">
-            <a:avLst/>
-          </a:prstGeom>
-          <a:noFill/>
-        </p:spPr>
-        <p:txBody>
-          <a:bodyPr wrap="square" anchor="t">
-            <a:spAutoFit/>
-          </a:bodyPr>
-          <a:lstStyle/>
-          <a:p>
-            <a:pPr algn="l"/>
-            <a:r>
-              <a:rPr sz="1200" b="1">
+              <a:t>我方可以立刻用上的资产</a:t>
+            </a:r>
+          </a:p>
+        </p:txBody>
+      </p:sp>
+      <p:sp>
+        <p:nvSpPr>
+          <p:cNvPr id="23" name="TextBox 22"/>
+          <p:cNvSpPr txBox="1"/>
+          <p:nvPr/>
+        </p:nvSpPr>
+        <p:spPr>
+          <a:xfrm>
+            <a:off x="502920" y="4864608"/>
+            <a:ext cx="11155680" cy="1554480"/>
+          </a:xfrm>
+          <a:prstGeom prst="rect">
+            <a:avLst/>
+          </a:prstGeom>
+          <a:noFill/>
+        </p:spPr>
+        <p:txBody>
+          <a:bodyPr wrap="square">
+            <a:spAutoFit/>
+          </a:bodyPr>
+          <a:lstStyle/>
+          <a:p>
+            <a:pPr>
+              <a:lnSpc>
+                <a:spcPct val="115000"/>
+              </a:lnSpc>
+              <a:spcAft>
+                <a:spcPts val="300"/>
+              </a:spcAft>
+            </a:pPr>
+            <a:r>
+              <a:rPr sz="1000" b="1">
                 <a:solidFill>
                   <a:srgbClr val="C4A35A"/>
                 </a:solidFill>
                 <a:latin typeface="微软雅黑"/>
                 <a:ea typeface="微软雅黑"/>
               </a:rPr>
-              <a:t>转化</a:t>
-            </a:r>
-          </a:p>
-        </p:txBody>
-      </p:sp>
-      <p:sp>
-        <p:nvSpPr>
-          <p:cNvPr id="22" name="TextBox 21"/>
-          <p:cNvSpPr txBox="1"/>
-          <p:nvPr/>
-        </p:nvSpPr>
-        <p:spPr>
-          <a:xfrm>
-            <a:off x="8339328" y="4251960"/>
-            <a:ext cx="3246120" cy="1371600"/>
-          </a:xfrm>
-          <a:prstGeom prst="rect">
-            <a:avLst/>
-          </a:prstGeom>
-          <a:noFill/>
-        </p:spPr>
-        <p:txBody>
-          <a:bodyPr wrap="square" anchor="t">
-            <a:spAutoFit/>
-          </a:bodyPr>
-          <a:lstStyle/>
-          <a:p>
-            <a:pPr algn="l"/>
-            <a:r>
-              <a:rPr sz="1300" b="0">
+              <a:t>●  </a:t>
+            </a:r>
+            <a:r>
+              <a:rPr sz="1200" b="0">
                 <a:solidFill>
                   <a:srgbClr val="1A2420"/>
                 </a:solidFill>
                 <a:latin typeface="微软雅黑"/>
                 <a:ea typeface="微软雅黑"/>
               </a:rPr>
-              <a:t>A 类由潘老师直接约面；B 类纳入下期课堂；C 类进培育池。我方只做邀约与纪要，录取在港大。</a:t>
-            </a:r>
-          </a:p>
-        </p:txBody>
-      </p:sp>
-      <p:sp>
-        <p:nvSpPr>
-          <p:cNvPr id="23" name="TextBox 22"/>
+              <a:t>校友活动平台：复旦 18 级 MBA 发起，2021 年起运营上海本地生态；私域约 1 万人，周更线下，累计近 200 场，500 人以上 4 场。</a:t>
+            </a:r>
+          </a:p>
+          <a:p>
+            <a:pPr>
+              <a:lnSpc>
+                <a:spcPct val="115000"/>
+              </a:lnSpc>
+              <a:spcAft>
+                <a:spcPts val="300"/>
+              </a:spcAft>
+            </a:pPr>
+            <a:r>
+              <a:rPr sz="1000" b="1">
+                <a:solidFill>
+                  <a:srgbClr val="C4A35A"/>
+                </a:solidFill>
+                <a:latin typeface="微软雅黑"/>
+                <a:ea typeface="微软雅黑"/>
+              </a:rPr>
+              <a:t>●  </a:t>
+            </a:r>
+            <a:r>
+              <a:rPr sz="1200" b="0">
+                <a:solidFill>
+                  <a:srgbClr val="1A2420"/>
+                </a:solidFill>
+                <a:latin typeface="微软雅黑"/>
+                <a:ea typeface="微软雅黑"/>
+              </a:rPr>
+              <a:t>出海抓手：驻沪总领事资源、东方枢纽跨境主题（下半年拟与市商务委等联合约 8 场），可做「主任体验」现场。</a:t>
+            </a:r>
+          </a:p>
+          <a:p>
+            <a:pPr>
+              <a:lnSpc>
+                <a:spcPct val="115000"/>
+              </a:lnSpc>
+              <a:spcAft>
+                <a:spcPts val="300"/>
+              </a:spcAft>
+            </a:pPr>
+            <a:r>
+              <a:rPr sz="1000" b="1">
+                <a:solidFill>
+                  <a:srgbClr val="C4A35A"/>
+                </a:solidFill>
+                <a:latin typeface="微软雅黑"/>
+                <a:ea typeface="微软雅黑"/>
+              </a:rPr>
+              <a:t>●  </a:t>
+            </a:r>
+            <a:r>
+              <a:rPr sz="1200" b="0">
+                <a:solidFill>
+                  <a:srgbClr val="1A2420"/>
+                </a:solidFill>
+                <a:latin typeface="微软雅黑"/>
+                <a:ea typeface="微软雅黑"/>
+              </a:rPr>
+              <a:t>产业池：人工智能企业走访约 800 家、年均参访 50 余场；与腾讯云为高校侧紧密伙伴（上半年 10 次参访、约 500 家企业）。</a:t>
+            </a:r>
+          </a:p>
+          <a:p>
+            <a:pPr>
+              <a:lnSpc>
+                <a:spcPct val="115000"/>
+              </a:lnSpc>
+              <a:spcAft>
+                <a:spcPts val="300"/>
+              </a:spcAft>
+            </a:pPr>
+            <a:r>
+              <a:rPr sz="1000" b="1">
+                <a:solidFill>
+                  <a:srgbClr val="C4A35A"/>
+                </a:solidFill>
+                <a:latin typeface="微软雅黑"/>
+                <a:ea typeface="微软雅黑"/>
+              </a:rPr>
+              <a:t>●  </a:t>
+            </a:r>
+            <a:r>
+              <a:rPr sz="1200" b="0">
+                <a:solidFill>
+                  <a:srgbClr val="1A2420"/>
+                </a:solidFill>
+                <a:latin typeface="微软雅黑"/>
+                <a:ea typeface="微软雅黑"/>
+              </a:rPr>
+              <a:t>议题与转化：已跑通闭门沙龙、研学、会后 SOP；10 月 30 日北外滩一滴水王德峰场可作圈层触达，不计入本期验收。</a:t>
+            </a:r>
+          </a:p>
+        </p:txBody>
+      </p:sp>
+      <p:sp>
+        <p:nvSpPr>
+          <p:cNvPr id="24" name="TextBox 23"/>
           <p:cNvSpPr txBox="1"/>
           <p:nvPr/>
         </p:nvSpPr>
@@ -8823,7 +10113,7 @@
                 <a:latin typeface="微软雅黑"/>
                 <a:ea typeface="微软雅黑"/>
               </a:rPr>
-              <a:t>外滩·产业课堂  ·  香港大学经管学院上海中心 × 复旦大学住房政策研究中心、上海市杨浦区科技企业联合会  ·  V1.0 建议稿  ·  2026年9月</a:t>
+              <a:t>外滩·出海课堂  ·  香港大学经管学院上海中心 × 复旦大学住房政策研究中心、上海市杨浦区科技企业联合会  ·  V1.1 建议稿  ·  2026年9月</a:t>
             </a:r>
           </a:p>
         </p:txBody>
@@ -8965,7 +10255,7 @@
                 <a:latin typeface="微软雅黑"/>
                 <a:ea typeface="微软雅黑"/>
               </a:rPr>
-              <a:t>如何变成生源：现场不硬销，会后由招生官收口</a:t>
+              <a:t>一条思路：三层合作，出海是主赛道</a:t>
             </a:r>
           </a:p>
         </p:txBody>
@@ -9001,21 +10291,170 @@
                 <a:latin typeface="微软雅黑"/>
                 <a:ea typeface="微软雅黑"/>
               </a:rPr>
-              <a:t>06/12</a:t>
-            </a:r>
-          </a:p>
-        </p:txBody>
-      </p:sp>
-      <p:sp>
-        <p:nvSpPr>
-          <p:cNvPr id="6" name="Rounded Rectangle 5"/>
+              <a:t>06/13</a:t>
+            </a:r>
+          </a:p>
+        </p:txBody>
+      </p:sp>
+      <p:sp>
+        <p:nvSpPr>
+          <p:cNvPr id="6" name="TextBox 5"/>
+          <p:cNvSpPr txBox="1"/>
+          <p:nvPr/>
+        </p:nvSpPr>
+        <p:spPr>
+          <a:xfrm>
+            <a:off x="502920" y="1170432"/>
+            <a:ext cx="11155680" cy="292608"/>
+          </a:xfrm>
+          <a:prstGeom prst="rect">
+            <a:avLst/>
+          </a:prstGeom>
+          <a:noFill/>
+        </p:spPr>
+        <p:txBody>
+          <a:bodyPr wrap="square" anchor="t">
+            <a:spAutoFit/>
+          </a:bodyPr>
+          <a:lstStyle/>
+          <a:p>
+            <a:pPr algn="l"/>
+            <a:r>
+              <a:rPr sz="1400" b="1">
+                <a:solidFill>
+                  <a:srgbClr val="003D2E"/>
+                </a:solidFill>
+                <a:latin typeface="微软雅黑"/>
+                <a:ea typeface="微软雅黑"/>
+              </a:rPr>
+              <a:t>按 9 月 3 日对方口径收口</a:t>
+            </a:r>
+          </a:p>
+        </p:txBody>
+      </p:sp>
+      <p:sp>
+        <p:nvSpPr>
+          <p:cNvPr id="7" name="TextBox 6"/>
+          <p:cNvSpPr txBox="1"/>
+          <p:nvPr/>
+        </p:nvSpPr>
+        <p:spPr>
+          <a:xfrm>
+            <a:off x="502920" y="1463040"/>
+            <a:ext cx="11155680" cy="1325880"/>
+          </a:xfrm>
+          <a:prstGeom prst="rect">
+            <a:avLst/>
+          </a:prstGeom>
+          <a:noFill/>
+        </p:spPr>
+        <p:txBody>
+          <a:bodyPr wrap="square">
+            <a:spAutoFit/>
+          </a:bodyPr>
+          <a:lstStyle/>
+          <a:p>
+            <a:pPr>
+              <a:lnSpc>
+                <a:spcPct val="115000"/>
+              </a:lnSpc>
+              <a:spcAft>
+                <a:spcPts val="400"/>
+              </a:spcAft>
+            </a:pPr>
+            <a:r>
+              <a:rPr sz="1200" b="1">
+                <a:solidFill>
+                  <a:srgbClr val="C4A35A"/>
+                </a:solidFill>
+                <a:latin typeface="微软雅黑"/>
+                <a:ea typeface="微软雅黑"/>
+              </a:rPr>
+              <a:t>●  </a:t>
+            </a:r>
+            <a:r>
+              <a:rPr sz="1400" b="0">
+                <a:solidFill>
+                  <a:srgbClr val="1A2420"/>
+                </a:solidFill>
+                <a:latin typeface="微软雅黑"/>
+                <a:ea typeface="微软雅黑"/>
+              </a:rPr>
+              <a:t>主赛道按对方口径定为出海：港股路径、企业跨境、自由贸易港金融优势——不把 AI 当港大主牌来卖。</a:t>
+            </a:r>
+          </a:p>
+          <a:p>
+            <a:pPr>
+              <a:lnSpc>
+                <a:spcPct val="115000"/>
+              </a:lnSpc>
+              <a:spcAft>
+                <a:spcPts val="400"/>
+              </a:spcAft>
+            </a:pPr>
+            <a:r>
+              <a:rPr sz="1200" b="1">
+                <a:solidFill>
+                  <a:srgbClr val="C4A35A"/>
+                </a:solidFill>
+                <a:latin typeface="微软雅黑"/>
+                <a:ea typeface="微软雅黑"/>
+              </a:rPr>
+              <a:t>●  </a:t>
+            </a:r>
+            <a:r>
+              <a:rPr sz="1400" b="0">
+                <a:solidFill>
+                  <a:srgbClr val="1A2420"/>
+                </a:solidFill>
+                <a:latin typeface="微软雅黑"/>
+                <a:ea typeface="微软雅黑"/>
+              </a:rPr>
+              <a:t>先让主任到有分量的场，再谈经管学院层合作；EMBA 是粘性，不是合作的全部。</a:t>
+            </a:r>
+          </a:p>
+          <a:p>
+            <a:pPr>
+              <a:lnSpc>
+                <a:spcPct val="115000"/>
+              </a:lnSpc>
+              <a:spcAft>
+                <a:spcPts val="400"/>
+              </a:spcAft>
+            </a:pPr>
+            <a:r>
+              <a:rPr sz="1200" b="1">
+                <a:solidFill>
+                  <a:srgbClr val="C4A35A"/>
+                </a:solidFill>
+                <a:latin typeface="微软雅黑"/>
+                <a:ea typeface="微软雅黑"/>
+              </a:rPr>
+              <a:t>●  </a:t>
+            </a:r>
+            <a:r>
+              <a:rPr sz="1400" b="0">
+                <a:solidFill>
+                  <a:srgbClr val="1A2420"/>
+                </a:solidFill>
+                <a:latin typeface="微软雅黑"/>
+                <a:ea typeface="微软雅黑"/>
+              </a:rPr>
+              <a:t>来的人谈出海，名单共管，会后由招生官一对一。录取权在港大。灰色跨境玩法不进方案、不进现场。</a:t>
+            </a:r>
+          </a:p>
+        </p:txBody>
+      </p:sp>
+      <p:sp>
+        <p:nvSpPr>
+          <p:cNvPr id="8" name="Rounded Rectangle 7"/>
           <p:cNvSpPr/>
           <p:nvPr/>
         </p:nvSpPr>
         <p:spPr>
           <a:xfrm>
-            <a:off x="502920" y="1325880"/>
-            <a:ext cx="2697480" cy="2468880"/>
+            <a:off x="411480" y="2926080"/>
+            <a:ext cx="3703320" cy="2926080"/>
           </a:xfrm>
           <a:prstGeom prst="roundRect">
             <a:avLst>
@@ -9054,19 +10493,17 @@
       </p:sp>
       <p:sp>
         <p:nvSpPr>
-          <p:cNvPr id="7" name="Rounded Rectangle 6"/>
+          <p:cNvPr id="9" name="Rectangle 8"/>
           <p:cNvSpPr/>
           <p:nvPr/>
         </p:nvSpPr>
         <p:spPr>
           <a:xfrm>
-            <a:off x="1508760" y="1508760"/>
-            <a:ext cx="640080" cy="640080"/>
-          </a:xfrm>
-          <a:prstGeom prst="roundRect">
-            <a:avLst>
-              <a:gd name="adj" fmla="val 8000"/>
-            </a:avLst>
+            <a:off x="411480" y="2926080"/>
+            <a:ext cx="3703320" cy="109728"/>
+          </a:xfrm>
+          <a:prstGeom prst="rect">
+            <a:avLst/>
           </a:prstGeom>
           <a:solidFill>
             <a:srgbClr val="C4A35A"/>
@@ -9100,50 +10537,50 @@
       </p:sp>
       <p:sp>
         <p:nvSpPr>
-          <p:cNvPr id="8" name="TextBox 7"/>
-          <p:cNvSpPr txBox="1"/>
-          <p:nvPr/>
-        </p:nvSpPr>
-        <p:spPr>
-          <a:xfrm>
-            <a:off x="1508760" y="1508760"/>
-            <a:ext cx="640080" cy="640080"/>
-          </a:xfrm>
-          <a:prstGeom prst="rect">
-            <a:avLst/>
-          </a:prstGeom>
-          <a:noFill/>
-        </p:spPr>
-        <p:txBody>
-          <a:bodyPr wrap="square" anchor="ctr">
-            <a:spAutoFit/>
-          </a:bodyPr>
-          <a:lstStyle/>
-          <a:p>
-            <a:pPr algn="ctr"/>
-            <a:r>
-              <a:rPr sz="2000" b="1">
+          <p:cNvPr id="10" name="TextBox 9"/>
+          <p:cNvSpPr txBox="1"/>
+          <p:nvPr/>
+        </p:nvSpPr>
+        <p:spPr>
+          <a:xfrm>
+            <a:off x="576072" y="3127248"/>
+            <a:ext cx="3383280" cy="640080"/>
+          </a:xfrm>
+          <a:prstGeom prst="rect">
+            <a:avLst/>
+          </a:prstGeom>
+          <a:noFill/>
+        </p:spPr>
+        <p:txBody>
+          <a:bodyPr wrap="square" anchor="t">
+            <a:spAutoFit/>
+          </a:bodyPr>
+          <a:lstStyle/>
+          <a:p>
+            <a:pPr algn="l"/>
+            <a:r>
+              <a:rPr sz="1500" b="1">
                 <a:solidFill>
                   <a:srgbClr val="003D2E"/>
                 </a:solidFill>
                 <a:latin typeface="微软雅黑"/>
                 <a:ea typeface="微软雅黑"/>
               </a:rPr>
-              <a:t>1</a:t>
-            </a:r>
-          </a:p>
-        </p:txBody>
-      </p:sp>
-      <p:sp>
-        <p:nvSpPr>
-          <p:cNvPr id="9" name="TextBox 8"/>
-          <p:cNvSpPr txBox="1"/>
-          <p:nvPr/>
-        </p:nvSpPr>
-        <p:spPr>
-          <a:xfrm>
-            <a:off x="502920" y="2240280"/>
-            <a:ext cx="2697480" cy="365760"/>
+              <a:t>层 A  潘老师这一亩三分地</a:t>
+            </a:r>
+          </a:p>
+        </p:txBody>
+      </p:sp>
+      <p:sp>
+        <p:nvSpPr>
+          <p:cNvPr id="11" name="TextBox 10"/>
+          <p:cNvSpPr txBox="1"/>
+          <p:nvPr/>
+        </p:nvSpPr>
+        <p:spPr>
+          <a:xfrm>
+            <a:off x="576072" y="3794760"/>
+            <a:ext cx="3383280" cy="292608"/>
           </a:xfrm>
           <a:prstGeom prst="rect">
             <a:avLst/>
@@ -9156,30 +10593,30 @@
           </a:bodyPr>
           <a:lstStyle/>
           <a:p>
-            <a:pPr algn="ctr"/>
-            <a:r>
-              <a:rPr sz="1800" b="1">
-                <a:solidFill>
-                  <a:srgbClr val="003D2E"/>
-                </a:solidFill>
-                <a:latin typeface="微软雅黑"/>
-                <a:ea typeface="微软雅黑"/>
-              </a:rPr>
-              <a:t>邀约</a:t>
-            </a:r>
-          </a:p>
-        </p:txBody>
-      </p:sp>
-      <p:sp>
-        <p:nvSpPr>
-          <p:cNvPr id="10" name="TextBox 9"/>
-          <p:cNvSpPr txBox="1"/>
-          <p:nvPr/>
-        </p:nvSpPr>
-        <p:spPr>
-          <a:xfrm>
-            <a:off x="640080" y="2697480"/>
-            <a:ext cx="2423160" cy="914400"/>
+            <a:pPr algn="l"/>
+            <a:r>
+              <a:rPr sz="1100" b="1">
+                <a:solidFill>
+                  <a:srgbClr val="C4A35A"/>
+                </a:solidFill>
+                <a:latin typeface="微软雅黑"/>
+                <a:ea typeface="微软雅黑"/>
+              </a:rPr>
+              <a:t>EMBA 粘性 · 本期主交付</a:t>
+            </a:r>
+          </a:p>
+        </p:txBody>
+      </p:sp>
+      <p:sp>
+        <p:nvSpPr>
+          <p:cNvPr id="12" name="TextBox 11"/>
+          <p:cNvSpPr txBox="1"/>
+          <p:nvPr/>
+        </p:nvSpPr>
+        <p:spPr>
+          <a:xfrm>
+            <a:off x="576072" y="4133087"/>
+            <a:ext cx="3383280" cy="1508760"/>
           </a:xfrm>
           <a:prstGeom prst="rect">
             <a:avLst/>
@@ -9192,67 +10629,30 @@
           </a:bodyPr>
           <a:lstStyle/>
           <a:p>
-            <a:pPr algn="ctr"/>
+            <a:pPr algn="l"/>
             <a:r>
               <a:rPr sz="1300" b="0">
                 <a:solidFill>
-                  <a:srgbClr val="5B6B64"/>
-                </a:solidFill>
-                <a:latin typeface="微软雅黑"/>
-                <a:ea typeface="微软雅黑"/>
-              </a:rPr>
-              <a:t>按 EMBA 门槛筛名单
-企业主 / 高管优先</a:t>
-            </a:r>
-          </a:p>
-        </p:txBody>
-      </p:sp>
-      <p:sp>
-        <p:nvSpPr>
-          <p:cNvPr id="11" name="TextBox 10"/>
-          <p:cNvSpPr txBox="1"/>
-          <p:nvPr/>
-        </p:nvSpPr>
-        <p:spPr>
-          <a:xfrm>
-            <a:off x="2971800" y="2194560"/>
-            <a:ext cx="457200" cy="365760"/>
-          </a:xfrm>
-          <a:prstGeom prst="rect">
-            <a:avLst/>
-          </a:prstGeom>
-          <a:noFill/>
-        </p:spPr>
-        <p:txBody>
-          <a:bodyPr wrap="square" anchor="t">
-            <a:spAutoFit/>
-          </a:bodyPr>
-          <a:lstStyle/>
-          <a:p>
-            <a:pPr algn="ctr"/>
-            <a:r>
-              <a:rPr sz="2000" b="1">
-                <a:solidFill>
-                  <a:srgbClr val="C4A35A"/>
-                </a:solidFill>
-                <a:latin typeface="微软雅黑"/>
-                <a:ea typeface="微软雅黑"/>
-              </a:rPr>
-              <a:t>→</a:t>
-            </a:r>
-          </a:p>
-        </p:txBody>
-      </p:sp>
-      <p:sp>
-        <p:nvSpPr>
-          <p:cNvPr id="12" name="Rounded Rectangle 11"/>
+                  <a:srgbClr val="1A2420"/>
+                </a:solidFill>
+                <a:latin typeface="微软雅黑"/>
+                <a:ea typeface="微软雅黑"/>
+              </a:rPr>
+              <a:t>外滩出海闭门课 + 名单共管 + 会后一对一。来的人谈出海，潘老师收招生口。</a:t>
+            </a:r>
+          </a:p>
+        </p:txBody>
+      </p:sp>
+      <p:sp>
+        <p:nvSpPr>
+          <p:cNvPr id="13" name="Rounded Rectangle 12"/>
           <p:cNvSpPr/>
           <p:nvPr/>
         </p:nvSpPr>
         <p:spPr>
           <a:xfrm>
-            <a:off x="3429000" y="1325880"/>
-            <a:ext cx="2697480" cy="2468880"/>
+            <a:off x="4251960" y="2926080"/>
+            <a:ext cx="3703320" cy="2926080"/>
           </a:xfrm>
           <a:prstGeom prst="roundRect">
             <a:avLst>
@@ -9291,19 +10691,17 @@
       </p:sp>
       <p:sp>
         <p:nvSpPr>
-          <p:cNvPr id="13" name="Rounded Rectangle 12"/>
+          <p:cNvPr id="14" name="Rectangle 13"/>
           <p:cNvSpPr/>
           <p:nvPr/>
         </p:nvSpPr>
         <p:spPr>
           <a:xfrm>
-            <a:off x="4434840" y="1508760"/>
-            <a:ext cx="640080" cy="640080"/>
-          </a:xfrm>
-          <a:prstGeom prst="roundRect">
-            <a:avLst>
-              <a:gd name="adj" fmla="val 8000"/>
-            </a:avLst>
+            <a:off x="4251960" y="2926080"/>
+            <a:ext cx="3703320" cy="109728"/>
+          </a:xfrm>
+          <a:prstGeom prst="rect">
+            <a:avLst/>
           </a:prstGeom>
           <a:solidFill>
             <a:srgbClr val="C4A35A"/>
@@ -9337,8 +10735,811 @@
       </p:sp>
       <p:sp>
         <p:nvSpPr>
-          <p:cNvPr id="14" name="TextBox 13"/>
-          <p:cNvSpPr txBox="1"/>
+          <p:cNvPr id="15" name="TextBox 14"/>
+          <p:cNvSpPr txBox="1"/>
+          <p:nvPr/>
+        </p:nvSpPr>
+        <p:spPr>
+          <a:xfrm>
+            <a:off x="4416552" y="3127248"/>
+            <a:ext cx="3383280" cy="640080"/>
+          </a:xfrm>
+          <a:prstGeom prst="rect">
+            <a:avLst/>
+          </a:prstGeom>
+          <a:noFill/>
+        </p:spPr>
+        <p:txBody>
+          <a:bodyPr wrap="square" anchor="t">
+            <a:spAutoFit/>
+          </a:bodyPr>
+          <a:lstStyle/>
+          <a:p>
+            <a:pPr algn="l"/>
+            <a:r>
+              <a:rPr sz="1500" b="1">
+                <a:solidFill>
+                  <a:srgbClr val="003D2E"/>
+                </a:solidFill>
+                <a:latin typeface="微软雅黑"/>
+                <a:ea typeface="微软雅黑"/>
+              </a:rPr>
+              <a:t>层 B  给主任看的场</a:t>
+            </a:r>
+          </a:p>
+        </p:txBody>
+      </p:sp>
+      <p:sp>
+        <p:nvSpPr>
+          <p:cNvPr id="16" name="TextBox 15"/>
+          <p:cNvSpPr txBox="1"/>
+          <p:nvPr/>
+        </p:nvSpPr>
+        <p:spPr>
+          <a:xfrm>
+            <a:off x="4416552" y="3794760"/>
+            <a:ext cx="3383280" cy="292608"/>
+          </a:xfrm>
+          <a:prstGeom prst="rect">
+            <a:avLst/>
+          </a:prstGeom>
+          <a:noFill/>
+        </p:spPr>
+        <p:txBody>
+          <a:bodyPr wrap="square" anchor="t">
+            <a:spAutoFit/>
+          </a:bodyPr>
+          <a:lstStyle/>
+          <a:p>
+            <a:pPr algn="l"/>
+            <a:r>
+              <a:rPr sz="1100" b="1">
+                <a:solidFill>
+                  <a:srgbClr val="C4A35A"/>
+                </a:solidFill>
+                <a:latin typeface="微软雅黑"/>
+                <a:ea typeface="微软雅黑"/>
+              </a:rPr>
+              <a:t>经管学院入口 · 含在前期费</a:t>
+            </a:r>
+          </a:p>
+        </p:txBody>
+      </p:sp>
+      <p:sp>
+        <p:nvSpPr>
+          <p:cNvPr id="17" name="TextBox 16"/>
+          <p:cNvSpPr txBox="1"/>
+          <p:nvPr/>
+        </p:nvSpPr>
+        <p:spPr>
+          <a:xfrm>
+            <a:off x="4416552" y="4133087"/>
+            <a:ext cx="3383280" cy="1508760"/>
+          </a:xfrm>
+          <a:prstGeom prst="rect">
+            <a:avLst/>
+          </a:prstGeom>
+          <a:noFill/>
+        </p:spPr>
+        <p:txBody>
+          <a:bodyPr wrap="square" anchor="t">
+            <a:spAutoFit/>
+          </a:bodyPr>
+          <a:lstStyle/>
+          <a:p>
+            <a:pPr algn="l"/>
+            <a:r>
+              <a:rPr sz="1300" b="0">
+                <a:solidFill>
+                  <a:srgbClr val="1A2420"/>
+                </a:solidFill>
+                <a:latin typeface="微软雅黑"/>
+                <a:ea typeface="微软雅黑"/>
+              </a:rPr>
+              <a:t>90 天内邀中心主任出席一次我方高规格出海活动（总领事或企业家）。主任档期为准，不强制到场。</a:t>
+            </a:r>
+          </a:p>
+        </p:txBody>
+      </p:sp>
+      <p:sp>
+        <p:nvSpPr>
+          <p:cNvPr id="18" name="Rounded Rectangle 17"/>
+          <p:cNvSpPr/>
+          <p:nvPr/>
+        </p:nvSpPr>
+        <p:spPr>
+          <a:xfrm>
+            <a:off x="8092440" y="2926080"/>
+            <a:ext cx="3703320" cy="2926080"/>
+          </a:xfrm>
+          <a:prstGeom prst="roundRect">
+            <a:avLst>
+              <a:gd name="adj" fmla="val 8000"/>
+            </a:avLst>
+          </a:prstGeom>
+          <a:solidFill>
+            <a:srgbClr val="FFFFFF"/>
+          </a:solidFill>
+          <a:ln>
+            <a:noFill/>
+          </a:ln>
+          <a:effectLst/>
+        </p:spPr>
+        <p:style>
+          <a:lnRef idx="1">
+            <a:schemeClr val="accent1"/>
+          </a:lnRef>
+          <a:fillRef idx="3">
+            <a:schemeClr val="accent1"/>
+          </a:fillRef>
+          <a:effectRef idx="2">
+            <a:schemeClr val="accent1"/>
+          </a:effectRef>
+          <a:fontRef idx="minor">
+            <a:schemeClr val="lt1"/>
+          </a:fontRef>
+        </p:style>
+        <p:txBody>
+          <a:bodyPr rtlCol="0" anchor="ctr"/>
+          <a:lstStyle/>
+          <a:p>
+            <a:pPr algn="ctr"/>
+          </a:p>
+        </p:txBody>
+      </p:sp>
+      <p:sp>
+        <p:nvSpPr>
+          <p:cNvPr id="19" name="Rectangle 18"/>
+          <p:cNvSpPr/>
+          <p:nvPr/>
+        </p:nvSpPr>
+        <p:spPr>
+          <a:xfrm>
+            <a:off x="8092440" y="2926080"/>
+            <a:ext cx="3703320" cy="109728"/>
+          </a:xfrm>
+          <a:prstGeom prst="rect">
+            <a:avLst/>
+          </a:prstGeom>
+          <a:solidFill>
+            <a:srgbClr val="C4A35A"/>
+          </a:solidFill>
+          <a:ln>
+            <a:noFill/>
+          </a:ln>
+          <a:effectLst/>
+        </p:spPr>
+        <p:style>
+          <a:lnRef idx="1">
+            <a:schemeClr val="accent1"/>
+          </a:lnRef>
+          <a:fillRef idx="3">
+            <a:schemeClr val="accent1"/>
+          </a:fillRef>
+          <a:effectRef idx="2">
+            <a:schemeClr val="accent1"/>
+          </a:effectRef>
+          <a:fontRef idx="minor">
+            <a:schemeClr val="lt1"/>
+          </a:fontRef>
+        </p:style>
+        <p:txBody>
+          <a:bodyPr rtlCol="0" anchor="ctr"/>
+          <a:lstStyle/>
+          <a:p>
+            <a:pPr algn="ctr"/>
+          </a:p>
+        </p:txBody>
+      </p:sp>
+      <p:sp>
+        <p:nvSpPr>
+          <p:cNvPr id="20" name="TextBox 19"/>
+          <p:cNvSpPr txBox="1"/>
+          <p:nvPr/>
+        </p:nvSpPr>
+        <p:spPr>
+          <a:xfrm>
+            <a:off x="8257032" y="3127248"/>
+            <a:ext cx="3383280" cy="640080"/>
+          </a:xfrm>
+          <a:prstGeom prst="rect">
+            <a:avLst/>
+          </a:prstGeom>
+          <a:noFill/>
+        </p:spPr>
+        <p:txBody>
+          <a:bodyPr wrap="square" anchor="t">
+            <a:spAutoFit/>
+          </a:bodyPr>
+          <a:lstStyle/>
+          <a:p>
+            <a:pPr algn="l"/>
+            <a:r>
+              <a:rPr sz="1500" b="1">
+                <a:solidFill>
+                  <a:srgbClr val="003D2E"/>
+                </a:solidFill>
+                <a:latin typeface="微软雅黑"/>
+                <a:ea typeface="微软雅黑"/>
+              </a:rPr>
+              <a:t>层 C  经管学院可延伸</a:t>
+            </a:r>
+          </a:p>
+        </p:txBody>
+      </p:sp>
+      <p:sp>
+        <p:nvSpPr>
+          <p:cNvPr id="21" name="TextBox 20"/>
+          <p:cNvSpPr txBox="1"/>
+          <p:nvPr/>
+        </p:nvSpPr>
+        <p:spPr>
+          <a:xfrm>
+            <a:off x="8257032" y="3794760"/>
+            <a:ext cx="3383280" cy="292608"/>
+          </a:xfrm>
+          <a:prstGeom prst="rect">
+            <a:avLst/>
+          </a:prstGeom>
+          <a:noFill/>
+        </p:spPr>
+        <p:txBody>
+          <a:bodyPr wrap="square" anchor="t">
+            <a:spAutoFit/>
+          </a:bodyPr>
+          <a:lstStyle/>
+          <a:p>
+            <a:pPr algn="l"/>
+            <a:r>
+              <a:rPr sz="1100" b="1">
+                <a:solidFill>
+                  <a:srgbClr val="C4A35A"/>
+                </a:solidFill>
+                <a:latin typeface="微软雅黑"/>
+                <a:ea typeface="微软雅黑"/>
+              </a:rPr>
+              <a:t>意向对接 · 不验收</a:t>
+            </a:r>
+          </a:p>
+        </p:txBody>
+      </p:sp>
+      <p:sp>
+        <p:nvSpPr>
+          <p:cNvPr id="22" name="TextBox 21"/>
+          <p:cNvSpPr txBox="1"/>
+          <p:nvPr/>
+        </p:nvSpPr>
+        <p:spPr>
+          <a:xfrm>
+            <a:off x="8257032" y="4133087"/>
+            <a:ext cx="3383280" cy="1508760"/>
+          </a:xfrm>
+          <a:prstGeom prst="rect">
+            <a:avLst/>
+          </a:prstGeom>
+          <a:noFill/>
+        </p:spPr>
+        <p:txBody>
+          <a:bodyPr wrap="square" anchor="t">
+            <a:spAutoFit/>
+          </a:bodyPr>
+          <a:lstStyle/>
+          <a:p>
+            <a:pPr algn="l"/>
+            <a:r>
+              <a:rPr sz="1300" b="0">
+                <a:solidFill>
+                  <a:srgbClr val="1A2420"/>
+                </a:solidFill>
+                <a:latin typeface="微软雅黑"/>
+                <a:ea typeface="微软雅黑"/>
+              </a:rPr>
+              <a:t>出海高管课联合推广、原创谷产业与资本对接、海外模块企业参访。90 天出备忘，另签再生效。</a:t>
+            </a:r>
+          </a:p>
+        </p:txBody>
+      </p:sp>
+      <p:sp>
+        <p:nvSpPr>
+          <p:cNvPr id="23" name="TextBox 22"/>
+          <p:cNvSpPr txBox="1"/>
+          <p:nvPr/>
+        </p:nvSpPr>
+        <p:spPr>
+          <a:xfrm>
+            <a:off x="502920" y="6510528"/>
+            <a:ext cx="11155680" cy="256032"/>
+          </a:xfrm>
+          <a:prstGeom prst="rect">
+            <a:avLst/>
+          </a:prstGeom>
+          <a:noFill/>
+        </p:spPr>
+        <p:txBody>
+          <a:bodyPr wrap="square" anchor="t">
+            <a:spAutoFit/>
+          </a:bodyPr>
+          <a:lstStyle/>
+          <a:p>
+            <a:pPr algn="l"/>
+            <a:r>
+              <a:rPr sz="900" b="0">
+                <a:solidFill>
+                  <a:srgbClr val="5B6B64"/>
+                </a:solidFill>
+                <a:latin typeface="微软雅黑"/>
+                <a:ea typeface="微软雅黑"/>
+              </a:rPr>
+              <a:t>外滩·出海课堂  ·  香港大学经管学院上海中心 × 复旦大学住房政策研究中心、上海市杨浦区科技企业联合会  ·  V1.1 建议稿  ·  2026年9月</a:t>
+            </a:r>
+          </a:p>
+        </p:txBody>
+      </p:sp>
+    </p:spTree>
+  </p:cSld>
+  <p:clrMapOvr>
+    <a:masterClrMapping/>
+  </p:clrMapOvr>
+</p:sld>
+</file>
+
+<file path=ppt/slides/slide7.xml><?xml version="1.0" encoding="utf-8"?>
+<p:sld xmlns:a="http://schemas.openxmlformats.org/drawingml/2006/main" xmlns:p="http://schemas.openxmlformats.org/presentationml/2006/main" xmlns:r="http://schemas.openxmlformats.org/officeDocument/2006/relationships">
+  <p:cSld>
+    <p:spTree>
+      <p:nvGrpSpPr>
+        <p:cNvPr id="1" name=""/>
+        <p:cNvGrpSpPr/>
+        <p:nvPr/>
+      </p:nvGrpSpPr>
+      <p:grpSpPr/>
+      <p:sp>
+        <p:nvSpPr>
+          <p:cNvPr id="2" name="Rectangle 1"/>
+          <p:cNvSpPr/>
+          <p:nvPr/>
+        </p:nvSpPr>
+        <p:spPr>
+          <a:xfrm>
+            <a:off x="0" y="0"/>
+            <a:ext cx="12191695" cy="960120"/>
+          </a:xfrm>
+          <a:prstGeom prst="rect">
+            <a:avLst/>
+          </a:prstGeom>
+          <a:solidFill>
+            <a:srgbClr val="003D2E"/>
+          </a:solidFill>
+          <a:ln>
+            <a:noFill/>
+          </a:ln>
+          <a:effectLst/>
+        </p:spPr>
+        <p:style>
+          <a:lnRef idx="1">
+            <a:schemeClr val="accent1"/>
+          </a:lnRef>
+          <a:fillRef idx="3">
+            <a:schemeClr val="accent1"/>
+          </a:fillRef>
+          <a:effectRef idx="2">
+            <a:schemeClr val="accent1"/>
+          </a:effectRef>
+          <a:fontRef idx="minor">
+            <a:schemeClr val="lt1"/>
+          </a:fontRef>
+        </p:style>
+        <p:txBody>
+          <a:bodyPr rtlCol="0" anchor="ctr"/>
+          <a:lstStyle/>
+          <a:p>
+            <a:pPr algn="ctr"/>
+          </a:p>
+        </p:txBody>
+      </p:sp>
+      <p:sp>
+        <p:nvSpPr>
+          <p:cNvPr id="3" name="Rectangle 2"/>
+          <p:cNvSpPr/>
+          <p:nvPr/>
+        </p:nvSpPr>
+        <p:spPr>
+          <a:xfrm>
+            <a:off x="0" y="960120"/>
+            <a:ext cx="12191695" cy="44450"/>
+          </a:xfrm>
+          <a:prstGeom prst="rect">
+            <a:avLst/>
+          </a:prstGeom>
+          <a:solidFill>
+            <a:srgbClr val="C4A35A"/>
+          </a:solidFill>
+          <a:ln>
+            <a:noFill/>
+          </a:ln>
+          <a:effectLst/>
+        </p:spPr>
+        <p:style>
+          <a:lnRef idx="1">
+            <a:schemeClr val="accent1"/>
+          </a:lnRef>
+          <a:fillRef idx="3">
+            <a:schemeClr val="accent1"/>
+          </a:fillRef>
+          <a:effectRef idx="2">
+            <a:schemeClr val="accent1"/>
+          </a:effectRef>
+          <a:fontRef idx="minor">
+            <a:schemeClr val="lt1"/>
+          </a:fontRef>
+        </p:style>
+        <p:txBody>
+          <a:bodyPr rtlCol="0" anchor="ctr"/>
+          <a:lstStyle/>
+          <a:p>
+            <a:pPr algn="ctr"/>
+          </a:p>
+        </p:txBody>
+      </p:sp>
+      <p:sp>
+        <p:nvSpPr>
+          <p:cNvPr id="4" name="TextBox 3"/>
+          <p:cNvSpPr txBox="1"/>
+          <p:nvPr/>
+        </p:nvSpPr>
+        <p:spPr>
+          <a:xfrm>
+            <a:off x="502920" y="164592"/>
+            <a:ext cx="10241280" cy="640080"/>
+          </a:xfrm>
+          <a:prstGeom prst="rect">
+            <a:avLst/>
+          </a:prstGeom>
+          <a:noFill/>
+        </p:spPr>
+        <p:txBody>
+          <a:bodyPr wrap="square" anchor="ctr">
+            <a:spAutoFit/>
+          </a:bodyPr>
+          <a:lstStyle/>
+          <a:p>
+            <a:pPr algn="l"/>
+            <a:r>
+              <a:rPr sz="2400" b="1">
+                <a:solidFill>
+                  <a:srgbClr val="FFFFFF"/>
+                </a:solidFill>
+                <a:latin typeface="微软雅黑"/>
+                <a:ea typeface="微软雅黑"/>
+              </a:rPr>
+              <a:t>如何变成生源：现场谈出海，会后由招生官收口</a:t>
+            </a:r>
+          </a:p>
+        </p:txBody>
+      </p:sp>
+      <p:sp>
+        <p:nvSpPr>
+          <p:cNvPr id="5" name="TextBox 4"/>
+          <p:cNvSpPr txBox="1"/>
+          <p:nvPr/>
+        </p:nvSpPr>
+        <p:spPr>
+          <a:xfrm>
+            <a:off x="10515600" y="164592"/>
+            <a:ext cx="1280160" cy="640080"/>
+          </a:xfrm>
+          <a:prstGeom prst="rect">
+            <a:avLst/>
+          </a:prstGeom>
+          <a:noFill/>
+        </p:spPr>
+        <p:txBody>
+          <a:bodyPr wrap="square" anchor="ctr">
+            <a:spAutoFit/>
+          </a:bodyPr>
+          <a:lstStyle/>
+          <a:p>
+            <a:pPr algn="r"/>
+            <a:r>
+              <a:rPr sz="1200" b="1">
+                <a:solidFill>
+                  <a:srgbClr val="C4A35A"/>
+                </a:solidFill>
+                <a:latin typeface="微软雅黑"/>
+                <a:ea typeface="微软雅黑"/>
+              </a:rPr>
+              <a:t>07/13</a:t>
+            </a:r>
+          </a:p>
+        </p:txBody>
+      </p:sp>
+      <p:sp>
+        <p:nvSpPr>
+          <p:cNvPr id="6" name="Rounded Rectangle 5"/>
+          <p:cNvSpPr/>
+          <p:nvPr/>
+        </p:nvSpPr>
+        <p:spPr>
+          <a:xfrm>
+            <a:off x="502920" y="1325880"/>
+            <a:ext cx="2697480" cy="2468880"/>
+          </a:xfrm>
+          <a:prstGeom prst="roundRect">
+            <a:avLst>
+              <a:gd name="adj" fmla="val 8000"/>
+            </a:avLst>
+          </a:prstGeom>
+          <a:solidFill>
+            <a:srgbClr val="FFFFFF"/>
+          </a:solidFill>
+          <a:ln>
+            <a:noFill/>
+          </a:ln>
+          <a:effectLst/>
+        </p:spPr>
+        <p:style>
+          <a:lnRef idx="1">
+            <a:schemeClr val="accent1"/>
+          </a:lnRef>
+          <a:fillRef idx="3">
+            <a:schemeClr val="accent1"/>
+          </a:fillRef>
+          <a:effectRef idx="2">
+            <a:schemeClr val="accent1"/>
+          </a:effectRef>
+          <a:fontRef idx="minor">
+            <a:schemeClr val="lt1"/>
+          </a:fontRef>
+        </p:style>
+        <p:txBody>
+          <a:bodyPr rtlCol="0" anchor="ctr"/>
+          <a:lstStyle/>
+          <a:p>
+            <a:pPr algn="ctr"/>
+          </a:p>
+        </p:txBody>
+      </p:sp>
+      <p:sp>
+        <p:nvSpPr>
+          <p:cNvPr id="7" name="Rounded Rectangle 6"/>
+          <p:cNvSpPr/>
+          <p:nvPr/>
+        </p:nvSpPr>
+        <p:spPr>
+          <a:xfrm>
+            <a:off x="1508760" y="1508760"/>
+            <a:ext cx="640080" cy="640080"/>
+          </a:xfrm>
+          <a:prstGeom prst="roundRect">
+            <a:avLst>
+              <a:gd name="adj" fmla="val 8000"/>
+            </a:avLst>
+          </a:prstGeom>
+          <a:solidFill>
+            <a:srgbClr val="C4A35A"/>
+          </a:solidFill>
+          <a:ln>
+            <a:noFill/>
+          </a:ln>
+          <a:effectLst/>
+        </p:spPr>
+        <p:style>
+          <a:lnRef idx="1">
+            <a:schemeClr val="accent1"/>
+          </a:lnRef>
+          <a:fillRef idx="3">
+            <a:schemeClr val="accent1"/>
+          </a:fillRef>
+          <a:effectRef idx="2">
+            <a:schemeClr val="accent1"/>
+          </a:effectRef>
+          <a:fontRef idx="minor">
+            <a:schemeClr val="lt1"/>
+          </a:fontRef>
+        </p:style>
+        <p:txBody>
+          <a:bodyPr rtlCol="0" anchor="ctr"/>
+          <a:lstStyle/>
+          <a:p>
+            <a:pPr algn="ctr"/>
+          </a:p>
+        </p:txBody>
+      </p:sp>
+      <p:sp>
+        <p:nvSpPr>
+          <p:cNvPr id="8" name="TextBox 7"/>
+          <p:cNvSpPr txBox="1"/>
+          <p:nvPr/>
+        </p:nvSpPr>
+        <p:spPr>
+          <a:xfrm>
+            <a:off x="1508760" y="1508760"/>
+            <a:ext cx="640080" cy="640080"/>
+          </a:xfrm>
+          <a:prstGeom prst="rect">
+            <a:avLst/>
+          </a:prstGeom>
+          <a:noFill/>
+        </p:spPr>
+        <p:txBody>
+          <a:bodyPr wrap="square" anchor="ctr">
+            <a:spAutoFit/>
+          </a:bodyPr>
+          <a:lstStyle/>
+          <a:p>
+            <a:pPr algn="ctr"/>
+            <a:r>
+              <a:rPr sz="2000" b="1">
+                <a:solidFill>
+                  <a:srgbClr val="003D2E"/>
+                </a:solidFill>
+                <a:latin typeface="微软雅黑"/>
+                <a:ea typeface="微软雅黑"/>
+              </a:rPr>
+              <a:t>1</a:t>
+            </a:r>
+          </a:p>
+        </p:txBody>
+      </p:sp>
+      <p:sp>
+        <p:nvSpPr>
+          <p:cNvPr id="9" name="TextBox 8"/>
+          <p:cNvSpPr txBox="1"/>
+          <p:nvPr/>
+        </p:nvSpPr>
+        <p:spPr>
+          <a:xfrm>
+            <a:off x="502920" y="2240280"/>
+            <a:ext cx="2697480" cy="365760"/>
+          </a:xfrm>
+          <a:prstGeom prst="rect">
+            <a:avLst/>
+          </a:prstGeom>
+          <a:noFill/>
+        </p:spPr>
+        <p:txBody>
+          <a:bodyPr wrap="square" anchor="t">
+            <a:spAutoFit/>
+          </a:bodyPr>
+          <a:lstStyle/>
+          <a:p>
+            <a:pPr algn="ctr"/>
+            <a:r>
+              <a:rPr sz="1800" b="1">
+                <a:solidFill>
+                  <a:srgbClr val="003D2E"/>
+                </a:solidFill>
+                <a:latin typeface="微软雅黑"/>
+                <a:ea typeface="微软雅黑"/>
+              </a:rPr>
+              <a:t>邀约</a:t>
+            </a:r>
+          </a:p>
+        </p:txBody>
+      </p:sp>
+      <p:sp>
+        <p:nvSpPr>
+          <p:cNvPr id="10" name="TextBox 9"/>
+          <p:cNvSpPr txBox="1"/>
+          <p:nvPr/>
+        </p:nvSpPr>
+        <p:spPr>
+          <a:xfrm>
+            <a:off x="640080" y="2697480"/>
+            <a:ext cx="2423160" cy="914400"/>
+          </a:xfrm>
+          <a:prstGeom prst="rect">
+            <a:avLst/>
+          </a:prstGeom>
+          <a:noFill/>
+        </p:spPr>
+        <p:txBody>
+          <a:bodyPr wrap="square" anchor="t">
+            <a:spAutoFit/>
+          </a:bodyPr>
+          <a:lstStyle/>
+          <a:p>
+            <a:pPr algn="ctr"/>
+            <a:r>
+              <a:rPr sz="1300" b="0">
+                <a:solidFill>
+                  <a:srgbClr val="5B6B64"/>
+                </a:solidFill>
+                <a:latin typeface="微软雅黑"/>
+                <a:ea typeface="微软雅黑"/>
+              </a:rPr>
+              <a:t>按 EMBA 门槛筛名单
+企业主 / 高管优先</a:t>
+            </a:r>
+          </a:p>
+        </p:txBody>
+      </p:sp>
+      <p:sp>
+        <p:nvSpPr>
+          <p:cNvPr id="11" name="TextBox 10"/>
+          <p:cNvSpPr txBox="1"/>
+          <p:nvPr/>
+        </p:nvSpPr>
+        <p:spPr>
+          <a:xfrm>
+            <a:off x="2971800" y="2194560"/>
+            <a:ext cx="457200" cy="365760"/>
+          </a:xfrm>
+          <a:prstGeom prst="rect">
+            <a:avLst/>
+          </a:prstGeom>
+          <a:noFill/>
+        </p:spPr>
+        <p:txBody>
+          <a:bodyPr wrap="square" anchor="t">
+            <a:spAutoFit/>
+          </a:bodyPr>
+          <a:lstStyle/>
+          <a:p>
+            <a:pPr algn="ctr"/>
+            <a:r>
+              <a:rPr sz="2000" b="1">
+                <a:solidFill>
+                  <a:srgbClr val="C4A35A"/>
+                </a:solidFill>
+                <a:latin typeface="微软雅黑"/>
+                <a:ea typeface="微软雅黑"/>
+              </a:rPr>
+              <a:t>→</a:t>
+            </a:r>
+          </a:p>
+        </p:txBody>
+      </p:sp>
+      <p:sp>
+        <p:nvSpPr>
+          <p:cNvPr id="12" name="Rounded Rectangle 11"/>
+          <p:cNvSpPr/>
+          <p:nvPr/>
+        </p:nvSpPr>
+        <p:spPr>
+          <a:xfrm>
+            <a:off x="3429000" y="1325880"/>
+            <a:ext cx="2697480" cy="2468880"/>
+          </a:xfrm>
+          <a:prstGeom prst="roundRect">
+            <a:avLst>
+              <a:gd name="adj" fmla="val 8000"/>
+            </a:avLst>
+          </a:prstGeom>
+          <a:solidFill>
+            <a:srgbClr val="FFFFFF"/>
+          </a:solidFill>
+          <a:ln>
+            <a:noFill/>
+          </a:ln>
+          <a:effectLst/>
+        </p:spPr>
+        <p:style>
+          <a:lnRef idx="1">
+            <a:schemeClr val="accent1"/>
+          </a:lnRef>
+          <a:fillRef idx="3">
+            <a:schemeClr val="accent1"/>
+          </a:fillRef>
+          <a:effectRef idx="2">
+            <a:schemeClr val="accent1"/>
+          </a:effectRef>
+          <a:fontRef idx="minor">
+            <a:schemeClr val="lt1"/>
+          </a:fontRef>
+        </p:style>
+        <p:txBody>
+          <a:bodyPr rtlCol="0" anchor="ctr"/>
+          <a:lstStyle/>
+          <a:p>
+            <a:pPr algn="ctr"/>
+          </a:p>
+        </p:txBody>
+      </p:sp>
+      <p:sp>
+        <p:nvSpPr>
+          <p:cNvPr id="13" name="Rounded Rectangle 12"/>
+          <p:cNvSpPr/>
           <p:nvPr/>
         </p:nvSpPr>
         <p:spPr>
@@ -9346,6 +11547,52 @@
             <a:off x="4434840" y="1508760"/>
             <a:ext cx="640080" cy="640080"/>
           </a:xfrm>
+          <a:prstGeom prst="roundRect">
+            <a:avLst>
+              <a:gd name="adj" fmla="val 8000"/>
+            </a:avLst>
+          </a:prstGeom>
+          <a:solidFill>
+            <a:srgbClr val="C4A35A"/>
+          </a:solidFill>
+          <a:ln>
+            <a:noFill/>
+          </a:ln>
+          <a:effectLst/>
+        </p:spPr>
+        <p:style>
+          <a:lnRef idx="1">
+            <a:schemeClr val="accent1"/>
+          </a:lnRef>
+          <a:fillRef idx="3">
+            <a:schemeClr val="accent1"/>
+          </a:fillRef>
+          <a:effectRef idx="2">
+            <a:schemeClr val="accent1"/>
+          </a:effectRef>
+          <a:fontRef idx="minor">
+            <a:schemeClr val="lt1"/>
+          </a:fontRef>
+        </p:style>
+        <p:txBody>
+          <a:bodyPr rtlCol="0" anchor="ctr"/>
+          <a:lstStyle/>
+          <a:p>
+            <a:pPr algn="ctr"/>
+          </a:p>
+        </p:txBody>
+      </p:sp>
+      <p:sp>
+        <p:nvSpPr>
+          <p:cNvPr id="14" name="TextBox 13"/>
+          <p:cNvSpPr txBox="1"/>
+          <p:nvPr/>
+        </p:nvSpPr>
+        <p:spPr>
+          <a:xfrm>
+            <a:off x="4434840" y="1508760"/>
+            <a:ext cx="640080" cy="640080"/>
+          </a:xfrm>
           <a:prstGeom prst="rect">
             <a:avLst/>
           </a:prstGeom>
@@ -9438,8 +11685,8 @@
                 <a:latin typeface="微软雅黑"/>
                 <a:ea typeface="微软雅黑"/>
               </a:rPr>
-              <a:t>产业议题把人留下
-港大品牌把场撑住</a:t>
+              <a:t>出海议题把人留下
+港大路径把场撑住</a:t>
             </a:r>
           </a:p>
         </p:txBody>
@@ -10115,7 +12362,7 @@
                           <a:latin typeface="微软雅黑"/>
                           <a:ea typeface="微软雅黑"/>
                         </a:rPr>
-                        <a:t>到场者中符合 EMBA 经验门槛的比例 ≥ 60%</a:t>
+                        <a:t>到场者中符合 EMBA 经验门槛或明确出海决策权的比例 ≥ 60%</a:t>
                       </a:r>
                     </a:p>
                   </a:txBody>
@@ -10191,7 +12438,7 @@
                           <a:latin typeface="微软雅黑"/>
                           <a:ea typeface="微软雅黑"/>
                         </a:rPr>
-                        <a:t>不承诺</a:t>
+                        <a:t>主任体验</a:t>
                       </a:r>
                     </a:p>
                   </a:txBody>
@@ -10215,7 +12462,7 @@
                           <a:latin typeface="微软雅黑"/>
                           <a:ea typeface="微软雅黑"/>
                         </a:rPr>
-                        <a:t>不承诺录取人数、不承诺学费流水——录取权在学院</a:t>
+                        <a:t>90 天内完成一次正式邀约；是否出席以其公务为准，不构成强制</a:t>
                       </a:r>
                     </a:p>
                   </a:txBody>
@@ -10261,1013 +12508,7 @@
                 <a:latin typeface="微软雅黑"/>
                 <a:ea typeface="微软雅黑"/>
               </a:rPr>
-              <a:t>外滩·产业课堂  ·  香港大学经管学院上海中心 × 复旦大学住房政策研究中心、上海市杨浦区科技企业联合会  ·  V1.0 建议稿  ·  2026年9月</a:t>
-            </a:r>
-          </a:p>
-        </p:txBody>
-      </p:sp>
-    </p:spTree>
-  </p:cSld>
-  <p:clrMapOvr>
-    <a:masterClrMapping/>
-  </p:clrMapOvr>
-</p:sld>
-</file>
-
-<file path=ppt/slides/slide7.xml><?xml version="1.0" encoding="utf-8"?>
-<p:sld xmlns:a="http://schemas.openxmlformats.org/drawingml/2006/main" xmlns:p="http://schemas.openxmlformats.org/presentationml/2006/main" xmlns:r="http://schemas.openxmlformats.org/officeDocument/2006/relationships">
-  <p:cSld>
-    <p:spTree>
-      <p:nvGrpSpPr>
-        <p:cNvPr id="1" name=""/>
-        <p:cNvGrpSpPr/>
-        <p:nvPr/>
-      </p:nvGrpSpPr>
-      <p:grpSpPr/>
-      <p:sp>
-        <p:nvSpPr>
-          <p:cNvPr id="2" name="Rectangle 1"/>
-          <p:cNvSpPr/>
-          <p:nvPr/>
-        </p:nvSpPr>
-        <p:spPr>
-          <a:xfrm>
-            <a:off x="0" y="0"/>
-            <a:ext cx="12191695" cy="960120"/>
-          </a:xfrm>
-          <a:prstGeom prst="rect">
-            <a:avLst/>
-          </a:prstGeom>
-          <a:solidFill>
-            <a:srgbClr val="003D2E"/>
-          </a:solidFill>
-          <a:ln>
-            <a:noFill/>
-          </a:ln>
-          <a:effectLst/>
-        </p:spPr>
-        <p:style>
-          <a:lnRef idx="1">
-            <a:schemeClr val="accent1"/>
-          </a:lnRef>
-          <a:fillRef idx="3">
-            <a:schemeClr val="accent1"/>
-          </a:fillRef>
-          <a:effectRef idx="2">
-            <a:schemeClr val="accent1"/>
-          </a:effectRef>
-          <a:fontRef idx="minor">
-            <a:schemeClr val="lt1"/>
-          </a:fontRef>
-        </p:style>
-        <p:txBody>
-          <a:bodyPr rtlCol="0" anchor="ctr"/>
-          <a:lstStyle/>
-          <a:p>
-            <a:pPr algn="ctr"/>
-          </a:p>
-        </p:txBody>
-      </p:sp>
-      <p:sp>
-        <p:nvSpPr>
-          <p:cNvPr id="3" name="Rectangle 2"/>
-          <p:cNvSpPr/>
-          <p:nvPr/>
-        </p:nvSpPr>
-        <p:spPr>
-          <a:xfrm>
-            <a:off x="0" y="960120"/>
-            <a:ext cx="12191695" cy="44450"/>
-          </a:xfrm>
-          <a:prstGeom prst="rect">
-            <a:avLst/>
-          </a:prstGeom>
-          <a:solidFill>
-            <a:srgbClr val="C4A35A"/>
-          </a:solidFill>
-          <a:ln>
-            <a:noFill/>
-          </a:ln>
-          <a:effectLst/>
-        </p:spPr>
-        <p:style>
-          <a:lnRef idx="1">
-            <a:schemeClr val="accent1"/>
-          </a:lnRef>
-          <a:fillRef idx="3">
-            <a:schemeClr val="accent1"/>
-          </a:fillRef>
-          <a:effectRef idx="2">
-            <a:schemeClr val="accent1"/>
-          </a:effectRef>
-          <a:fontRef idx="minor">
-            <a:schemeClr val="lt1"/>
-          </a:fontRef>
-        </p:style>
-        <p:txBody>
-          <a:bodyPr rtlCol="0" anchor="ctr"/>
-          <a:lstStyle/>
-          <a:p>
-            <a:pPr algn="ctr"/>
-          </a:p>
-        </p:txBody>
-      </p:sp>
-      <p:sp>
-        <p:nvSpPr>
-          <p:cNvPr id="4" name="TextBox 3"/>
-          <p:cNvSpPr txBox="1"/>
-          <p:nvPr/>
-        </p:nvSpPr>
-        <p:spPr>
-          <a:xfrm>
-            <a:off x="502920" y="164592"/>
-            <a:ext cx="10241280" cy="640080"/>
-          </a:xfrm>
-          <a:prstGeom prst="rect">
-            <a:avLst/>
-          </a:prstGeom>
-          <a:noFill/>
-        </p:spPr>
-        <p:txBody>
-          <a:bodyPr wrap="square" anchor="ctr">
-            <a:spAutoFit/>
-          </a:bodyPr>
-          <a:lstStyle/>
-          <a:p>
-            <a:pPr algn="l"/>
-            <a:r>
-              <a:rPr sz="2400" b="1">
-                <a:solidFill>
-                  <a:srgbClr val="FFFFFF"/>
-                </a:solidFill>
-                <a:latin typeface="微软雅黑"/>
-                <a:ea typeface="微软雅黑"/>
-              </a:rPr>
-              <a:t>90 天联合策划：把首场做成可复制的样板</a:t>
-            </a:r>
-          </a:p>
-        </p:txBody>
-      </p:sp>
-      <p:sp>
-        <p:nvSpPr>
-          <p:cNvPr id="5" name="TextBox 4"/>
-          <p:cNvSpPr txBox="1"/>
-          <p:nvPr/>
-        </p:nvSpPr>
-        <p:spPr>
-          <a:xfrm>
-            <a:off x="10515600" y="164592"/>
-            <a:ext cx="1280160" cy="640080"/>
-          </a:xfrm>
-          <a:prstGeom prst="rect">
-            <a:avLst/>
-          </a:prstGeom>
-          <a:noFill/>
-        </p:spPr>
-        <p:txBody>
-          <a:bodyPr wrap="square" anchor="ctr">
-            <a:spAutoFit/>
-          </a:bodyPr>
-          <a:lstStyle/>
-          <a:p>
-            <a:pPr algn="r"/>
-            <a:r>
-              <a:rPr sz="1200" b="1">
-                <a:solidFill>
-                  <a:srgbClr val="C4A35A"/>
-                </a:solidFill>
-                <a:latin typeface="微软雅黑"/>
-                <a:ea typeface="微软雅黑"/>
-              </a:rPr>
-              <a:t>07/12</a:t>
-            </a:r>
-          </a:p>
-        </p:txBody>
-      </p:sp>
-      <p:sp>
-        <p:nvSpPr>
-          <p:cNvPr id="6" name="Rounded Rectangle 5"/>
-          <p:cNvSpPr/>
-          <p:nvPr/>
-        </p:nvSpPr>
-        <p:spPr>
-          <a:xfrm>
-            <a:off x="457200" y="1234440"/>
-            <a:ext cx="11247120" cy="1078992"/>
-          </a:xfrm>
-          <a:prstGeom prst="roundRect">
-            <a:avLst>
-              <a:gd name="adj" fmla="val 8000"/>
-            </a:avLst>
-          </a:prstGeom>
-          <a:solidFill>
-            <a:srgbClr val="FFFFFF"/>
-          </a:solidFill>
-          <a:ln>
-            <a:noFill/>
-          </a:ln>
-          <a:effectLst/>
-        </p:spPr>
-        <p:style>
-          <a:lnRef idx="1">
-            <a:schemeClr val="accent1"/>
-          </a:lnRef>
-          <a:fillRef idx="3">
-            <a:schemeClr val="accent1"/>
-          </a:fillRef>
-          <a:effectRef idx="2">
-            <a:schemeClr val="accent1"/>
-          </a:effectRef>
-          <a:fontRef idx="minor">
-            <a:schemeClr val="lt1"/>
-          </a:fontRef>
-        </p:style>
-        <p:txBody>
-          <a:bodyPr rtlCol="0" anchor="ctr"/>
-          <a:lstStyle/>
-          <a:p>
-            <a:pPr algn="ctr"/>
-          </a:p>
-        </p:txBody>
-      </p:sp>
-      <p:sp>
-        <p:nvSpPr>
-          <p:cNvPr id="7" name="Rectangle 6"/>
-          <p:cNvSpPr/>
-          <p:nvPr/>
-        </p:nvSpPr>
-        <p:spPr>
-          <a:xfrm>
-            <a:off x="457200" y="1234440"/>
-            <a:ext cx="128016" cy="1078992"/>
-          </a:xfrm>
-          <a:prstGeom prst="rect">
-            <a:avLst/>
-          </a:prstGeom>
-          <a:solidFill>
-            <a:srgbClr val="C4A35A"/>
-          </a:solidFill>
-          <a:ln>
-            <a:noFill/>
-          </a:ln>
-          <a:effectLst/>
-        </p:spPr>
-        <p:style>
-          <a:lnRef idx="1">
-            <a:schemeClr val="accent1"/>
-          </a:lnRef>
-          <a:fillRef idx="3">
-            <a:schemeClr val="accent1"/>
-          </a:fillRef>
-          <a:effectRef idx="2">
-            <a:schemeClr val="accent1"/>
-          </a:effectRef>
-          <a:fontRef idx="minor">
-            <a:schemeClr val="lt1"/>
-          </a:fontRef>
-        </p:style>
-        <p:txBody>
-          <a:bodyPr rtlCol="0" anchor="ctr"/>
-          <a:lstStyle/>
-          <a:p>
-            <a:pPr algn="ctr"/>
-          </a:p>
-        </p:txBody>
-      </p:sp>
-      <p:sp>
-        <p:nvSpPr>
-          <p:cNvPr id="8" name="TextBox 7"/>
-          <p:cNvSpPr txBox="1"/>
-          <p:nvPr/>
-        </p:nvSpPr>
-        <p:spPr>
-          <a:xfrm>
-            <a:off x="777240" y="1399032"/>
-            <a:ext cx="2194560" cy="731520"/>
-          </a:xfrm>
-          <a:prstGeom prst="rect">
-            <a:avLst/>
-          </a:prstGeom>
-          <a:noFill/>
-        </p:spPr>
-        <p:txBody>
-          <a:bodyPr wrap="square" anchor="ctr">
-            <a:spAutoFit/>
-          </a:bodyPr>
-          <a:lstStyle/>
-          <a:p>
-            <a:pPr algn="l"/>
-            <a:r>
-              <a:rPr sz="1600" b="1">
-                <a:solidFill>
-                  <a:srgbClr val="003D2E"/>
-                </a:solidFill>
-                <a:latin typeface="微软雅黑"/>
-                <a:ea typeface="微软雅黑"/>
-              </a:rPr>
-              <a:t>D0–D7</a:t>
-            </a:r>
-          </a:p>
-        </p:txBody>
-      </p:sp>
-      <p:sp>
-        <p:nvSpPr>
-          <p:cNvPr id="9" name="TextBox 8"/>
-          <p:cNvSpPr txBox="1"/>
-          <p:nvPr/>
-        </p:nvSpPr>
-        <p:spPr>
-          <a:xfrm>
-            <a:off x="3017520" y="1371600"/>
-            <a:ext cx="8412480" cy="365760"/>
-          </a:xfrm>
-          <a:prstGeom prst="rect">
-            <a:avLst/>
-          </a:prstGeom>
-          <a:noFill/>
-        </p:spPr>
-        <p:txBody>
-          <a:bodyPr wrap="square" anchor="t">
-            <a:spAutoFit/>
-          </a:bodyPr>
-          <a:lstStyle/>
-          <a:p>
-            <a:pPr algn="l"/>
-            <a:r>
-              <a:rPr sz="1600" b="1">
-                <a:solidFill>
-                  <a:srgbClr val="1A2420"/>
-                </a:solidFill>
-                <a:latin typeface="微软雅黑"/>
-                <a:ea typeface="微软雅黑"/>
-              </a:rPr>
-              <a:t>签约与到账</a:t>
-            </a:r>
-          </a:p>
-        </p:txBody>
-      </p:sp>
-      <p:sp>
-        <p:nvSpPr>
-          <p:cNvPr id="10" name="TextBox 9"/>
-          <p:cNvSpPr txBox="1"/>
-          <p:nvPr/>
-        </p:nvSpPr>
-        <p:spPr>
-          <a:xfrm>
-            <a:off x="3017520" y="1737360"/>
-            <a:ext cx="8412480" cy="457200"/>
-          </a:xfrm>
-          <a:prstGeom prst="rect">
-            <a:avLst/>
-          </a:prstGeom>
-          <a:noFill/>
-        </p:spPr>
-        <p:txBody>
-          <a:bodyPr wrap="square" anchor="t">
-            <a:spAutoFit/>
-          </a:bodyPr>
-          <a:lstStyle/>
-          <a:p>
-            <a:pPr algn="l"/>
-            <a:r>
-              <a:rPr sz="1300" b="0">
-                <a:solidFill>
-                  <a:srgbClr val="5B6B64"/>
-                </a:solidFill>
-                <a:latin typeface="微软雅黑"/>
-                <a:ea typeface="微软雅黑"/>
-              </a:rPr>
-              <a:t>协议签署，前期费用到账；确认首场主题、日期、场地档期。</a:t>
-            </a:r>
-          </a:p>
-        </p:txBody>
-      </p:sp>
-      <p:sp>
-        <p:nvSpPr>
-          <p:cNvPr id="11" name="Rounded Rectangle 10"/>
-          <p:cNvSpPr/>
-          <p:nvPr/>
-        </p:nvSpPr>
-        <p:spPr>
-          <a:xfrm>
-            <a:off x="457200" y="2423160"/>
-            <a:ext cx="11247120" cy="1078992"/>
-          </a:xfrm>
-          <a:prstGeom prst="roundRect">
-            <a:avLst>
-              <a:gd name="adj" fmla="val 8000"/>
-            </a:avLst>
-          </a:prstGeom>
-          <a:solidFill>
-            <a:srgbClr val="FFFFFF"/>
-          </a:solidFill>
-          <a:ln>
-            <a:noFill/>
-          </a:ln>
-          <a:effectLst/>
-        </p:spPr>
-        <p:style>
-          <a:lnRef idx="1">
-            <a:schemeClr val="accent1"/>
-          </a:lnRef>
-          <a:fillRef idx="3">
-            <a:schemeClr val="accent1"/>
-          </a:fillRef>
-          <a:effectRef idx="2">
-            <a:schemeClr val="accent1"/>
-          </a:effectRef>
-          <a:fontRef idx="minor">
-            <a:schemeClr val="lt1"/>
-          </a:fontRef>
-        </p:style>
-        <p:txBody>
-          <a:bodyPr rtlCol="0" anchor="ctr"/>
-          <a:lstStyle/>
-          <a:p>
-            <a:pPr algn="ctr"/>
-          </a:p>
-        </p:txBody>
-      </p:sp>
-      <p:sp>
-        <p:nvSpPr>
-          <p:cNvPr id="12" name="Rectangle 11"/>
-          <p:cNvSpPr/>
-          <p:nvPr/>
-        </p:nvSpPr>
-        <p:spPr>
-          <a:xfrm>
-            <a:off x="457200" y="2423160"/>
-            <a:ext cx="128016" cy="1078992"/>
-          </a:xfrm>
-          <a:prstGeom prst="rect">
-            <a:avLst/>
-          </a:prstGeom>
-          <a:solidFill>
-            <a:srgbClr val="C4A35A"/>
-          </a:solidFill>
-          <a:ln>
-            <a:noFill/>
-          </a:ln>
-          <a:effectLst/>
-        </p:spPr>
-        <p:style>
-          <a:lnRef idx="1">
-            <a:schemeClr val="accent1"/>
-          </a:lnRef>
-          <a:fillRef idx="3">
-            <a:schemeClr val="accent1"/>
-          </a:fillRef>
-          <a:effectRef idx="2">
-            <a:schemeClr val="accent1"/>
-          </a:effectRef>
-          <a:fontRef idx="minor">
-            <a:schemeClr val="lt1"/>
-          </a:fontRef>
-        </p:style>
-        <p:txBody>
-          <a:bodyPr rtlCol="0" anchor="ctr"/>
-          <a:lstStyle/>
-          <a:p>
-            <a:pPr algn="ctr"/>
-          </a:p>
-        </p:txBody>
-      </p:sp>
-      <p:sp>
-        <p:nvSpPr>
-          <p:cNvPr id="13" name="TextBox 12"/>
-          <p:cNvSpPr txBox="1"/>
-          <p:nvPr/>
-        </p:nvSpPr>
-        <p:spPr>
-          <a:xfrm>
-            <a:off x="777240" y="2587752"/>
-            <a:ext cx="2194560" cy="731520"/>
-          </a:xfrm>
-          <a:prstGeom prst="rect">
-            <a:avLst/>
-          </a:prstGeom>
-          <a:noFill/>
-        </p:spPr>
-        <p:txBody>
-          <a:bodyPr wrap="square" anchor="ctr">
-            <a:spAutoFit/>
-          </a:bodyPr>
-          <a:lstStyle/>
-          <a:p>
-            <a:pPr algn="l"/>
-            <a:r>
-              <a:rPr sz="1600" b="1">
-                <a:solidFill>
-                  <a:srgbClr val="003D2E"/>
-                </a:solidFill>
-                <a:latin typeface="微软雅黑"/>
-                <a:ea typeface="微软雅黑"/>
-              </a:rPr>
-              <a:t>D8–D21</a:t>
-            </a:r>
-          </a:p>
-        </p:txBody>
-      </p:sp>
-      <p:sp>
-        <p:nvSpPr>
-          <p:cNvPr id="14" name="TextBox 13"/>
-          <p:cNvSpPr txBox="1"/>
-          <p:nvPr/>
-        </p:nvSpPr>
-        <p:spPr>
-          <a:xfrm>
-            <a:off x="3017520" y="2560320"/>
-            <a:ext cx="8412480" cy="365760"/>
-          </a:xfrm>
-          <a:prstGeom prst="rect">
-            <a:avLst/>
-          </a:prstGeom>
-          <a:noFill/>
-        </p:spPr>
-        <p:txBody>
-          <a:bodyPr wrap="square" anchor="t">
-            <a:spAutoFit/>
-          </a:bodyPr>
-          <a:lstStyle/>
-          <a:p>
-            <a:pPr algn="l"/>
-            <a:r>
-              <a:rPr sz="1600" b="1">
-                <a:solidFill>
-                  <a:srgbClr val="1A2420"/>
-                </a:solidFill>
-                <a:latin typeface="微软雅黑"/>
-                <a:ea typeface="微软雅黑"/>
-              </a:rPr>
-              <a:t>画像与名单</a:t>
-            </a:r>
-          </a:p>
-        </p:txBody>
-      </p:sp>
-      <p:sp>
-        <p:nvSpPr>
-          <p:cNvPr id="15" name="TextBox 14"/>
-          <p:cNvSpPr txBox="1"/>
-          <p:nvPr/>
-        </p:nvSpPr>
-        <p:spPr>
-          <a:xfrm>
-            <a:off x="3017520" y="2926080"/>
-            <a:ext cx="8412480" cy="457200"/>
-          </a:xfrm>
-          <a:prstGeom prst="rect">
-            <a:avLst/>
-          </a:prstGeom>
-          <a:noFill/>
-        </p:spPr>
-        <p:txBody>
-          <a:bodyPr wrap="square" anchor="t">
-            <a:spAutoFit/>
-          </a:bodyPr>
-          <a:lstStyle/>
-          <a:p>
-            <a:pPr algn="l"/>
-            <a:r>
-              <a:rPr sz="1300" b="0">
-                <a:solidFill>
-                  <a:srgbClr val="5B6B64"/>
-                </a:solidFill>
-                <a:latin typeface="微软雅黑"/>
-                <a:ea typeface="微软雅黑"/>
-              </a:rPr>
-              <a:t>完成客群画像、邀约话术、首批 80 人定向名单初稿，双方书面确认。</a:t>
-            </a:r>
-          </a:p>
-        </p:txBody>
-      </p:sp>
-      <p:sp>
-        <p:nvSpPr>
-          <p:cNvPr id="16" name="Rounded Rectangle 15"/>
-          <p:cNvSpPr/>
-          <p:nvPr/>
-        </p:nvSpPr>
-        <p:spPr>
-          <a:xfrm>
-            <a:off x="457200" y="3611880"/>
-            <a:ext cx="11247120" cy="1078992"/>
-          </a:xfrm>
-          <a:prstGeom prst="roundRect">
-            <a:avLst>
-              <a:gd name="adj" fmla="val 8000"/>
-            </a:avLst>
-          </a:prstGeom>
-          <a:solidFill>
-            <a:srgbClr val="FFFFFF"/>
-          </a:solidFill>
-          <a:ln>
-            <a:noFill/>
-          </a:ln>
-          <a:effectLst/>
-        </p:spPr>
-        <p:style>
-          <a:lnRef idx="1">
-            <a:schemeClr val="accent1"/>
-          </a:lnRef>
-          <a:fillRef idx="3">
-            <a:schemeClr val="accent1"/>
-          </a:fillRef>
-          <a:effectRef idx="2">
-            <a:schemeClr val="accent1"/>
-          </a:effectRef>
-          <a:fontRef idx="minor">
-            <a:schemeClr val="lt1"/>
-          </a:fontRef>
-        </p:style>
-        <p:txBody>
-          <a:bodyPr rtlCol="0" anchor="ctr"/>
-          <a:lstStyle/>
-          <a:p>
-            <a:pPr algn="ctr"/>
-          </a:p>
-        </p:txBody>
-      </p:sp>
-      <p:sp>
-        <p:nvSpPr>
-          <p:cNvPr id="17" name="Rectangle 16"/>
-          <p:cNvSpPr/>
-          <p:nvPr/>
-        </p:nvSpPr>
-        <p:spPr>
-          <a:xfrm>
-            <a:off x="457200" y="3611880"/>
-            <a:ext cx="128016" cy="1078992"/>
-          </a:xfrm>
-          <a:prstGeom prst="rect">
-            <a:avLst/>
-          </a:prstGeom>
-          <a:solidFill>
-            <a:srgbClr val="C4A35A"/>
-          </a:solidFill>
-          <a:ln>
-            <a:noFill/>
-          </a:ln>
-          <a:effectLst/>
-        </p:spPr>
-        <p:style>
-          <a:lnRef idx="1">
-            <a:schemeClr val="accent1"/>
-          </a:lnRef>
-          <a:fillRef idx="3">
-            <a:schemeClr val="accent1"/>
-          </a:fillRef>
-          <a:effectRef idx="2">
-            <a:schemeClr val="accent1"/>
-          </a:effectRef>
-          <a:fontRef idx="minor">
-            <a:schemeClr val="lt1"/>
-          </a:fontRef>
-        </p:style>
-        <p:txBody>
-          <a:bodyPr rtlCol="0" anchor="ctr"/>
-          <a:lstStyle/>
-          <a:p>
-            <a:pPr algn="ctr"/>
-          </a:p>
-        </p:txBody>
-      </p:sp>
-      <p:sp>
-        <p:nvSpPr>
-          <p:cNvPr id="18" name="TextBox 17"/>
-          <p:cNvSpPr txBox="1"/>
-          <p:nvPr/>
-        </p:nvSpPr>
-        <p:spPr>
-          <a:xfrm>
-            <a:off x="777240" y="3776472"/>
-            <a:ext cx="2194560" cy="731520"/>
-          </a:xfrm>
-          <a:prstGeom prst="rect">
-            <a:avLst/>
-          </a:prstGeom>
-          <a:noFill/>
-        </p:spPr>
-        <p:txBody>
-          <a:bodyPr wrap="square" anchor="ctr">
-            <a:spAutoFit/>
-          </a:bodyPr>
-          <a:lstStyle/>
-          <a:p>
-            <a:pPr algn="l"/>
-            <a:r>
-              <a:rPr sz="1600" b="1">
-                <a:solidFill>
-                  <a:srgbClr val="003D2E"/>
-                </a:solidFill>
-                <a:latin typeface="微软雅黑"/>
-                <a:ea typeface="微软雅黑"/>
-              </a:rPr>
-              <a:t>D22–D45</a:t>
-            </a:r>
-          </a:p>
-        </p:txBody>
-      </p:sp>
-      <p:sp>
-        <p:nvSpPr>
-          <p:cNvPr id="19" name="TextBox 18"/>
-          <p:cNvSpPr txBox="1"/>
-          <p:nvPr/>
-        </p:nvSpPr>
-        <p:spPr>
-          <a:xfrm>
-            <a:off x="3017520" y="3749040"/>
-            <a:ext cx="8412480" cy="365760"/>
-          </a:xfrm>
-          <a:prstGeom prst="rect">
-            <a:avLst/>
-          </a:prstGeom>
-          <a:noFill/>
-        </p:spPr>
-        <p:txBody>
-          <a:bodyPr wrap="square" anchor="t">
-            <a:spAutoFit/>
-          </a:bodyPr>
-          <a:lstStyle/>
-          <a:p>
-            <a:pPr algn="l"/>
-            <a:r>
-              <a:rPr sz="1600" b="1">
-                <a:solidFill>
-                  <a:srgbClr val="1A2420"/>
-                </a:solidFill>
-                <a:latin typeface="微软雅黑"/>
-                <a:ea typeface="微软雅黑"/>
-              </a:rPr>
-              <a:t>首场执行</a:t>
-            </a:r>
-          </a:p>
-        </p:txBody>
-      </p:sp>
-      <p:sp>
-        <p:nvSpPr>
-          <p:cNvPr id="20" name="TextBox 19"/>
-          <p:cNvSpPr txBox="1"/>
-          <p:nvPr/>
-        </p:nvSpPr>
-        <p:spPr>
-          <a:xfrm>
-            <a:off x="3017520" y="4114800"/>
-            <a:ext cx="8412480" cy="457200"/>
-          </a:xfrm>
-          <a:prstGeom prst="rect">
-            <a:avLst/>
-          </a:prstGeom>
-          <a:noFill/>
-        </p:spPr>
-        <p:txBody>
-          <a:bodyPr wrap="square" anchor="t">
-            <a:spAutoFit/>
-          </a:bodyPr>
-          <a:lstStyle/>
-          <a:p>
-            <a:pPr algn="l"/>
-            <a:r>
-              <a:rPr sz="1300" b="0">
-                <a:solidFill>
-                  <a:srgbClr val="5B6B64"/>
-                </a:solidFill>
-                <a:latin typeface="微软雅黑"/>
-                <a:ea typeface="微软雅黑"/>
-              </a:rPr>
-              <a:t>完成嘉宾、物料、签到与现场；会后 7 日交付纪要与分级名单。</a:t>
-            </a:r>
-          </a:p>
-        </p:txBody>
-      </p:sp>
-      <p:sp>
-        <p:nvSpPr>
-          <p:cNvPr id="21" name="Rounded Rectangle 20"/>
-          <p:cNvSpPr/>
-          <p:nvPr/>
-        </p:nvSpPr>
-        <p:spPr>
-          <a:xfrm>
-            <a:off x="457200" y="4800600"/>
-            <a:ext cx="11247120" cy="1078992"/>
-          </a:xfrm>
-          <a:prstGeom prst="roundRect">
-            <a:avLst>
-              <a:gd name="adj" fmla="val 8000"/>
-            </a:avLst>
-          </a:prstGeom>
-          <a:solidFill>
-            <a:srgbClr val="FFFFFF"/>
-          </a:solidFill>
-          <a:ln>
-            <a:noFill/>
-          </a:ln>
-          <a:effectLst/>
-        </p:spPr>
-        <p:style>
-          <a:lnRef idx="1">
-            <a:schemeClr val="accent1"/>
-          </a:lnRef>
-          <a:fillRef idx="3">
-            <a:schemeClr val="accent1"/>
-          </a:fillRef>
-          <a:effectRef idx="2">
-            <a:schemeClr val="accent1"/>
-          </a:effectRef>
-          <a:fontRef idx="minor">
-            <a:schemeClr val="lt1"/>
-          </a:fontRef>
-        </p:style>
-        <p:txBody>
-          <a:bodyPr rtlCol="0" anchor="ctr"/>
-          <a:lstStyle/>
-          <a:p>
-            <a:pPr algn="ctr"/>
-          </a:p>
-        </p:txBody>
-      </p:sp>
-      <p:sp>
-        <p:nvSpPr>
-          <p:cNvPr id="22" name="Rectangle 21"/>
-          <p:cNvSpPr/>
-          <p:nvPr/>
-        </p:nvSpPr>
-        <p:spPr>
-          <a:xfrm>
-            <a:off x="457200" y="4800600"/>
-            <a:ext cx="128016" cy="1078992"/>
-          </a:xfrm>
-          <a:prstGeom prst="rect">
-            <a:avLst/>
-          </a:prstGeom>
-          <a:solidFill>
-            <a:srgbClr val="C4A35A"/>
-          </a:solidFill>
-          <a:ln>
-            <a:noFill/>
-          </a:ln>
-          <a:effectLst/>
-        </p:spPr>
-        <p:style>
-          <a:lnRef idx="1">
-            <a:schemeClr val="accent1"/>
-          </a:lnRef>
-          <a:fillRef idx="3">
-            <a:schemeClr val="accent1"/>
-          </a:fillRef>
-          <a:effectRef idx="2">
-            <a:schemeClr val="accent1"/>
-          </a:effectRef>
-          <a:fontRef idx="minor">
-            <a:schemeClr val="lt1"/>
-          </a:fontRef>
-        </p:style>
-        <p:txBody>
-          <a:bodyPr rtlCol="0" anchor="ctr"/>
-          <a:lstStyle/>
-          <a:p>
-            <a:pPr algn="ctr"/>
-          </a:p>
-        </p:txBody>
-      </p:sp>
-      <p:sp>
-        <p:nvSpPr>
-          <p:cNvPr id="23" name="TextBox 22"/>
-          <p:cNvSpPr txBox="1"/>
-          <p:nvPr/>
-        </p:nvSpPr>
-        <p:spPr>
-          <a:xfrm>
-            <a:off x="777240" y="4965192"/>
-            <a:ext cx="2194560" cy="731520"/>
-          </a:xfrm>
-          <a:prstGeom prst="rect">
-            <a:avLst/>
-          </a:prstGeom>
-          <a:noFill/>
-        </p:spPr>
-        <p:txBody>
-          <a:bodyPr wrap="square" anchor="ctr">
-            <a:spAutoFit/>
-          </a:bodyPr>
-          <a:lstStyle/>
-          <a:p>
-            <a:pPr algn="l"/>
-            <a:r>
-              <a:rPr sz="1600" b="1">
-                <a:solidFill>
-                  <a:srgbClr val="003D2E"/>
-                </a:solidFill>
-                <a:latin typeface="微软雅黑"/>
-                <a:ea typeface="微软雅黑"/>
-              </a:rPr>
-              <a:t>D46–D90</a:t>
-            </a:r>
-          </a:p>
-        </p:txBody>
-      </p:sp>
-      <p:sp>
-        <p:nvSpPr>
-          <p:cNvPr id="24" name="TextBox 23"/>
-          <p:cNvSpPr txBox="1"/>
-          <p:nvPr/>
-        </p:nvSpPr>
-        <p:spPr>
-          <a:xfrm>
-            <a:off x="3017520" y="4937760"/>
-            <a:ext cx="8412480" cy="365760"/>
-          </a:xfrm>
-          <a:prstGeom prst="rect">
-            <a:avLst/>
-          </a:prstGeom>
-          <a:noFill/>
-        </p:spPr>
-        <p:txBody>
-          <a:bodyPr wrap="square" anchor="t">
-            <a:spAutoFit/>
-          </a:bodyPr>
-          <a:lstStyle/>
-          <a:p>
-            <a:pPr algn="l"/>
-            <a:r>
-              <a:rPr sz="1600" b="1">
-                <a:solidFill>
-                  <a:srgbClr val="1A2420"/>
-                </a:solidFill>
-                <a:latin typeface="微软雅黑"/>
-                <a:ea typeface="微软雅黑"/>
-              </a:rPr>
-              <a:t>固化复制</a:t>
-            </a:r>
-          </a:p>
-        </p:txBody>
-      </p:sp>
-      <p:sp>
-        <p:nvSpPr>
-          <p:cNvPr id="25" name="TextBox 24"/>
-          <p:cNvSpPr txBox="1"/>
-          <p:nvPr/>
-        </p:nvSpPr>
-        <p:spPr>
-          <a:xfrm>
-            <a:off x="3017520" y="5303520"/>
-            <a:ext cx="8412480" cy="457200"/>
-          </a:xfrm>
-          <a:prstGeom prst="rect">
-            <a:avLst/>
-          </a:prstGeom>
-          <a:noFill/>
-        </p:spPr>
-        <p:txBody>
-          <a:bodyPr wrap="square" anchor="t">
-            <a:spAutoFit/>
-          </a:bodyPr>
-          <a:lstStyle/>
-          <a:p>
-            <a:pPr algn="l"/>
-            <a:r>
-              <a:rPr sz="1300" b="0">
-                <a:solidFill>
-                  <a:srgbClr val="5B6B64"/>
-                </a:solidFill>
-                <a:latin typeface="微软雅黑"/>
-                <a:ea typeface="微软雅黑"/>
-              </a:rPr>
-              <a:t>复盘首场转化，排出后两场议题日历；第二场起另签确认单。</a:t>
-            </a:r>
-          </a:p>
-        </p:txBody>
-      </p:sp>
-      <p:sp>
-        <p:nvSpPr>
-          <p:cNvPr id="26" name="TextBox 25"/>
-          <p:cNvSpPr txBox="1"/>
-          <p:nvPr/>
-        </p:nvSpPr>
-        <p:spPr>
-          <a:xfrm>
-            <a:off x="502920" y="6510528"/>
-            <a:ext cx="11155680" cy="256032"/>
-          </a:xfrm>
-          <a:prstGeom prst="rect">
-            <a:avLst/>
-          </a:prstGeom>
-          <a:noFill/>
-        </p:spPr>
-        <p:txBody>
-          <a:bodyPr wrap="square" anchor="t">
-            <a:spAutoFit/>
-          </a:bodyPr>
-          <a:lstStyle/>
-          <a:p>
-            <a:pPr algn="l"/>
-            <a:r>
-              <a:rPr sz="900" b="0">
-                <a:solidFill>
-                  <a:srgbClr val="5B6B64"/>
-                </a:solidFill>
-                <a:latin typeface="微软雅黑"/>
-                <a:ea typeface="微软雅黑"/>
-              </a:rPr>
-              <a:t>外滩·产业课堂  ·  香港大学经管学院上海中心 × 复旦大学住房政策研究中心、上海市杨浦区科技企业联合会  ·  V1.0 建议稿  ·  2026年9月</a:t>
+              <a:t>外滩·出海课堂  ·  香港大学经管学院上海中心 × 复旦大学住房政策研究中心、上海市杨浦区科技企业联合会  ·  V1.1 建议稿  ·  2026年9月</a:t>
             </a:r>
           </a:p>
         </p:txBody>
@@ -11409,7 +12650,7 @@
                 <a:latin typeface="微软雅黑"/>
                 <a:ea typeface="微软雅黑"/>
               </a:rPr>
-              <a:t>首场怎么开（主题可改，结构不改）</a:t>
+              <a:t>90 天：外滩首场 + 一次主任体验</a:t>
             </a:r>
           </a:p>
         </p:txBody>
@@ -11445,7 +12686,7 @@
                 <a:latin typeface="微软雅黑"/>
                 <a:ea typeface="微软雅黑"/>
               </a:rPr>
-              <a:t>08/12</a:t>
+              <a:t>08/13</a:t>
             </a:r>
           </a:p>
         </p:txBody>
@@ -11458,8 +12699,8 @@
         </p:nvSpPr>
         <p:spPr>
           <a:xfrm>
-            <a:off x="457200" y="1188720"/>
-            <a:ext cx="5029200" cy="5029200"/>
+            <a:off x="457200" y="1234440"/>
+            <a:ext cx="11247120" cy="1078992"/>
           </a:xfrm>
           <a:prstGeom prst="roundRect">
             <a:avLst>
@@ -11498,346 +12739,20 @@
       </p:sp>
       <p:sp>
         <p:nvSpPr>
-          <p:cNvPr id="7" name="TextBox 6"/>
-          <p:cNvSpPr txBox="1"/>
-          <p:nvPr/>
-        </p:nvSpPr>
-        <p:spPr>
-          <a:xfrm>
-            <a:off x="685800" y="1371600"/>
-            <a:ext cx="4663440" cy="365760"/>
-          </a:xfrm>
-          <a:prstGeom prst="rect">
-            <a:avLst/>
-          </a:prstGeom>
-          <a:noFill/>
-        </p:spPr>
-        <p:txBody>
-          <a:bodyPr wrap="square" anchor="t">
-            <a:spAutoFit/>
-          </a:bodyPr>
-          <a:lstStyle/>
-          <a:p>
-            <a:pPr algn="l"/>
-            <a:r>
-              <a:rPr sz="1600" b="1">
-                <a:solidFill>
-                  <a:srgbClr val="C4A35A"/>
-                </a:solidFill>
-                <a:latin typeface="微软雅黑"/>
-                <a:ea typeface="微软雅黑"/>
-              </a:rPr>
-              <a:t>首场建议主题（可改）</a:t>
-            </a:r>
-          </a:p>
-        </p:txBody>
-      </p:sp>
-      <p:sp>
-        <p:nvSpPr>
-          <p:cNvPr id="8" name="TextBox 7"/>
-          <p:cNvSpPr txBox="1"/>
-          <p:nvPr/>
-        </p:nvSpPr>
-        <p:spPr>
-          <a:xfrm>
-            <a:off x="685800" y="1874519"/>
-            <a:ext cx="4663440" cy="274320"/>
-          </a:xfrm>
-          <a:prstGeom prst="rect">
-            <a:avLst/>
-          </a:prstGeom>
-          <a:noFill/>
-        </p:spPr>
-        <p:txBody>
-          <a:bodyPr wrap="square" anchor="t">
-            <a:spAutoFit/>
-          </a:bodyPr>
-          <a:lstStyle/>
-          <a:p>
-            <a:pPr algn="l"/>
-            <a:r>
-              <a:rPr sz="1200" b="1">
-                <a:solidFill>
-                  <a:srgbClr val="003D2E"/>
-                </a:solidFill>
-                <a:latin typeface="微软雅黑"/>
-                <a:ea typeface="微软雅黑"/>
-              </a:rPr>
-              <a:t>主题</a:t>
-            </a:r>
-          </a:p>
-        </p:txBody>
-      </p:sp>
-      <p:sp>
-        <p:nvSpPr>
-          <p:cNvPr id="9" name="TextBox 8"/>
-          <p:cNvSpPr txBox="1"/>
-          <p:nvPr/>
-        </p:nvSpPr>
-        <p:spPr>
-          <a:xfrm>
-            <a:off x="685800" y="2130552"/>
-            <a:ext cx="4663440" cy="640080"/>
-          </a:xfrm>
-          <a:prstGeom prst="rect">
-            <a:avLst/>
-          </a:prstGeom>
-          <a:noFill/>
-        </p:spPr>
-        <p:txBody>
-          <a:bodyPr wrap="square" anchor="t">
-            <a:spAutoFit/>
-          </a:bodyPr>
-          <a:lstStyle/>
-          <a:p>
-            <a:pPr algn="l"/>
-            <a:r>
-              <a:rPr sz="1300" b="0">
-                <a:solidFill>
-                  <a:srgbClr val="1A2420"/>
-                </a:solidFill>
-                <a:latin typeface="微软雅黑"/>
-                <a:ea typeface="微软雅黑"/>
-              </a:rPr>
-              <a:t>产业决策者的全球能力：AI、跨境与城市机会</a:t>
-            </a:r>
-          </a:p>
-        </p:txBody>
-      </p:sp>
-      <p:sp>
-        <p:nvSpPr>
-          <p:cNvPr id="10" name="TextBox 9"/>
-          <p:cNvSpPr txBox="1"/>
-          <p:nvPr/>
-        </p:nvSpPr>
-        <p:spPr>
-          <a:xfrm>
-            <a:off x="685800" y="2834639"/>
-            <a:ext cx="4663440" cy="274320"/>
-          </a:xfrm>
-          <a:prstGeom prst="rect">
-            <a:avLst/>
-          </a:prstGeom>
-          <a:noFill/>
-        </p:spPr>
-        <p:txBody>
-          <a:bodyPr wrap="square" anchor="t">
-            <a:spAutoFit/>
-          </a:bodyPr>
-          <a:lstStyle/>
-          <a:p>
-            <a:pPr algn="l"/>
-            <a:r>
-              <a:rPr sz="1200" b="1">
-                <a:solidFill>
-                  <a:srgbClr val="003D2E"/>
-                </a:solidFill>
-                <a:latin typeface="微软雅黑"/>
-                <a:ea typeface="微软雅黑"/>
-              </a:rPr>
-              <a:t>时间</a:t>
-            </a:r>
-          </a:p>
-        </p:txBody>
-      </p:sp>
-      <p:sp>
-        <p:nvSpPr>
-          <p:cNvPr id="11" name="TextBox 10"/>
-          <p:cNvSpPr txBox="1"/>
-          <p:nvPr/>
-        </p:nvSpPr>
-        <p:spPr>
-          <a:xfrm>
-            <a:off x="685800" y="3090672"/>
-            <a:ext cx="4663440" cy="640080"/>
-          </a:xfrm>
-          <a:prstGeom prst="rect">
-            <a:avLst/>
-          </a:prstGeom>
-          <a:noFill/>
-        </p:spPr>
-        <p:txBody>
-          <a:bodyPr wrap="square" anchor="t">
-            <a:spAutoFit/>
-          </a:bodyPr>
-          <a:lstStyle/>
-          <a:p>
-            <a:pPr algn="l"/>
-            <a:r>
-              <a:rPr sz="1300" b="0">
-                <a:solidFill>
-                  <a:srgbClr val="1A2420"/>
-                </a:solidFill>
-                <a:latin typeface="微软雅黑"/>
-                <a:ea typeface="微软雅黑"/>
-              </a:rPr>
-              <a:t>签约后 30–45 日内，工作日下午 14:00–18:00</a:t>
-            </a:r>
-          </a:p>
-        </p:txBody>
-      </p:sp>
-      <p:sp>
-        <p:nvSpPr>
-          <p:cNvPr id="12" name="TextBox 11"/>
-          <p:cNvSpPr txBox="1"/>
-          <p:nvPr/>
-        </p:nvSpPr>
-        <p:spPr>
-          <a:xfrm>
-            <a:off x="685800" y="3794759"/>
-            <a:ext cx="4663440" cy="274320"/>
-          </a:xfrm>
-          <a:prstGeom prst="rect">
-            <a:avLst/>
-          </a:prstGeom>
-          <a:noFill/>
-        </p:spPr>
-        <p:txBody>
-          <a:bodyPr wrap="square" anchor="t">
-            <a:spAutoFit/>
-          </a:bodyPr>
-          <a:lstStyle/>
-          <a:p>
-            <a:pPr algn="l"/>
-            <a:r>
-              <a:rPr sz="1200" b="1">
-                <a:solidFill>
-                  <a:srgbClr val="003D2E"/>
-                </a:solidFill>
-                <a:latin typeface="微软雅黑"/>
-                <a:ea typeface="微软雅黑"/>
-              </a:rPr>
-              <a:t>地点</a:t>
-            </a:r>
-          </a:p>
-        </p:txBody>
-      </p:sp>
-      <p:sp>
-        <p:nvSpPr>
-          <p:cNvPr id="13" name="TextBox 12"/>
-          <p:cNvSpPr txBox="1"/>
-          <p:nvPr/>
-        </p:nvSpPr>
-        <p:spPr>
-          <a:xfrm>
-            <a:off x="685800" y="4050791"/>
-            <a:ext cx="4663440" cy="640080"/>
-          </a:xfrm>
-          <a:prstGeom prst="rect">
-            <a:avLst/>
-          </a:prstGeom>
-          <a:noFill/>
-        </p:spPr>
-        <p:txBody>
-          <a:bodyPr wrap="square" anchor="t">
-            <a:spAutoFit/>
-          </a:bodyPr>
-          <a:lstStyle/>
-          <a:p>
-            <a:pPr algn="l"/>
-            <a:r>
-              <a:rPr sz="1300" b="0">
-                <a:solidFill>
-                  <a:srgbClr val="1A2420"/>
-                </a:solidFill>
-                <a:latin typeface="微软雅黑"/>
-                <a:ea typeface="微软雅黑"/>
-              </a:rPr>
-              <a:t>港大经管学院上海中心（外滩 SOHO F 栋）</a:t>
-            </a:r>
-          </a:p>
-        </p:txBody>
-      </p:sp>
-      <p:sp>
-        <p:nvSpPr>
-          <p:cNvPr id="14" name="TextBox 13"/>
-          <p:cNvSpPr txBox="1"/>
-          <p:nvPr/>
-        </p:nvSpPr>
-        <p:spPr>
-          <a:xfrm>
-            <a:off x="685800" y="4754879"/>
-            <a:ext cx="4663440" cy="274320"/>
-          </a:xfrm>
-          <a:prstGeom prst="rect">
-            <a:avLst/>
-          </a:prstGeom>
-          <a:noFill/>
-        </p:spPr>
-        <p:txBody>
-          <a:bodyPr wrap="square" anchor="t">
-            <a:spAutoFit/>
-          </a:bodyPr>
-          <a:lstStyle/>
-          <a:p>
-            <a:pPr algn="l"/>
-            <a:r>
-              <a:rPr sz="1200" b="1">
-                <a:solidFill>
-                  <a:srgbClr val="003D2E"/>
-                </a:solidFill>
-                <a:latin typeface="微软雅黑"/>
-                <a:ea typeface="微软雅黑"/>
-              </a:rPr>
-              <a:t>人群</a:t>
-            </a:r>
-          </a:p>
-        </p:txBody>
-      </p:sp>
-      <p:sp>
-        <p:nvSpPr>
-          <p:cNvPr id="15" name="TextBox 14"/>
-          <p:cNvSpPr txBox="1"/>
-          <p:nvPr/>
-        </p:nvSpPr>
-        <p:spPr>
-          <a:xfrm>
-            <a:off x="685800" y="5010912"/>
-            <a:ext cx="4663440" cy="640080"/>
-          </a:xfrm>
-          <a:prstGeom prst="rect">
-            <a:avLst/>
-          </a:prstGeom>
-          <a:noFill/>
-        </p:spPr>
-        <p:txBody>
-          <a:bodyPr wrap="square" anchor="t">
-            <a:spAutoFit/>
-          </a:bodyPr>
-          <a:lstStyle/>
-          <a:p>
-            <a:pPr algn="l"/>
-            <a:r>
-              <a:rPr sz="1300" b="0">
-                <a:solidFill>
-                  <a:srgbClr val="1A2420"/>
-                </a:solidFill>
-                <a:latin typeface="微软雅黑"/>
-                <a:ea typeface="微软雅黑"/>
-              </a:rPr>
-              <a:t>科企联会员企业主/高管为主，辅以不动产与硬科技决策者</a:t>
-            </a:r>
-          </a:p>
-        </p:txBody>
-      </p:sp>
-      <p:sp>
-        <p:nvSpPr>
-          <p:cNvPr id="16" name="Rounded Rectangle 15"/>
+          <p:cNvPr id="7" name="Rectangle 6"/>
           <p:cNvSpPr/>
           <p:nvPr/>
         </p:nvSpPr>
         <p:spPr>
           <a:xfrm>
-            <a:off x="5669280" y="1188720"/>
-            <a:ext cx="6035040" cy="5029200"/>
-          </a:xfrm>
-          <a:prstGeom prst="roundRect">
-            <a:avLst>
-              <a:gd name="adj" fmla="val 8000"/>
-            </a:avLst>
+            <a:off x="457200" y="1234440"/>
+            <a:ext cx="128016" cy="1078992"/>
+          </a:xfrm>
+          <a:prstGeom prst="rect">
+            <a:avLst/>
           </a:prstGeom>
           <a:solidFill>
-            <a:srgbClr val="F7F4EC"/>
+            <a:srgbClr val="C4A35A"/>
           </a:solidFill>
           <a:ln>
             <a:noFill/>
@@ -11868,14 +12783,50 @@
       </p:sp>
       <p:sp>
         <p:nvSpPr>
-          <p:cNvPr id="17" name="TextBox 16"/>
-          <p:cNvSpPr txBox="1"/>
-          <p:nvPr/>
-        </p:nvSpPr>
-        <p:spPr>
-          <a:xfrm>
-            <a:off x="5897880" y="1371600"/>
-            <a:ext cx="5669280" cy="365760"/>
+          <p:cNvPr id="8" name="TextBox 7"/>
+          <p:cNvSpPr txBox="1"/>
+          <p:nvPr/>
+        </p:nvSpPr>
+        <p:spPr>
+          <a:xfrm>
+            <a:off x="777240" y="1399032"/>
+            <a:ext cx="2194560" cy="731520"/>
+          </a:xfrm>
+          <a:prstGeom prst="rect">
+            <a:avLst/>
+          </a:prstGeom>
+          <a:noFill/>
+        </p:spPr>
+        <p:txBody>
+          <a:bodyPr wrap="square" anchor="ctr">
+            <a:spAutoFit/>
+          </a:bodyPr>
+          <a:lstStyle/>
+          <a:p>
+            <a:pPr algn="l"/>
+            <a:r>
+              <a:rPr sz="1600" b="1">
+                <a:solidFill>
+                  <a:srgbClr val="003D2E"/>
+                </a:solidFill>
+                <a:latin typeface="微软雅黑"/>
+                <a:ea typeface="微软雅黑"/>
+              </a:rPr>
+              <a:t>D0–D7</a:t>
+            </a:r>
+          </a:p>
+        </p:txBody>
+      </p:sp>
+      <p:sp>
+        <p:nvSpPr>
+          <p:cNvPr id="9" name="TextBox 8"/>
+          <p:cNvSpPr txBox="1"/>
+          <p:nvPr/>
+        </p:nvSpPr>
+        <p:spPr>
+          <a:xfrm>
+            <a:off x="3017520" y="1371600"/>
+            <a:ext cx="8412480" cy="365760"/>
           </a:xfrm>
           <a:prstGeom prst="rect">
             <a:avLst/>
@@ -11892,13 +12843,337 @@
             <a:r>
               <a:rPr sz="1600" b="1">
                 <a:solidFill>
+                  <a:srgbClr val="1A2420"/>
+                </a:solidFill>
+                <a:latin typeface="微软雅黑"/>
+                <a:ea typeface="微软雅黑"/>
+              </a:rPr>
+              <a:t>签约与资料</a:t>
+            </a:r>
+          </a:p>
+        </p:txBody>
+      </p:sp>
+      <p:sp>
+        <p:nvSpPr>
+          <p:cNvPr id="10" name="TextBox 9"/>
+          <p:cNvSpPr txBox="1"/>
+          <p:nvPr/>
+        </p:nvSpPr>
+        <p:spPr>
+          <a:xfrm>
+            <a:off x="3017520" y="1737360"/>
+            <a:ext cx="8412480" cy="457200"/>
+          </a:xfrm>
+          <a:prstGeom prst="rect">
+            <a:avLst/>
+          </a:prstGeom>
+          <a:noFill/>
+        </p:spPr>
+        <p:txBody>
+          <a:bodyPr wrap="square" anchor="t">
+            <a:spAutoFit/>
+          </a:bodyPr>
+          <a:lstStyle/>
+          <a:p>
+            <a:pPr algn="l"/>
+            <a:r>
+              <a:rPr sz="1300" b="0">
+                <a:solidFill>
+                  <a:srgbClr val="5B6B64"/>
+                </a:solidFill>
+                <a:latin typeface="微软雅黑"/>
+                <a:ea typeface="微软雅黑"/>
+              </a:rPr>
+              <a:t>协议签署、前期费用到账；对方发出海课介绍；确认主任可出席窗口与首场档期。</a:t>
+            </a:r>
+          </a:p>
+        </p:txBody>
+      </p:sp>
+      <p:sp>
+        <p:nvSpPr>
+          <p:cNvPr id="11" name="Rounded Rectangle 10"/>
+          <p:cNvSpPr/>
+          <p:nvPr/>
+        </p:nvSpPr>
+        <p:spPr>
+          <a:xfrm>
+            <a:off x="457200" y="2423160"/>
+            <a:ext cx="11247120" cy="1078992"/>
+          </a:xfrm>
+          <a:prstGeom prst="roundRect">
+            <a:avLst>
+              <a:gd name="adj" fmla="val 8000"/>
+            </a:avLst>
+          </a:prstGeom>
+          <a:solidFill>
+            <a:srgbClr val="FFFFFF"/>
+          </a:solidFill>
+          <a:ln>
+            <a:noFill/>
+          </a:ln>
+          <a:effectLst/>
+        </p:spPr>
+        <p:style>
+          <a:lnRef idx="1">
+            <a:schemeClr val="accent1"/>
+          </a:lnRef>
+          <a:fillRef idx="3">
+            <a:schemeClr val="accent1"/>
+          </a:fillRef>
+          <a:effectRef idx="2">
+            <a:schemeClr val="accent1"/>
+          </a:effectRef>
+          <a:fontRef idx="minor">
+            <a:schemeClr val="lt1"/>
+          </a:fontRef>
+        </p:style>
+        <p:txBody>
+          <a:bodyPr rtlCol="0" anchor="ctr"/>
+          <a:lstStyle/>
+          <a:p>
+            <a:pPr algn="ctr"/>
+          </a:p>
+        </p:txBody>
+      </p:sp>
+      <p:sp>
+        <p:nvSpPr>
+          <p:cNvPr id="12" name="Rectangle 11"/>
+          <p:cNvSpPr/>
+          <p:nvPr/>
+        </p:nvSpPr>
+        <p:spPr>
+          <a:xfrm>
+            <a:off x="457200" y="2423160"/>
+            <a:ext cx="128016" cy="1078992"/>
+          </a:xfrm>
+          <a:prstGeom prst="rect">
+            <a:avLst/>
+          </a:prstGeom>
+          <a:solidFill>
+            <a:srgbClr val="C4A35A"/>
+          </a:solidFill>
+          <a:ln>
+            <a:noFill/>
+          </a:ln>
+          <a:effectLst/>
+        </p:spPr>
+        <p:style>
+          <a:lnRef idx="1">
+            <a:schemeClr val="accent1"/>
+          </a:lnRef>
+          <a:fillRef idx="3">
+            <a:schemeClr val="accent1"/>
+          </a:fillRef>
+          <a:effectRef idx="2">
+            <a:schemeClr val="accent1"/>
+          </a:effectRef>
+          <a:fontRef idx="minor">
+            <a:schemeClr val="lt1"/>
+          </a:fontRef>
+        </p:style>
+        <p:txBody>
+          <a:bodyPr rtlCol="0" anchor="ctr"/>
+          <a:lstStyle/>
+          <a:p>
+            <a:pPr algn="ctr"/>
+          </a:p>
+        </p:txBody>
+      </p:sp>
+      <p:sp>
+        <p:nvSpPr>
+          <p:cNvPr id="13" name="TextBox 12"/>
+          <p:cNvSpPr txBox="1"/>
+          <p:nvPr/>
+        </p:nvSpPr>
+        <p:spPr>
+          <a:xfrm>
+            <a:off x="777240" y="2587752"/>
+            <a:ext cx="2194560" cy="731520"/>
+          </a:xfrm>
+          <a:prstGeom prst="rect">
+            <a:avLst/>
+          </a:prstGeom>
+          <a:noFill/>
+        </p:spPr>
+        <p:txBody>
+          <a:bodyPr wrap="square" anchor="ctr">
+            <a:spAutoFit/>
+          </a:bodyPr>
+          <a:lstStyle/>
+          <a:p>
+            <a:pPr algn="l"/>
+            <a:r>
+              <a:rPr sz="1600" b="1">
+                <a:solidFill>
                   <a:srgbClr val="003D2E"/>
                 </a:solidFill>
                 <a:latin typeface="微软雅黑"/>
                 <a:ea typeface="微软雅黑"/>
               </a:rPr>
-              <a:t>半日议程</a:t>
-            </a:r>
+              <a:t>D8–D21</a:t>
+            </a:r>
+          </a:p>
+        </p:txBody>
+      </p:sp>
+      <p:sp>
+        <p:nvSpPr>
+          <p:cNvPr id="14" name="TextBox 13"/>
+          <p:cNvSpPr txBox="1"/>
+          <p:nvPr/>
+        </p:nvSpPr>
+        <p:spPr>
+          <a:xfrm>
+            <a:off x="3017520" y="2560320"/>
+            <a:ext cx="8412480" cy="365760"/>
+          </a:xfrm>
+          <a:prstGeom prst="rect">
+            <a:avLst/>
+          </a:prstGeom>
+          <a:noFill/>
+        </p:spPr>
+        <p:txBody>
+          <a:bodyPr wrap="square" anchor="t">
+            <a:spAutoFit/>
+          </a:bodyPr>
+          <a:lstStyle/>
+          <a:p>
+            <a:pPr algn="l"/>
+            <a:r>
+              <a:rPr sz="1600" b="1">
+                <a:solidFill>
+                  <a:srgbClr val="1A2420"/>
+                </a:solidFill>
+                <a:latin typeface="微软雅黑"/>
+                <a:ea typeface="微软雅黑"/>
+              </a:rPr>
+              <a:t>画像与名单</a:t>
+            </a:r>
+          </a:p>
+        </p:txBody>
+      </p:sp>
+      <p:sp>
+        <p:nvSpPr>
+          <p:cNvPr id="15" name="TextBox 14"/>
+          <p:cNvSpPr txBox="1"/>
+          <p:nvPr/>
+        </p:nvSpPr>
+        <p:spPr>
+          <a:xfrm>
+            <a:off x="3017520" y="2926080"/>
+            <a:ext cx="8412480" cy="457200"/>
+          </a:xfrm>
+          <a:prstGeom prst="rect">
+            <a:avLst/>
+          </a:prstGeom>
+          <a:noFill/>
+        </p:spPr>
+        <p:txBody>
+          <a:bodyPr wrap="square" anchor="t">
+            <a:spAutoFit/>
+          </a:bodyPr>
+          <a:lstStyle/>
+          <a:p>
+            <a:pPr algn="l"/>
+            <a:r>
+              <a:rPr sz="1300" b="0">
+                <a:solidFill>
+                  <a:srgbClr val="5B6B64"/>
+                </a:solidFill>
+                <a:latin typeface="微软雅黑"/>
+                <a:ea typeface="微软雅黑"/>
+              </a:rPr>
+              <a:t>出海客群画像、邀约话术、首批 80 人定向名单初稿，双方书面确认。</a:t>
+            </a:r>
+          </a:p>
+        </p:txBody>
+      </p:sp>
+      <p:sp>
+        <p:nvSpPr>
+          <p:cNvPr id="16" name="Rounded Rectangle 15"/>
+          <p:cNvSpPr/>
+          <p:nvPr/>
+        </p:nvSpPr>
+        <p:spPr>
+          <a:xfrm>
+            <a:off x="457200" y="3611880"/>
+            <a:ext cx="11247120" cy="1078992"/>
+          </a:xfrm>
+          <a:prstGeom prst="roundRect">
+            <a:avLst>
+              <a:gd name="adj" fmla="val 8000"/>
+            </a:avLst>
+          </a:prstGeom>
+          <a:solidFill>
+            <a:srgbClr val="FFFFFF"/>
+          </a:solidFill>
+          <a:ln>
+            <a:noFill/>
+          </a:ln>
+          <a:effectLst/>
+        </p:spPr>
+        <p:style>
+          <a:lnRef idx="1">
+            <a:schemeClr val="accent1"/>
+          </a:lnRef>
+          <a:fillRef idx="3">
+            <a:schemeClr val="accent1"/>
+          </a:fillRef>
+          <a:effectRef idx="2">
+            <a:schemeClr val="accent1"/>
+          </a:effectRef>
+          <a:fontRef idx="minor">
+            <a:schemeClr val="lt1"/>
+          </a:fontRef>
+        </p:style>
+        <p:txBody>
+          <a:bodyPr rtlCol="0" anchor="ctr"/>
+          <a:lstStyle/>
+          <a:p>
+            <a:pPr algn="ctr"/>
+          </a:p>
+        </p:txBody>
+      </p:sp>
+      <p:sp>
+        <p:nvSpPr>
+          <p:cNvPr id="17" name="Rectangle 16"/>
+          <p:cNvSpPr/>
+          <p:nvPr/>
+        </p:nvSpPr>
+        <p:spPr>
+          <a:xfrm>
+            <a:off x="457200" y="3611880"/>
+            <a:ext cx="128016" cy="1078992"/>
+          </a:xfrm>
+          <a:prstGeom prst="rect">
+            <a:avLst/>
+          </a:prstGeom>
+          <a:solidFill>
+            <a:srgbClr val="C4A35A"/>
+          </a:solidFill>
+          <a:ln>
+            <a:noFill/>
+          </a:ln>
+          <a:effectLst/>
+        </p:spPr>
+        <p:style>
+          <a:lnRef idx="1">
+            <a:schemeClr val="accent1"/>
+          </a:lnRef>
+          <a:fillRef idx="3">
+            <a:schemeClr val="accent1"/>
+          </a:fillRef>
+          <a:effectRef idx="2">
+            <a:schemeClr val="accent1"/>
+          </a:effectRef>
+          <a:fontRef idx="minor">
+            <a:schemeClr val="lt1"/>
+          </a:fontRef>
+        </p:style>
+        <p:txBody>
+          <a:bodyPr rtlCol="0" anchor="ctr"/>
+          <a:lstStyle/>
+          <a:p>
+            <a:pPr algn="ctr"/>
           </a:p>
         </p:txBody>
       </p:sp>
@@ -11910,234 +13185,307 @@
         </p:nvSpPr>
         <p:spPr>
           <a:xfrm>
-            <a:off x="5897880" y="1828800"/>
-            <a:ext cx="5623560" cy="4114800"/>
-          </a:xfrm>
-          <a:prstGeom prst="rect">
-            <a:avLst/>
-          </a:prstGeom>
-          <a:noFill/>
-        </p:spPr>
-        <p:txBody>
-          <a:bodyPr wrap="square">
-            <a:spAutoFit/>
-          </a:bodyPr>
-          <a:lstStyle/>
-          <a:p>
-            <a:pPr>
-              <a:lnSpc>
-                <a:spcPct val="115000"/>
-              </a:lnSpc>
-              <a:spcAft>
-                <a:spcPts val="600"/>
-              </a:spcAft>
-            </a:pPr>
-            <a:r>
-              <a:rPr sz="1100" b="1">
-                <a:solidFill>
-                  <a:srgbClr val="C4A35A"/>
-                </a:solidFill>
-                <a:latin typeface="微软雅黑"/>
-                <a:ea typeface="微软雅黑"/>
-              </a:rPr>
-              <a:t>●  </a:t>
-            </a:r>
+            <a:off x="777240" y="3776472"/>
+            <a:ext cx="2194560" cy="731520"/>
+          </a:xfrm>
+          <a:prstGeom prst="rect">
+            <a:avLst/>
+          </a:prstGeom>
+          <a:noFill/>
+        </p:spPr>
+        <p:txBody>
+          <a:bodyPr wrap="square" anchor="ctr">
+            <a:spAutoFit/>
+          </a:bodyPr>
+          <a:lstStyle/>
+          <a:p>
+            <a:pPr algn="l"/>
+            <a:r>
+              <a:rPr sz="1600" b="1">
+                <a:solidFill>
+                  <a:srgbClr val="003D2E"/>
+                </a:solidFill>
+                <a:latin typeface="微软雅黑"/>
+                <a:ea typeface="微软雅黑"/>
+              </a:rPr>
+              <a:t>D22–D45</a:t>
+            </a:r>
+          </a:p>
+        </p:txBody>
+      </p:sp>
+      <p:sp>
+        <p:nvSpPr>
+          <p:cNvPr id="19" name="TextBox 18"/>
+          <p:cNvSpPr txBox="1"/>
+          <p:nvPr/>
+        </p:nvSpPr>
+        <p:spPr>
+          <a:xfrm>
+            <a:off x="3017520" y="3749040"/>
+            <a:ext cx="8412480" cy="365760"/>
+          </a:xfrm>
+          <a:prstGeom prst="rect">
+            <a:avLst/>
+          </a:prstGeom>
+          <a:noFill/>
+        </p:spPr>
+        <p:txBody>
+          <a:bodyPr wrap="square" anchor="t">
+            <a:spAutoFit/>
+          </a:bodyPr>
+          <a:lstStyle/>
+          <a:p>
+            <a:pPr algn="l"/>
+            <a:r>
+              <a:rPr sz="1600" b="1">
+                <a:solidFill>
+                  <a:srgbClr val="1A2420"/>
+                </a:solidFill>
+                <a:latin typeface="微软雅黑"/>
+                <a:ea typeface="微软雅黑"/>
+              </a:rPr>
+              <a:t>两场落地</a:t>
+            </a:r>
+          </a:p>
+        </p:txBody>
+      </p:sp>
+      <p:sp>
+        <p:nvSpPr>
+          <p:cNvPr id="20" name="TextBox 19"/>
+          <p:cNvSpPr txBox="1"/>
+          <p:nvPr/>
+        </p:nvSpPr>
+        <p:spPr>
+          <a:xfrm>
+            <a:off x="3017520" y="4114800"/>
+            <a:ext cx="8412480" cy="457200"/>
+          </a:xfrm>
+          <a:prstGeom prst="rect">
+            <a:avLst/>
+          </a:prstGeom>
+          <a:noFill/>
+        </p:spPr>
+        <p:txBody>
+          <a:bodyPr wrap="square" anchor="t">
+            <a:spAutoFit/>
+          </a:bodyPr>
+          <a:lstStyle/>
+          <a:p>
+            <a:pPr algn="l"/>
             <a:r>
               <a:rPr sz="1300" b="0">
                 <a:solidFill>
+                  <a:srgbClr val="5B6B64"/>
+                </a:solidFill>
+                <a:latin typeface="微软雅黑"/>
+                <a:ea typeface="微软雅黑"/>
+              </a:rPr>
+              <a:t>外滩出海闭门课执行；完成一次主任体验邀约（出席以其公务为准）。</a:t>
+            </a:r>
+          </a:p>
+        </p:txBody>
+      </p:sp>
+      <p:sp>
+        <p:nvSpPr>
+          <p:cNvPr id="21" name="Rounded Rectangle 20"/>
+          <p:cNvSpPr/>
+          <p:nvPr/>
+        </p:nvSpPr>
+        <p:spPr>
+          <a:xfrm>
+            <a:off x="457200" y="4800600"/>
+            <a:ext cx="11247120" cy="1078992"/>
+          </a:xfrm>
+          <a:prstGeom prst="roundRect">
+            <a:avLst>
+              <a:gd name="adj" fmla="val 8000"/>
+            </a:avLst>
+          </a:prstGeom>
+          <a:solidFill>
+            <a:srgbClr val="FFFFFF"/>
+          </a:solidFill>
+          <a:ln>
+            <a:noFill/>
+          </a:ln>
+          <a:effectLst/>
+        </p:spPr>
+        <p:style>
+          <a:lnRef idx="1">
+            <a:schemeClr val="accent1"/>
+          </a:lnRef>
+          <a:fillRef idx="3">
+            <a:schemeClr val="accent1"/>
+          </a:fillRef>
+          <a:effectRef idx="2">
+            <a:schemeClr val="accent1"/>
+          </a:effectRef>
+          <a:fontRef idx="minor">
+            <a:schemeClr val="lt1"/>
+          </a:fontRef>
+        </p:style>
+        <p:txBody>
+          <a:bodyPr rtlCol="0" anchor="ctr"/>
+          <a:lstStyle/>
+          <a:p>
+            <a:pPr algn="ctr"/>
+          </a:p>
+        </p:txBody>
+      </p:sp>
+      <p:sp>
+        <p:nvSpPr>
+          <p:cNvPr id="22" name="Rectangle 21"/>
+          <p:cNvSpPr/>
+          <p:nvPr/>
+        </p:nvSpPr>
+        <p:spPr>
+          <a:xfrm>
+            <a:off x="457200" y="4800600"/>
+            <a:ext cx="128016" cy="1078992"/>
+          </a:xfrm>
+          <a:prstGeom prst="rect">
+            <a:avLst/>
+          </a:prstGeom>
+          <a:solidFill>
+            <a:srgbClr val="C4A35A"/>
+          </a:solidFill>
+          <a:ln>
+            <a:noFill/>
+          </a:ln>
+          <a:effectLst/>
+        </p:spPr>
+        <p:style>
+          <a:lnRef idx="1">
+            <a:schemeClr val="accent1"/>
+          </a:lnRef>
+          <a:fillRef idx="3">
+            <a:schemeClr val="accent1"/>
+          </a:fillRef>
+          <a:effectRef idx="2">
+            <a:schemeClr val="accent1"/>
+          </a:effectRef>
+          <a:fontRef idx="minor">
+            <a:schemeClr val="lt1"/>
+          </a:fontRef>
+        </p:style>
+        <p:txBody>
+          <a:bodyPr rtlCol="0" anchor="ctr"/>
+          <a:lstStyle/>
+          <a:p>
+            <a:pPr algn="ctr"/>
+          </a:p>
+        </p:txBody>
+      </p:sp>
+      <p:sp>
+        <p:nvSpPr>
+          <p:cNvPr id="23" name="TextBox 22"/>
+          <p:cNvSpPr txBox="1"/>
+          <p:nvPr/>
+        </p:nvSpPr>
+        <p:spPr>
+          <a:xfrm>
+            <a:off x="777240" y="4965192"/>
+            <a:ext cx="2194560" cy="731520"/>
+          </a:xfrm>
+          <a:prstGeom prst="rect">
+            <a:avLst/>
+          </a:prstGeom>
+          <a:noFill/>
+        </p:spPr>
+        <p:txBody>
+          <a:bodyPr wrap="square" anchor="ctr">
+            <a:spAutoFit/>
+          </a:bodyPr>
+          <a:lstStyle/>
+          <a:p>
+            <a:pPr algn="l"/>
+            <a:r>
+              <a:rPr sz="1600" b="1">
+                <a:solidFill>
+                  <a:srgbClr val="003D2E"/>
+                </a:solidFill>
+                <a:latin typeface="微软雅黑"/>
+                <a:ea typeface="微软雅黑"/>
+              </a:rPr>
+              <a:t>D46–D90</a:t>
+            </a:r>
+          </a:p>
+        </p:txBody>
+      </p:sp>
+      <p:sp>
+        <p:nvSpPr>
+          <p:cNvPr id="24" name="TextBox 23"/>
+          <p:cNvSpPr txBox="1"/>
+          <p:nvPr/>
+        </p:nvSpPr>
+        <p:spPr>
+          <a:xfrm>
+            <a:off x="3017520" y="4937760"/>
+            <a:ext cx="8412480" cy="365760"/>
+          </a:xfrm>
+          <a:prstGeom prst="rect">
+            <a:avLst/>
+          </a:prstGeom>
+          <a:noFill/>
+        </p:spPr>
+        <p:txBody>
+          <a:bodyPr wrap="square" anchor="t">
+            <a:spAutoFit/>
+          </a:bodyPr>
+          <a:lstStyle/>
+          <a:p>
+            <a:pPr algn="l"/>
+            <a:r>
+              <a:rPr sz="1600" b="1">
+                <a:solidFill>
                   <a:srgbClr val="1A2420"/>
                 </a:solidFill>
                 <a:latin typeface="微软雅黑"/>
                 <a:ea typeface="微软雅黑"/>
               </a:rPr>
-              <a:t>14:00–14:20  签到、合影、中心空间简介</a:t>
-            </a:r>
-          </a:p>
-          <a:p>
-            <a:pPr>
-              <a:lnSpc>
-                <a:spcPct val="115000"/>
-              </a:lnSpc>
-              <a:spcAft>
-                <a:spcPts val="600"/>
-              </a:spcAft>
-            </a:pPr>
-            <a:r>
-              <a:rPr sz="1100" b="1">
-                <a:solidFill>
-                  <a:srgbClr val="C4A35A"/>
-                </a:solidFill>
-                <a:latin typeface="微软雅黑"/>
-                <a:ea typeface="微软雅黑"/>
-              </a:rPr>
-              <a:t>●  </a:t>
-            </a:r>
+              <a:t>固化与备忘</a:t>
+            </a:r>
+          </a:p>
+        </p:txBody>
+      </p:sp>
+      <p:sp>
+        <p:nvSpPr>
+          <p:cNvPr id="25" name="TextBox 24"/>
+          <p:cNvSpPr txBox="1"/>
+          <p:nvPr/>
+        </p:nvSpPr>
+        <p:spPr>
+          <a:xfrm>
+            <a:off x="3017520" y="5303520"/>
+            <a:ext cx="8412480" cy="457200"/>
+          </a:xfrm>
+          <a:prstGeom prst="rect">
+            <a:avLst/>
+          </a:prstGeom>
+          <a:noFill/>
+        </p:spPr>
+        <p:txBody>
+          <a:bodyPr wrap="square" anchor="t">
+            <a:spAutoFit/>
+          </a:bodyPr>
+          <a:lstStyle/>
+          <a:p>
+            <a:pPr algn="l"/>
             <a:r>
               <a:rPr sz="1300" b="0">
                 <a:solidFill>
-                  <a:srgbClr val="1A2420"/>
-                </a:solidFill>
-                <a:latin typeface="微软雅黑"/>
-                <a:ea typeface="微软雅黑"/>
-              </a:rPr>
-              <a:t>14:20–14:40  港大经管：学位通道与华东布局（招生官主持）</a:t>
-            </a:r>
-          </a:p>
-          <a:p>
-            <a:pPr>
-              <a:lnSpc>
-                <a:spcPct val="115000"/>
-              </a:lnSpc>
-              <a:spcAft>
-                <a:spcPts val="600"/>
-              </a:spcAft>
-            </a:pPr>
-            <a:r>
-              <a:rPr sz="1100" b="1">
-                <a:solidFill>
-                  <a:srgbClr val="C4A35A"/>
-                </a:solidFill>
-                <a:latin typeface="微软雅黑"/>
-                <a:ea typeface="微软雅黑"/>
-              </a:rPr>
-              <a:t>●  </a:t>
-            </a:r>
-            <a:r>
-              <a:rPr sz="1300" b="0">
-                <a:solidFill>
-                  <a:srgbClr val="1A2420"/>
-                </a:solidFill>
-                <a:latin typeface="微软雅黑"/>
-                <a:ea typeface="微软雅黑"/>
-              </a:rPr>
-              <a:t>14:40–15:30  主题分享（港大师资或杰出校友，院方指定）</a:t>
-            </a:r>
-          </a:p>
-          <a:p>
-            <a:pPr>
-              <a:lnSpc>
-                <a:spcPct val="115000"/>
-              </a:lnSpc>
-              <a:spcAft>
-                <a:spcPts val="600"/>
-              </a:spcAft>
-            </a:pPr>
-            <a:r>
-              <a:rPr sz="1100" b="1">
-                <a:solidFill>
-                  <a:srgbClr val="C4A35A"/>
-                </a:solidFill>
-                <a:latin typeface="微软雅黑"/>
-                <a:ea typeface="微软雅黑"/>
-              </a:rPr>
-              <a:t>●  </a:t>
-            </a:r>
-            <a:r>
-              <a:rPr sz="1300" b="0">
-                <a:solidFill>
-                  <a:srgbClr val="1A2420"/>
-                </a:solidFill>
-                <a:latin typeface="微软雅黑"/>
-                <a:ea typeface="微软雅黑"/>
-              </a:rPr>
-              <a:t>15:30–16:10  产业对谈（我方议题主理 + 1–2 位到场企业家）</a:t>
-            </a:r>
-          </a:p>
-          <a:p>
-            <a:pPr>
-              <a:lnSpc>
-                <a:spcPct val="115000"/>
-              </a:lnSpc>
-              <a:spcAft>
-                <a:spcPts val="600"/>
-              </a:spcAft>
-            </a:pPr>
-            <a:r>
-              <a:rPr sz="1100" b="1">
-                <a:solidFill>
-                  <a:srgbClr val="C4A35A"/>
-                </a:solidFill>
-                <a:latin typeface="微软雅黑"/>
-                <a:ea typeface="微软雅黑"/>
-              </a:rPr>
-              <a:t>●  </a:t>
-            </a:r>
-            <a:r>
-              <a:rPr sz="1300" b="0">
-                <a:solidFill>
-                  <a:srgbClr val="1A2420"/>
-                </a:solidFill>
-                <a:latin typeface="微软雅黑"/>
-                <a:ea typeface="微软雅黑"/>
-              </a:rPr>
-              <a:t>16:10–16:30  茶歇、一对一卡片交换</a:t>
-            </a:r>
-          </a:p>
-          <a:p>
-            <a:pPr>
-              <a:lnSpc>
-                <a:spcPct val="115000"/>
-              </a:lnSpc>
-              <a:spcAft>
-                <a:spcPts val="600"/>
-              </a:spcAft>
-            </a:pPr>
-            <a:r>
-              <a:rPr sz="1100" b="1">
-                <a:solidFill>
-                  <a:srgbClr val="C4A35A"/>
-                </a:solidFill>
-                <a:latin typeface="微软雅黑"/>
-                <a:ea typeface="微软雅黑"/>
-              </a:rPr>
-              <a:t>●  </a:t>
-            </a:r>
-            <a:r>
-              <a:rPr sz="1300" b="0">
-                <a:solidFill>
-                  <a:srgbClr val="1A2420"/>
-                </a:solidFill>
-                <a:latin typeface="微软雅黑"/>
-                <a:ea typeface="微软雅黑"/>
-              </a:rPr>
-              <a:t>16:30–17:20  闭门问答：谁适合读、时间成本、申请节奏</a:t>
-            </a:r>
-          </a:p>
-          <a:p>
-            <a:pPr>
-              <a:lnSpc>
-                <a:spcPct val="115000"/>
-              </a:lnSpc>
-              <a:spcAft>
-                <a:spcPts val="600"/>
-              </a:spcAft>
-            </a:pPr>
-            <a:r>
-              <a:rPr sz="1100" b="1">
-                <a:solidFill>
-                  <a:srgbClr val="C4A35A"/>
-                </a:solidFill>
-                <a:latin typeface="微软雅黑"/>
-                <a:ea typeface="微软雅黑"/>
-              </a:rPr>
-              <a:t>●  </a:t>
-            </a:r>
-            <a:r>
-              <a:rPr sz="1300" b="0">
-                <a:solidFill>
-                  <a:srgbClr val="1A2420"/>
-                </a:solidFill>
-                <a:latin typeface="微软雅黑"/>
-                <a:ea typeface="微软雅黑"/>
-              </a:rPr>
-              <a:t>17:20–18:00  意向登记、预约面试窗口、合影</a:t>
-            </a:r>
-          </a:p>
-        </p:txBody>
-      </p:sp>
-      <p:sp>
-        <p:nvSpPr>
-          <p:cNvPr id="19" name="TextBox 18"/>
+                  <a:srgbClr val="5B6B64"/>
+                </a:solidFill>
+                <a:latin typeface="微软雅黑"/>
+                <a:ea typeface="微软雅黑"/>
+              </a:rPr>
+              <a:t>复盘转化；出海课联合推广备忘；原创谷/海外模块对接清单（意向，不验收）。</a:t>
+            </a:r>
+          </a:p>
+        </p:txBody>
+      </p:sp>
+      <p:sp>
+        <p:nvSpPr>
+          <p:cNvPr id="26" name="TextBox 25"/>
           <p:cNvSpPr txBox="1"/>
           <p:nvPr/>
         </p:nvSpPr>
@@ -12166,7 +13514,7 @@
                 <a:latin typeface="微软雅黑"/>
                 <a:ea typeface="微软雅黑"/>
               </a:rPr>
-              <a:t>外滩·产业课堂  ·  香港大学经管学院上海中心 × 复旦大学住房政策研究中心、上海市杨浦区科技企业联合会  ·  V1.0 建议稿  ·  2026年9月</a:t>
+              <a:t>外滩·出海课堂  ·  香港大学经管学院上海中心 × 复旦大学住房政策研究中心、上海市杨浦区科技企业联合会  ·  V1.1 建议稿  ·  2026年9月</a:t>
             </a:r>
           </a:p>
         </p:txBody>
@@ -12308,7 +13656,7 @@
                 <a:latin typeface="微软雅黑"/>
                 <a:ea typeface="微软雅黑"/>
               </a:rPr>
-              <a:t>分工：招生官收口，我方把人组织到位</a:t>
+              <a:t>首场怎么开：出海主题可改，赛道不改</a:t>
             </a:r>
           </a:p>
         </p:txBody>
@@ -12344,7 +13692,7 @@
                 <a:latin typeface="微软雅黑"/>
                 <a:ea typeface="微软雅黑"/>
               </a:rPr>
-              <a:t>09/12</a:t>
+              <a:t>09/13</a:t>
             </a:r>
           </a:p>
         </p:txBody>
@@ -12357,8 +13705,8 @@
         </p:nvSpPr>
         <p:spPr>
           <a:xfrm>
-            <a:off x="457200" y="1280160"/>
-            <a:ext cx="5623560" cy="4892040"/>
+            <a:off x="457200" y="1188720"/>
+            <a:ext cx="5029200" cy="5029200"/>
           </a:xfrm>
           <a:prstGeom prst="roundRect">
             <a:avLst>
@@ -12397,20 +13745,346 @@
       </p:sp>
       <p:sp>
         <p:nvSpPr>
-          <p:cNvPr id="7" name="Rectangle 6"/>
+          <p:cNvPr id="7" name="TextBox 6"/>
+          <p:cNvSpPr txBox="1"/>
+          <p:nvPr/>
+        </p:nvSpPr>
+        <p:spPr>
+          <a:xfrm>
+            <a:off x="685800" y="1371600"/>
+            <a:ext cx="4663440" cy="365760"/>
+          </a:xfrm>
+          <a:prstGeom prst="rect">
+            <a:avLst/>
+          </a:prstGeom>
+          <a:noFill/>
+        </p:spPr>
+        <p:txBody>
+          <a:bodyPr wrap="square" anchor="t">
+            <a:spAutoFit/>
+          </a:bodyPr>
+          <a:lstStyle/>
+          <a:p>
+            <a:pPr algn="l"/>
+            <a:r>
+              <a:rPr sz="1600" b="1">
+                <a:solidFill>
+                  <a:srgbClr val="C4A35A"/>
+                </a:solidFill>
+                <a:latin typeface="微软雅黑"/>
+                <a:ea typeface="微软雅黑"/>
+              </a:rPr>
+              <a:t>首场建议主题（可改，赛道不改）</a:t>
+            </a:r>
+          </a:p>
+        </p:txBody>
+      </p:sp>
+      <p:sp>
+        <p:nvSpPr>
+          <p:cNvPr id="8" name="TextBox 7"/>
+          <p:cNvSpPr txBox="1"/>
+          <p:nvPr/>
+        </p:nvSpPr>
+        <p:spPr>
+          <a:xfrm>
+            <a:off x="685800" y="1874519"/>
+            <a:ext cx="4663440" cy="274320"/>
+          </a:xfrm>
+          <a:prstGeom prst="rect">
+            <a:avLst/>
+          </a:prstGeom>
+          <a:noFill/>
+        </p:spPr>
+        <p:txBody>
+          <a:bodyPr wrap="square" anchor="t">
+            <a:spAutoFit/>
+          </a:bodyPr>
+          <a:lstStyle/>
+          <a:p>
+            <a:pPr algn="l"/>
+            <a:r>
+              <a:rPr sz="1200" b="1">
+                <a:solidFill>
+                  <a:srgbClr val="003D2E"/>
+                </a:solidFill>
+                <a:latin typeface="微软雅黑"/>
+                <a:ea typeface="微软雅黑"/>
+              </a:rPr>
+              <a:t>主题</a:t>
+            </a:r>
+          </a:p>
+        </p:txBody>
+      </p:sp>
+      <p:sp>
+        <p:nvSpPr>
+          <p:cNvPr id="9" name="TextBox 8"/>
+          <p:cNvSpPr txBox="1"/>
+          <p:nvPr/>
+        </p:nvSpPr>
+        <p:spPr>
+          <a:xfrm>
+            <a:off x="685800" y="2130552"/>
+            <a:ext cx="4663440" cy="640080"/>
+          </a:xfrm>
+          <a:prstGeom prst="rect">
+            <a:avLst/>
+          </a:prstGeom>
+          <a:noFill/>
+        </p:spPr>
+        <p:txBody>
+          <a:bodyPr wrap="square" anchor="t">
+            <a:spAutoFit/>
+          </a:bodyPr>
+          <a:lstStyle/>
+          <a:p>
+            <a:pPr algn="l"/>
+            <a:r>
+              <a:rPr sz="1300" b="0">
+                <a:solidFill>
+                  <a:srgbClr val="1A2420"/>
+                </a:solidFill>
+                <a:latin typeface="微软雅黑"/>
+                <a:ea typeface="微软雅黑"/>
+              </a:rPr>
+              <a:t>企业出海的港大路径：港股、跨境与产业决策</a:t>
+            </a:r>
+          </a:p>
+        </p:txBody>
+      </p:sp>
+      <p:sp>
+        <p:nvSpPr>
+          <p:cNvPr id="10" name="TextBox 9"/>
+          <p:cNvSpPr txBox="1"/>
+          <p:nvPr/>
+        </p:nvSpPr>
+        <p:spPr>
+          <a:xfrm>
+            <a:off x="685800" y="2834639"/>
+            <a:ext cx="4663440" cy="274320"/>
+          </a:xfrm>
+          <a:prstGeom prst="rect">
+            <a:avLst/>
+          </a:prstGeom>
+          <a:noFill/>
+        </p:spPr>
+        <p:txBody>
+          <a:bodyPr wrap="square" anchor="t">
+            <a:spAutoFit/>
+          </a:bodyPr>
+          <a:lstStyle/>
+          <a:p>
+            <a:pPr algn="l"/>
+            <a:r>
+              <a:rPr sz="1200" b="1">
+                <a:solidFill>
+                  <a:srgbClr val="003D2E"/>
+                </a:solidFill>
+                <a:latin typeface="微软雅黑"/>
+                <a:ea typeface="微软雅黑"/>
+              </a:rPr>
+              <a:t>时间</a:t>
+            </a:r>
+          </a:p>
+        </p:txBody>
+      </p:sp>
+      <p:sp>
+        <p:nvSpPr>
+          <p:cNvPr id="11" name="TextBox 10"/>
+          <p:cNvSpPr txBox="1"/>
+          <p:nvPr/>
+        </p:nvSpPr>
+        <p:spPr>
+          <a:xfrm>
+            <a:off x="685800" y="3090672"/>
+            <a:ext cx="4663440" cy="640080"/>
+          </a:xfrm>
+          <a:prstGeom prst="rect">
+            <a:avLst/>
+          </a:prstGeom>
+          <a:noFill/>
+        </p:spPr>
+        <p:txBody>
+          <a:bodyPr wrap="square" anchor="t">
+            <a:spAutoFit/>
+          </a:bodyPr>
+          <a:lstStyle/>
+          <a:p>
+            <a:pPr algn="l"/>
+            <a:r>
+              <a:rPr sz="1300" b="0">
+                <a:solidFill>
+                  <a:srgbClr val="1A2420"/>
+                </a:solidFill>
+                <a:latin typeface="微软雅黑"/>
+                <a:ea typeface="微软雅黑"/>
+              </a:rPr>
+              <a:t>签约后 30–45 日内，工作日下午 14:00–18:00</a:t>
+            </a:r>
+          </a:p>
+        </p:txBody>
+      </p:sp>
+      <p:sp>
+        <p:nvSpPr>
+          <p:cNvPr id="12" name="TextBox 11"/>
+          <p:cNvSpPr txBox="1"/>
+          <p:nvPr/>
+        </p:nvSpPr>
+        <p:spPr>
+          <a:xfrm>
+            <a:off x="685800" y="3794759"/>
+            <a:ext cx="4663440" cy="274320"/>
+          </a:xfrm>
+          <a:prstGeom prst="rect">
+            <a:avLst/>
+          </a:prstGeom>
+          <a:noFill/>
+        </p:spPr>
+        <p:txBody>
+          <a:bodyPr wrap="square" anchor="t">
+            <a:spAutoFit/>
+          </a:bodyPr>
+          <a:lstStyle/>
+          <a:p>
+            <a:pPr algn="l"/>
+            <a:r>
+              <a:rPr sz="1200" b="1">
+                <a:solidFill>
+                  <a:srgbClr val="003D2E"/>
+                </a:solidFill>
+                <a:latin typeface="微软雅黑"/>
+                <a:ea typeface="微软雅黑"/>
+              </a:rPr>
+              <a:t>地点</a:t>
+            </a:r>
+          </a:p>
+        </p:txBody>
+      </p:sp>
+      <p:sp>
+        <p:nvSpPr>
+          <p:cNvPr id="13" name="TextBox 12"/>
+          <p:cNvSpPr txBox="1"/>
+          <p:nvPr/>
+        </p:nvSpPr>
+        <p:spPr>
+          <a:xfrm>
+            <a:off x="685800" y="4050791"/>
+            <a:ext cx="4663440" cy="640080"/>
+          </a:xfrm>
+          <a:prstGeom prst="rect">
+            <a:avLst/>
+          </a:prstGeom>
+          <a:noFill/>
+        </p:spPr>
+        <p:txBody>
+          <a:bodyPr wrap="square" anchor="t">
+            <a:spAutoFit/>
+          </a:bodyPr>
+          <a:lstStyle/>
+          <a:p>
+            <a:pPr algn="l"/>
+            <a:r>
+              <a:rPr sz="1300" b="0">
+                <a:solidFill>
+                  <a:srgbClr val="1A2420"/>
+                </a:solidFill>
+                <a:latin typeface="微软雅黑"/>
+                <a:ea typeface="微软雅黑"/>
+              </a:rPr>
+              <a:t>港大经管学院上海中心（外滩 SOHO F 栋）</a:t>
+            </a:r>
+          </a:p>
+        </p:txBody>
+      </p:sp>
+      <p:sp>
+        <p:nvSpPr>
+          <p:cNvPr id="14" name="TextBox 13"/>
+          <p:cNvSpPr txBox="1"/>
+          <p:nvPr/>
+        </p:nvSpPr>
+        <p:spPr>
+          <a:xfrm>
+            <a:off x="685800" y="4754879"/>
+            <a:ext cx="4663440" cy="274320"/>
+          </a:xfrm>
+          <a:prstGeom prst="rect">
+            <a:avLst/>
+          </a:prstGeom>
+          <a:noFill/>
+        </p:spPr>
+        <p:txBody>
+          <a:bodyPr wrap="square" anchor="t">
+            <a:spAutoFit/>
+          </a:bodyPr>
+          <a:lstStyle/>
+          <a:p>
+            <a:pPr algn="l"/>
+            <a:r>
+              <a:rPr sz="1200" b="1">
+                <a:solidFill>
+                  <a:srgbClr val="003D2E"/>
+                </a:solidFill>
+                <a:latin typeface="微软雅黑"/>
+                <a:ea typeface="微软雅黑"/>
+              </a:rPr>
+              <a:t>人群</a:t>
+            </a:r>
+          </a:p>
+        </p:txBody>
+      </p:sp>
+      <p:sp>
+        <p:nvSpPr>
+          <p:cNvPr id="15" name="TextBox 14"/>
+          <p:cNvSpPr txBox="1"/>
+          <p:nvPr/>
+        </p:nvSpPr>
+        <p:spPr>
+          <a:xfrm>
+            <a:off x="685800" y="5010912"/>
+            <a:ext cx="4663440" cy="640080"/>
+          </a:xfrm>
+          <a:prstGeom prst="rect">
+            <a:avLst/>
+          </a:prstGeom>
+          <a:noFill/>
+        </p:spPr>
+        <p:txBody>
+          <a:bodyPr wrap="square" anchor="t">
+            <a:spAutoFit/>
+          </a:bodyPr>
+          <a:lstStyle/>
+          <a:p>
+            <a:pPr algn="l"/>
+            <a:r>
+              <a:rPr sz="1300" b="0">
+                <a:solidFill>
+                  <a:srgbClr val="1A2420"/>
+                </a:solidFill>
+                <a:latin typeface="微软雅黑"/>
+                <a:ea typeface="微软雅黑"/>
+              </a:rPr>
+              <a:t>有出海或港股意向的企业主/高管，辅以科企联与产业决策者</a:t>
+            </a:r>
+          </a:p>
+        </p:txBody>
+      </p:sp>
+      <p:sp>
+        <p:nvSpPr>
+          <p:cNvPr id="16" name="Rounded Rectangle 15"/>
           <p:cNvSpPr/>
           <p:nvPr/>
         </p:nvSpPr>
         <p:spPr>
           <a:xfrm>
-            <a:off x="457200" y="1280160"/>
-            <a:ext cx="5623560" cy="640080"/>
-          </a:xfrm>
-          <a:prstGeom prst="rect">
-            <a:avLst/>
+            <a:off x="5669280" y="1188720"/>
+            <a:ext cx="6035040" cy="5029200"/>
+          </a:xfrm>
+          <a:prstGeom prst="roundRect">
+            <a:avLst>
+              <a:gd name="adj" fmla="val 8000"/>
+            </a:avLst>
           </a:prstGeom>
           <a:solidFill>
-            <a:srgbClr val="003D2E"/>
+            <a:srgbClr val="F7F4EC"/>
           </a:solidFill>
           <a:ln>
             <a:noFill/>
@@ -12441,50 +14115,50 @@
       </p:sp>
       <p:sp>
         <p:nvSpPr>
-          <p:cNvPr id="8" name="TextBox 7"/>
-          <p:cNvSpPr txBox="1"/>
-          <p:nvPr/>
-        </p:nvSpPr>
-        <p:spPr>
-          <a:xfrm>
-            <a:off x="457200" y="1280160"/>
-            <a:ext cx="5623560" cy="640080"/>
-          </a:xfrm>
-          <a:prstGeom prst="rect">
-            <a:avLst/>
-          </a:prstGeom>
-          <a:noFill/>
-        </p:spPr>
-        <p:txBody>
-          <a:bodyPr wrap="square" anchor="ctr">
-            <a:spAutoFit/>
-          </a:bodyPr>
-          <a:lstStyle/>
-          <a:p>
-            <a:pPr algn="ctr"/>
-            <a:r>
-              <a:rPr sz="1800" b="1">
-                <a:solidFill>
-                  <a:srgbClr val="FFFFFF"/>
-                </a:solidFill>
-                <a:latin typeface="微软雅黑"/>
-                <a:ea typeface="微软雅黑"/>
-              </a:rPr>
-              <a:t>港大经管上海中心</a:t>
-            </a:r>
-          </a:p>
-        </p:txBody>
-      </p:sp>
-      <p:sp>
-        <p:nvSpPr>
-          <p:cNvPr id="9" name="TextBox 8"/>
-          <p:cNvSpPr txBox="1"/>
-          <p:nvPr/>
-        </p:nvSpPr>
-        <p:spPr>
-          <a:xfrm>
-            <a:off x="731520" y="2103120"/>
-            <a:ext cx="5074920" cy="3749039"/>
+          <p:cNvPr id="17" name="TextBox 16"/>
+          <p:cNvSpPr txBox="1"/>
+          <p:nvPr/>
+        </p:nvSpPr>
+        <p:spPr>
+          <a:xfrm>
+            <a:off x="5897880" y="1371600"/>
+            <a:ext cx="5669280" cy="365760"/>
+          </a:xfrm>
+          <a:prstGeom prst="rect">
+            <a:avLst/>
+          </a:prstGeom>
+          <a:noFill/>
+        </p:spPr>
+        <p:txBody>
+          <a:bodyPr wrap="square" anchor="t">
+            <a:spAutoFit/>
+          </a:bodyPr>
+          <a:lstStyle/>
+          <a:p>
+            <a:pPr algn="l"/>
+            <a:r>
+              <a:rPr sz="1600" b="1">
+                <a:solidFill>
+                  <a:srgbClr val="003D2E"/>
+                </a:solidFill>
+                <a:latin typeface="微软雅黑"/>
+                <a:ea typeface="微软雅黑"/>
+              </a:rPr>
+              <a:t>半日议程</a:t>
+            </a:r>
+          </a:p>
+        </p:txBody>
+      </p:sp>
+      <p:sp>
+        <p:nvSpPr>
+          <p:cNvPr id="18" name="TextBox 17"/>
+          <p:cNvSpPr txBox="1"/>
+          <p:nvPr/>
+        </p:nvSpPr>
+        <p:spPr>
+          <a:xfrm>
+            <a:off x="5897880" y="1828800"/>
+            <a:ext cx="5623560" cy="4114800"/>
           </a:xfrm>
           <a:prstGeom prst="rect">
             <a:avLst/>
@@ -12502,11 +14176,11 @@
                 <a:spcPct val="115000"/>
               </a:lnSpc>
               <a:spcAft>
-                <a:spcPts val="1000"/>
+                <a:spcPts val="600"/>
               </a:spcAft>
             </a:pPr>
             <a:r>
-              <a:rPr sz="1300" b="1">
+              <a:rPr sz="1100" b="1">
                 <a:solidFill>
                   <a:srgbClr val="C4A35A"/>
                 </a:solidFill>
@@ -12516,14 +14190,14 @@
               <a:t>●  </a:t>
             </a:r>
             <a:r>
-              <a:rPr sz="1500" b="0">
+              <a:rPr sz="1300" b="0">
                 <a:solidFill>
                   <a:srgbClr val="1A2420"/>
                 </a:solidFill>
                 <a:latin typeface="微软雅黑"/>
                 <a:ea typeface="微软雅黑"/>
               </a:rPr>
-              <a:t>提供外滩中心场地、品牌授权与招生口径</a:t>
+              <a:t>14:00–14:20  签到、合影、中心与百年校庆墙简介</a:t>
             </a:r>
           </a:p>
           <a:p>
@@ -12532,11 +14206,11 @@
                 <a:spcPct val="115000"/>
               </a:lnSpc>
               <a:spcAft>
-                <a:spcPts val="1000"/>
+                <a:spcPts val="600"/>
               </a:spcAft>
             </a:pPr>
             <a:r>
-              <a:rPr sz="1300" b="1">
+              <a:rPr sz="1100" b="1">
                 <a:solidFill>
                   <a:srgbClr val="C4A35A"/>
                 </a:solidFill>
@@ -12546,14 +14220,14 @@
               <a:t>●  </a:t>
             </a:r>
             <a:r>
-              <a:rPr sz="1500" b="0">
+              <a:rPr sz="1300" b="0">
                 <a:solidFill>
                   <a:srgbClr val="1A2420"/>
                 </a:solidFill>
                 <a:latin typeface="微软雅黑"/>
                 <a:ea typeface="微软雅黑"/>
               </a:rPr>
-              <a:t>指定师资/校友嘉宾，安排招生官现场主持与一对一</a:t>
+              <a:t>14:20–14:40  港大经管：出海优势与华东布局（招生官主持）</a:t>
             </a:r>
           </a:p>
           <a:p>
@@ -12562,11 +14236,11 @@
                 <a:spcPct val="115000"/>
               </a:lnSpc>
               <a:spcAft>
-                <a:spcPts val="1000"/>
+                <a:spcPts val="600"/>
               </a:spcAft>
             </a:pPr>
             <a:r>
-              <a:rPr sz="1300" b="1">
+              <a:rPr sz="1100" b="1">
                 <a:solidFill>
                   <a:srgbClr val="C4A35A"/>
                 </a:solidFill>
@@ -12576,14 +14250,14 @@
               <a:t>●  </a:t>
             </a:r>
             <a:r>
-              <a:rPr sz="1500" b="0">
+              <a:rPr sz="1300" b="0">
                 <a:solidFill>
                   <a:srgbClr val="1A2420"/>
                 </a:solidFill>
                 <a:latin typeface="微软雅黑"/>
                 <a:ea typeface="微软雅黑"/>
               </a:rPr>
-              <a:t>负责面试、录取、学位等学院内部流程</a:t>
+              <a:t>14:40–15:30  主题分享（港大师资或校友，院方指定，聚焦出海/港股）</a:t>
             </a:r>
           </a:p>
           <a:p>
@@ -12592,11 +14266,11 @@
                 <a:spcPct val="115000"/>
               </a:lnSpc>
               <a:spcAft>
-                <a:spcPts val="1000"/>
+                <a:spcPts val="600"/>
               </a:spcAft>
             </a:pPr>
             <a:r>
-              <a:rPr sz="1300" b="1">
+              <a:rPr sz="1100" b="1">
                 <a:solidFill>
                   <a:srgbClr val="C4A35A"/>
                 </a:solidFill>
@@ -12606,176 +14280,27 @@
               <a:t>●  </a:t>
             </a:r>
             <a:r>
-              <a:rPr sz="1500" b="0">
+              <a:rPr sz="1300" b="0">
                 <a:solidFill>
                   <a:srgbClr val="1A2420"/>
                 </a:solidFill>
                 <a:latin typeface="微软雅黑"/>
                 <a:ea typeface="微软雅黑"/>
               </a:rPr>
-              <a:t>指定唯一接口人（建议：潘嘉琰）</a:t>
-            </a:r>
-          </a:p>
-        </p:txBody>
-      </p:sp>
-      <p:sp>
-        <p:nvSpPr>
-          <p:cNvPr id="10" name="Rounded Rectangle 9"/>
-          <p:cNvSpPr/>
-          <p:nvPr/>
-        </p:nvSpPr>
-        <p:spPr>
-          <a:xfrm>
-            <a:off x="6309360" y="1280160"/>
-            <a:ext cx="5623560" cy="4892040"/>
-          </a:xfrm>
-          <a:prstGeom prst="roundRect">
-            <a:avLst>
-              <a:gd name="adj" fmla="val 8000"/>
-            </a:avLst>
-          </a:prstGeom>
-          <a:solidFill>
-            <a:srgbClr val="FFFFFF"/>
-          </a:solidFill>
-          <a:ln>
-            <a:noFill/>
-          </a:ln>
-          <a:effectLst/>
-        </p:spPr>
-        <p:style>
-          <a:lnRef idx="1">
-            <a:schemeClr val="accent1"/>
-          </a:lnRef>
-          <a:fillRef idx="3">
-            <a:schemeClr val="accent1"/>
-          </a:fillRef>
-          <a:effectRef idx="2">
-            <a:schemeClr val="accent1"/>
-          </a:effectRef>
-          <a:fontRef idx="minor">
-            <a:schemeClr val="lt1"/>
-          </a:fontRef>
-        </p:style>
-        <p:txBody>
-          <a:bodyPr rtlCol="0" anchor="ctr"/>
-          <a:lstStyle/>
-          <a:p>
-            <a:pPr algn="ctr"/>
-          </a:p>
-        </p:txBody>
-      </p:sp>
-      <p:sp>
-        <p:nvSpPr>
-          <p:cNvPr id="11" name="Rectangle 10"/>
-          <p:cNvSpPr/>
-          <p:nvPr/>
-        </p:nvSpPr>
-        <p:spPr>
-          <a:xfrm>
-            <a:off x="6309360" y="1280160"/>
-            <a:ext cx="5623560" cy="640080"/>
-          </a:xfrm>
-          <a:prstGeom prst="rect">
-            <a:avLst/>
-          </a:prstGeom>
-          <a:solidFill>
-            <a:srgbClr val="0A5C46"/>
-          </a:solidFill>
-          <a:ln>
-            <a:noFill/>
-          </a:ln>
-          <a:effectLst/>
-        </p:spPr>
-        <p:style>
-          <a:lnRef idx="1">
-            <a:schemeClr val="accent1"/>
-          </a:lnRef>
-          <a:fillRef idx="3">
-            <a:schemeClr val="accent1"/>
-          </a:fillRef>
-          <a:effectRef idx="2">
-            <a:schemeClr val="accent1"/>
-          </a:effectRef>
-          <a:fontRef idx="minor">
-            <a:schemeClr val="lt1"/>
-          </a:fontRef>
-        </p:style>
-        <p:txBody>
-          <a:bodyPr rtlCol="0" anchor="ctr"/>
-          <a:lstStyle/>
-          <a:p>
-            <a:pPr algn="ctr"/>
-          </a:p>
-        </p:txBody>
-      </p:sp>
-      <p:sp>
-        <p:nvSpPr>
-          <p:cNvPr id="12" name="TextBox 11"/>
-          <p:cNvSpPr txBox="1"/>
-          <p:nvPr/>
-        </p:nvSpPr>
-        <p:spPr>
-          <a:xfrm>
-            <a:off x="6309360" y="1280160"/>
-            <a:ext cx="5623560" cy="640080"/>
-          </a:xfrm>
-          <a:prstGeom prst="rect">
-            <a:avLst/>
-          </a:prstGeom>
-          <a:noFill/>
-        </p:spPr>
-        <p:txBody>
-          <a:bodyPr wrap="square" anchor="ctr">
-            <a:spAutoFit/>
-          </a:bodyPr>
-          <a:lstStyle/>
-          <a:p>
-            <a:pPr algn="ctr"/>
-            <a:r>
-              <a:rPr sz="1800" b="1">
-                <a:solidFill>
-                  <a:srgbClr val="FFFFFF"/>
-                </a:solidFill>
-                <a:latin typeface="微软雅黑"/>
-                <a:ea typeface="微软雅黑"/>
-              </a:rPr>
-              <a:t>联合策划方</a:t>
-            </a:r>
-          </a:p>
-        </p:txBody>
-      </p:sp>
-      <p:sp>
-        <p:nvSpPr>
-          <p:cNvPr id="13" name="TextBox 12"/>
-          <p:cNvSpPr txBox="1"/>
-          <p:nvPr/>
-        </p:nvSpPr>
-        <p:spPr>
-          <a:xfrm>
-            <a:off x="6583680" y="2103120"/>
-            <a:ext cx="5074920" cy="3749039"/>
-          </a:xfrm>
-          <a:prstGeom prst="rect">
-            <a:avLst/>
-          </a:prstGeom>
-          <a:noFill/>
-        </p:spPr>
-        <p:txBody>
-          <a:bodyPr wrap="square">
-            <a:spAutoFit/>
-          </a:bodyPr>
-          <a:lstStyle/>
+              <a:t>15:30–16:10  产业对谈（我方议题主理 + 1–2 位到场企业家）</a:t>
+            </a:r>
+          </a:p>
           <a:p>
             <a:pPr>
               <a:lnSpc>
                 <a:spcPct val="115000"/>
               </a:lnSpc>
               <a:spcAft>
-                <a:spcPts val="1000"/>
+                <a:spcPts val="600"/>
               </a:spcAft>
             </a:pPr>
             <a:r>
-              <a:rPr sz="1300" b="1">
+              <a:rPr sz="1100" b="1">
                 <a:solidFill>
                   <a:srgbClr val="C4A35A"/>
                 </a:solidFill>
@@ -12785,14 +14310,14 @@
               <a:t>●  </a:t>
             </a:r>
             <a:r>
-              <a:rPr sz="1500" b="0">
+              <a:rPr sz="1300" b="0">
                 <a:solidFill>
                   <a:srgbClr val="1A2420"/>
                 </a:solidFill>
                 <a:latin typeface="微软雅黑"/>
                 <a:ea typeface="微软雅黑"/>
               </a:rPr>
-              <a:t>90 天策划、议题设计、邀约执行与现场统筹</a:t>
+              <a:t>16:10–16:30  茶歇、一对一卡片交换</a:t>
             </a:r>
           </a:p>
           <a:p>
@@ -12801,11 +14326,11 @@
                 <a:spcPct val="115000"/>
               </a:lnSpc>
               <a:spcAft>
-                <a:spcPts val="1000"/>
+                <a:spcPts val="600"/>
               </a:spcAft>
             </a:pPr>
             <a:r>
-              <a:rPr sz="1300" b="1">
+              <a:rPr sz="1100" b="1">
                 <a:solidFill>
                   <a:srgbClr val="C4A35A"/>
                 </a:solidFill>
@@ -12815,14 +14340,14 @@
               <a:t>●  </a:t>
             </a:r>
             <a:r>
-              <a:rPr sz="1500" b="0">
+              <a:rPr sz="1300" b="0">
                 <a:solidFill>
                   <a:srgbClr val="1A2420"/>
                 </a:solidFill>
                 <a:latin typeface="微软雅黑"/>
                 <a:ea typeface="微软雅黑"/>
               </a:rPr>
-              <a:t>提供定向高管名单并完成会前确认</a:t>
+              <a:t>16:30–17:20  闭门问答：谁适合读、时间成本、申请节奏</a:t>
             </a:r>
           </a:p>
           <a:p>
@@ -12831,11 +14356,11 @@
                 <a:spcPct val="115000"/>
               </a:lnSpc>
               <a:spcAft>
-                <a:spcPts val="1000"/>
+                <a:spcPts val="600"/>
               </a:spcAft>
             </a:pPr>
             <a:r>
-              <a:rPr sz="1300" b="1">
+              <a:rPr sz="1100" b="1">
                 <a:solidFill>
                   <a:srgbClr val="C4A35A"/>
                 </a:solidFill>
@@ -12845,51 +14370,21 @@
               <a:t>●  </a:t>
             </a:r>
             <a:r>
-              <a:rPr sz="1500" b="0">
+              <a:rPr sz="1300" b="0">
                 <a:solidFill>
                   <a:srgbClr val="1A2420"/>
                 </a:solidFill>
                 <a:latin typeface="微软雅黑"/>
                 <a:ea typeface="微软雅黑"/>
               </a:rPr>
-              <a:t>会后纪要、意向分级、协助预约面试窗口</a:t>
-            </a:r>
-          </a:p>
-          <a:p>
-            <a:pPr>
-              <a:lnSpc>
-                <a:spcPct val="115000"/>
-              </a:lnSpc>
-              <a:spcAft>
-                <a:spcPts val="1000"/>
-              </a:spcAft>
-            </a:pPr>
-            <a:r>
-              <a:rPr sz="1300" b="1">
-                <a:solidFill>
-                  <a:srgbClr val="C4A35A"/>
-                </a:solidFill>
-                <a:latin typeface="微软雅黑"/>
-                <a:ea typeface="微软雅黑"/>
-              </a:rPr>
-              <a:t>●  </a:t>
-            </a:r>
-            <a:r>
-              <a:rPr sz="1500" b="0">
-                <a:solidFill>
-                  <a:srgbClr val="1A2420"/>
-                </a:solidFill>
-                <a:latin typeface="微软雅黑"/>
-                <a:ea typeface="微软雅黑"/>
-              </a:rPr>
-              <a:t>指定运营结算主体开票、收款、对账</a:t>
-            </a:r>
-          </a:p>
-        </p:txBody>
-      </p:sp>
-      <p:sp>
-        <p:nvSpPr>
-          <p:cNvPr id="14" name="TextBox 13"/>
+              <a:t>17:20–18:00  意向登记、预约面试窗口、合影</a:t>
+            </a:r>
+          </a:p>
+        </p:txBody>
+      </p:sp>
+      <p:sp>
+        <p:nvSpPr>
+          <p:cNvPr id="19" name="TextBox 18"/>
           <p:cNvSpPr txBox="1"/>
           <p:nvPr/>
         </p:nvSpPr>
@@ -12918,7 +14413,7 @@
                 <a:latin typeface="微软雅黑"/>
                 <a:ea typeface="微软雅黑"/>
               </a:rPr>
-              <a:t>外滩·产业课堂  ·  香港大学经管学院上海中心 × 复旦大学住房政策研究中心、上海市杨浦区科技企业联合会  ·  V1.0 建议稿  ·  2026年9月</a:t>
+              <a:t>外滩·出海课堂  ·  香港大学经管学院上海中心 × 复旦大学住房政策研究中心、上海市杨浦区科技企业联合会  ·  V1.1 建议稿  ·  2026年9月</a:t>
             </a:r>
           </a:p>
         </p:txBody>
